--- a/AI_Master_Project_최종발표_김종열_07131.pptx
+++ b/AI_Master_Project_최종발표_김종열_07131.pptx
@@ -5,13 +5,14 @@
     <p:sldMasterId id="2147483648" r:id="rId1"/>
   </p:sldMasterIdLst>
   <p:notesMasterIdLst>
-    <p:notesMasterId r:id="rId6"/>
+    <p:notesMasterId r:id="rId7"/>
   </p:notesMasterIdLst>
   <p:sldIdLst>
     <p:sldId id="256" r:id="rId2"/>
     <p:sldId id="257" r:id="rId3"/>
     <p:sldId id="258" r:id="rId4"/>
     <p:sldId id="259" r:id="rId5"/>
+    <p:sldId id="260" r:id="rId6"/>
   </p:sldIdLst>
   <p:sldSz cx="9144000" cy="5143500" type="screen16x9"/>
   <p:notesSz cx="5143500" cy="9144000"/>
@@ -468,7 +469,27 @@
               <a:t>【작성 가이드 — 기술 아키텍처 (권장 4분)】
 ● 다이어그램 (2분)
   - 시스템 전체 흐름이 한눈에 보여야 합니다
-  - 사용자 입력 → 처리 → 결과 흐름을 화살표로 표시하세요
+  - 사용자 </a:t>
+            </a:r>
+            <a:r>
+              <a:rPr lang="en-US"/>
+              <a:t>입력 </a:t>
+            </a:r>
+            <a:r>
+              <a:rPr lang="en-US" smtClean="0"/>
+              <a:t>&gt; </a:t>
+            </a:r>
+            <a:r>
+              <a:rPr lang="en-US"/>
+              <a:t>처리 </a:t>
+            </a:r>
+            <a:r>
+              <a:rPr lang="en-US" smtClean="0"/>
+              <a:t>&gt; </a:t>
+            </a:r>
+            <a:r>
+              <a:rPr lang="en-US" dirty="0"/>
+              <a:t>결과 흐름을 화살표로 표시하세요
   - 컴포넌트 이름은 실제 기술명 사용 (예: LangGraph, Pinecone, GPT-4)
 ● 기술 선택 이유 (2분)
   - 심사위원은 LangGraph, LangChain을 '기본'으로 간주합니다
@@ -602,6 +623,103 @@
     <p:extLst>
       <p:ext uri="{BB962C8B-B14F-4D97-AF65-F5344CB8AC3E}">
         <p14:creationId xmlns:p14="http://schemas.microsoft.com/office/powerpoint/2010/main" val="1024086991"/>
+      </p:ext>
+    </p:extLst>
+  </p:cSld>
+  <p:clrMapOvr>
+    <a:masterClrMapping/>
+  </p:clrMapOvr>
+</p:notes>
+</file>
+
+<file path=ppt/notesSlides/notesSlide5.xml><?xml version="1.0" encoding="utf-8"?>
+<p:notes xmlns:a="http://schemas.openxmlformats.org/drawingml/2006/main" xmlns:r="http://schemas.openxmlformats.org/officeDocument/2006/relationships" xmlns:p="http://schemas.openxmlformats.org/presentationml/2006/main">
+  <p:cSld>
+    <p:spTree>
+      <p:nvGrpSpPr>
+        <p:cNvPr id="1" name=""/>
+        <p:cNvGrpSpPr/>
+        <p:nvPr/>
+      </p:nvGrpSpPr>
+      <p:grpSpPr>
+        <a:xfrm>
+          <a:off x="0" y="0"/>
+          <a:ext cx="0" cy="0"/>
+          <a:chOff x="0" y="0"/>
+          <a:chExt cx="0" cy="0"/>
+        </a:xfrm>
+      </p:grpSpPr>
+      <p:sp>
+        <p:nvSpPr>
+          <p:cNvPr id="2" name="Slide Image Placeholder 1"/>
+          <p:cNvSpPr>
+            <a:spLocks noGrp="1" noRot="1" noChangeAspect="1"/>
+          </p:cNvSpPr>
+          <p:nvPr>
+            <p:ph type="sldImg"/>
+          </p:nvPr>
+        </p:nvSpPr>
+        <p:spPr/>
+      </p:sp>
+      <p:sp>
+        <p:nvSpPr>
+          <p:cNvPr id="3" name="Notes Placeholder 2"/>
+          <p:cNvSpPr>
+            <a:spLocks noGrp="1"/>
+          </p:cNvSpPr>
+          <p:nvPr>
+            <p:ph type="body" idx="1"/>
+          </p:nvPr>
+        </p:nvSpPr>
+        <p:spPr/>
+        <p:txBody>
+          <a:bodyPr/>
+          <a:lstStyle/>
+          <a:p>
+            <a:r>
+              <a:rPr lang="en-US" dirty="0"/>
+              <a:t>【작성 가이드 — 핵심 기술 과제 (권장 4분)】
+● 핵심 기술 난제 (1분)
+  - '왜 단순 구현으로 안 되는가'를 먼저 설명하세요
+  - 심사위원은 단순 RAG / ReAct를 기본으로 봅니다. 그 한계를 명확히 제시하세요
+● 엔지니어링 접근 (2분)
+  - Agent의 '생각(로그)'이 고수준임을 증명해야 합니다
+  - 시연 시 단순 Tool Call이 아닌 Planning / Self-Correction 로그를 보여주세요
+  - 참고 논문 / 기술이 있다면 언급하면 고득점 포인트가 됩니다
+● 결과 (1분)
+  - 반드시 수치로 증명하세요
+  - 직접 측정이 어려운 경우 '이전 대비' 상대 수치 사용</a:t>
+            </a:r>
+          </a:p>
+        </p:txBody>
+      </p:sp>
+      <p:sp>
+        <p:nvSpPr>
+          <p:cNvPr id="4" name="Slide Number Placeholder 3"/>
+          <p:cNvSpPr>
+            <a:spLocks noGrp="1"/>
+          </p:cNvSpPr>
+          <p:nvPr>
+            <p:ph type="sldNum" sz="quarter" idx="10"/>
+          </p:nvPr>
+        </p:nvSpPr>
+        <p:spPr/>
+        <p:txBody>
+          <a:bodyPr/>
+          <a:lstStyle/>
+          <a:p>
+            <a:fld id="{F7021451-1387-4CA6-816F-3879F97B5CBC}" type="slidenum">
+              <a:rPr lang="en-US"/>
+              <a:t>5</a:t>
+            </a:fld>
+            <a:endParaRPr lang="en-US"/>
+          </a:p>
+        </p:txBody>
+      </p:sp>
+    </p:spTree>
+    <p:extLst>
+      <p:ext uri="{BB962C8B-B14F-4D97-AF65-F5344CB8AC3E}">
+        <p14:creationId xmlns:p14="http://schemas.microsoft.com/office/powerpoint/2010/main" val="2811613379"/>
       </p:ext>
     </p:extLst>
   </p:cSld>
@@ -1704,125 +1822,779 @@
               <a:buNone/>
             </a:pPr>
             <a:r>
-              <a:rPr sz="900" b="1">
-                <a:solidFill>
-                  <a:srgbClr val="333333"/>
-                </a:solidFill>
-                <a:latin typeface="Arial"/>
-              </a:rPr>
-              <a:t>· 분산된 산출물</a:t>
-            </a:r>
-            <a:endParaRPr lang="en-US" sz="900" dirty="0"/>
+              <a:rPr sz="800" b="1" dirty="0">
+                <a:solidFill>
+                  <a:srgbClr val="333333"/>
+                </a:solidFill>
+                <a:latin typeface="Arial"/>
+              </a:rPr>
+              <a:t>· </a:t>
+            </a:r>
+            <a:r>
+              <a:rPr sz="800" b="1" dirty="0" err="1">
+                <a:solidFill>
+                  <a:srgbClr val="333333"/>
+                </a:solidFill>
+                <a:latin typeface="Arial"/>
+              </a:rPr>
+              <a:t>분산된</a:t>
+            </a:r>
+            <a:r>
+              <a:rPr sz="800" b="1" dirty="0">
+                <a:solidFill>
+                  <a:srgbClr val="333333"/>
+                </a:solidFill>
+                <a:latin typeface="Arial"/>
+              </a:rPr>
+              <a:t> </a:t>
+            </a:r>
+            <a:r>
+              <a:rPr sz="800" b="1" dirty="0" err="1">
+                <a:solidFill>
+                  <a:srgbClr val="333333"/>
+                </a:solidFill>
+                <a:latin typeface="Arial"/>
+              </a:rPr>
+              <a:t>산출물</a:t>
+            </a:r>
+            <a:endParaRPr lang="en-US" sz="800" dirty="0"/>
           </a:p>
           <a:p>
             <a:r>
-              <a:rPr sz="900" b="1">
-                <a:solidFill>
-                  <a:srgbClr val="333333"/>
-                </a:solidFill>
-                <a:latin typeface="Arial"/>
-              </a:rPr>
-              <a:t>  요구사항·설계·구현·테스트가 다른 위치에 흩어져 단일 출처(SSOT)가 부재</a:t>
-            </a:r>
+              <a:rPr sz="800" b="1" dirty="0">
+                <a:solidFill>
+                  <a:srgbClr val="333333"/>
+                </a:solidFill>
+                <a:latin typeface="Arial"/>
+              </a:rPr>
+              <a:t>  </a:t>
+            </a:r>
+            <a:r>
+              <a:rPr sz="800" dirty="0" err="1">
+                <a:solidFill>
+                  <a:srgbClr val="333333"/>
+                </a:solidFill>
+                <a:latin typeface="Arial"/>
+              </a:rPr>
+              <a:t>요구사항·설계·구현·테스트가</a:t>
+            </a:r>
+            <a:r>
+              <a:rPr sz="800" dirty="0">
+                <a:solidFill>
+                  <a:srgbClr val="333333"/>
+                </a:solidFill>
+                <a:latin typeface="Arial"/>
+              </a:rPr>
+              <a:t> </a:t>
+            </a:r>
+            <a:r>
+              <a:rPr sz="800" dirty="0" err="1">
+                <a:solidFill>
+                  <a:srgbClr val="333333"/>
+                </a:solidFill>
+                <a:latin typeface="Arial"/>
+              </a:rPr>
+              <a:t>다른</a:t>
+            </a:r>
+            <a:r>
+              <a:rPr sz="800" dirty="0">
+                <a:solidFill>
+                  <a:srgbClr val="333333"/>
+                </a:solidFill>
+                <a:latin typeface="Arial"/>
+              </a:rPr>
+              <a:t> </a:t>
+            </a:r>
+            <a:r>
+              <a:rPr sz="800" dirty="0" err="1">
+                <a:solidFill>
+                  <a:srgbClr val="333333"/>
+                </a:solidFill>
+                <a:latin typeface="Arial"/>
+              </a:rPr>
+              <a:t>위치에</a:t>
+            </a:r>
+            <a:r>
+              <a:rPr sz="800" dirty="0">
+                <a:solidFill>
+                  <a:srgbClr val="333333"/>
+                </a:solidFill>
+                <a:latin typeface="Arial"/>
+              </a:rPr>
+              <a:t> </a:t>
+            </a:r>
+            <a:r>
+              <a:rPr sz="800" dirty="0" err="1">
+                <a:solidFill>
+                  <a:srgbClr val="333333"/>
+                </a:solidFill>
+                <a:latin typeface="Arial"/>
+              </a:rPr>
+              <a:t>흩어져</a:t>
+            </a:r>
+            <a:r>
+              <a:rPr sz="800" dirty="0">
+                <a:solidFill>
+                  <a:srgbClr val="333333"/>
+                </a:solidFill>
+                <a:latin typeface="Arial"/>
+              </a:rPr>
+              <a:t> </a:t>
+            </a:r>
+            <a:r>
+              <a:rPr sz="800" dirty="0" err="1">
+                <a:solidFill>
+                  <a:srgbClr val="333333"/>
+                </a:solidFill>
+                <a:latin typeface="Arial"/>
+              </a:rPr>
+              <a:t>단일</a:t>
+            </a:r>
+            <a:r>
+              <a:rPr sz="800" dirty="0">
+                <a:solidFill>
+                  <a:srgbClr val="333333"/>
+                </a:solidFill>
+                <a:latin typeface="Arial"/>
+              </a:rPr>
+              <a:t> </a:t>
+            </a:r>
+            <a:r>
+              <a:rPr sz="800" dirty="0" err="1">
+                <a:solidFill>
+                  <a:srgbClr val="333333"/>
+                </a:solidFill>
+                <a:latin typeface="Arial"/>
+              </a:rPr>
+              <a:t>출처</a:t>
+            </a:r>
+            <a:r>
+              <a:rPr sz="800" dirty="0">
+                <a:solidFill>
+                  <a:srgbClr val="333333"/>
+                </a:solidFill>
+                <a:latin typeface="Arial"/>
+              </a:rPr>
+              <a:t>(SSOT)가 </a:t>
+            </a:r>
+            <a:r>
+              <a:rPr sz="800" dirty="0" err="1">
+                <a:solidFill>
+                  <a:srgbClr val="333333"/>
+                </a:solidFill>
+                <a:latin typeface="Arial"/>
+              </a:rPr>
+              <a:t>부재</a:t>
+            </a:r>
+            <a:endParaRPr sz="800" dirty="0">
+              <a:solidFill>
+                <a:srgbClr val="333333"/>
+              </a:solidFill>
+              <a:latin typeface="Arial"/>
+            </a:endParaRPr>
           </a:p>
           <a:p>
-            <a:r>
-              <a:rPr sz="900" b="1">
-                <a:solidFill>
-                  <a:srgbClr val="333333"/>
-                </a:solidFill>
-                <a:latin typeface="Arial"/>
-              </a:rPr>
-              <a:t/>
-            </a:r>
+            <a:endParaRPr sz="800" b="1" dirty="0">
+              <a:solidFill>
+                <a:srgbClr val="333333"/>
+              </a:solidFill>
+              <a:latin typeface="Arial"/>
+            </a:endParaRPr>
           </a:p>
           <a:p>
             <a:r>
-              <a:rPr sz="900" b="1">
-                <a:solidFill>
-                  <a:srgbClr val="333333"/>
-                </a:solidFill>
-                <a:latin typeface="Arial"/>
-              </a:rPr>
-              <a:t>· 중복·모순의 누적</a:t>
-            </a:r>
+              <a:rPr sz="800" b="1" dirty="0">
+                <a:solidFill>
+                  <a:srgbClr val="333333"/>
+                </a:solidFill>
+                <a:latin typeface="Arial"/>
+              </a:rPr>
+              <a:t>· </a:t>
+            </a:r>
+            <a:r>
+              <a:rPr sz="800" b="1" dirty="0" err="1">
+                <a:solidFill>
+                  <a:srgbClr val="333333"/>
+                </a:solidFill>
+                <a:latin typeface="Arial"/>
+              </a:rPr>
+              <a:t>중복·모순의</a:t>
+            </a:r>
+            <a:r>
+              <a:rPr sz="800" b="1" dirty="0">
+                <a:solidFill>
+                  <a:srgbClr val="333333"/>
+                </a:solidFill>
+                <a:latin typeface="Arial"/>
+              </a:rPr>
+              <a:t> </a:t>
+            </a:r>
+            <a:r>
+              <a:rPr sz="800" b="1" dirty="0" err="1">
+                <a:solidFill>
+                  <a:srgbClr val="333333"/>
+                </a:solidFill>
+                <a:latin typeface="Arial"/>
+              </a:rPr>
+              <a:t>누적</a:t>
+            </a:r>
+            <a:endParaRPr sz="800" b="1" dirty="0">
+              <a:solidFill>
+                <a:srgbClr val="333333"/>
+              </a:solidFill>
+              <a:latin typeface="Arial"/>
+            </a:endParaRPr>
           </a:p>
           <a:p>
             <a:r>
-              <a:rPr sz="900" b="1">
-                <a:solidFill>
-                  <a:srgbClr val="333333"/>
-                </a:solidFill>
-                <a:latin typeface="Arial"/>
-              </a:rPr>
-              <a:t>  v1/v2 후속 문서가 통합되지 않아 페이지 간 정합성이 무너짐</a:t>
-            </a:r>
+              <a:rPr sz="800" b="1" dirty="0">
+                <a:solidFill>
+                  <a:srgbClr val="333333"/>
+                </a:solidFill>
+                <a:latin typeface="Arial"/>
+              </a:rPr>
+              <a:t>  </a:t>
+            </a:r>
+            <a:r>
+              <a:rPr sz="800" dirty="0">
+                <a:solidFill>
+                  <a:srgbClr val="333333"/>
+                </a:solidFill>
+                <a:latin typeface="Arial"/>
+              </a:rPr>
+              <a:t>v1/v2 </a:t>
+            </a:r>
+            <a:r>
+              <a:rPr sz="800" dirty="0" err="1">
+                <a:solidFill>
+                  <a:srgbClr val="333333"/>
+                </a:solidFill>
+                <a:latin typeface="Arial"/>
+              </a:rPr>
+              <a:t>후속</a:t>
+            </a:r>
+            <a:r>
+              <a:rPr sz="800" dirty="0">
+                <a:solidFill>
+                  <a:srgbClr val="333333"/>
+                </a:solidFill>
+                <a:latin typeface="Arial"/>
+              </a:rPr>
+              <a:t> </a:t>
+            </a:r>
+            <a:r>
+              <a:rPr sz="800" dirty="0" err="1">
+                <a:solidFill>
+                  <a:srgbClr val="333333"/>
+                </a:solidFill>
+                <a:latin typeface="Arial"/>
+              </a:rPr>
+              <a:t>문서가</a:t>
+            </a:r>
+            <a:r>
+              <a:rPr sz="800" dirty="0">
+                <a:solidFill>
+                  <a:srgbClr val="333333"/>
+                </a:solidFill>
+                <a:latin typeface="Arial"/>
+              </a:rPr>
+              <a:t> </a:t>
+            </a:r>
+            <a:r>
+              <a:rPr sz="800" dirty="0" err="1">
+                <a:solidFill>
+                  <a:srgbClr val="333333"/>
+                </a:solidFill>
+                <a:latin typeface="Arial"/>
+              </a:rPr>
+              <a:t>통합되지</a:t>
+            </a:r>
+            <a:r>
+              <a:rPr sz="800" dirty="0">
+                <a:solidFill>
+                  <a:srgbClr val="333333"/>
+                </a:solidFill>
+                <a:latin typeface="Arial"/>
+              </a:rPr>
+              <a:t> </a:t>
+            </a:r>
+            <a:r>
+              <a:rPr sz="800" dirty="0" err="1">
+                <a:solidFill>
+                  <a:srgbClr val="333333"/>
+                </a:solidFill>
+                <a:latin typeface="Arial"/>
+              </a:rPr>
+              <a:t>않아</a:t>
+            </a:r>
+            <a:r>
+              <a:rPr sz="800" dirty="0">
+                <a:solidFill>
+                  <a:srgbClr val="333333"/>
+                </a:solidFill>
+                <a:latin typeface="Arial"/>
+              </a:rPr>
+              <a:t> </a:t>
+            </a:r>
+            <a:r>
+              <a:rPr sz="800" dirty="0" err="1">
+                <a:solidFill>
+                  <a:srgbClr val="333333"/>
+                </a:solidFill>
+                <a:latin typeface="Arial"/>
+              </a:rPr>
+              <a:t>페이지</a:t>
+            </a:r>
+            <a:r>
+              <a:rPr sz="800" dirty="0">
+                <a:solidFill>
+                  <a:srgbClr val="333333"/>
+                </a:solidFill>
+                <a:latin typeface="Arial"/>
+              </a:rPr>
+              <a:t> 간 </a:t>
+            </a:r>
+            <a:r>
+              <a:rPr sz="800" dirty="0" err="1">
+                <a:solidFill>
+                  <a:srgbClr val="333333"/>
+                </a:solidFill>
+                <a:latin typeface="Arial"/>
+              </a:rPr>
+              <a:t>정합성이</a:t>
+            </a:r>
+            <a:r>
+              <a:rPr sz="800" dirty="0">
+                <a:solidFill>
+                  <a:srgbClr val="333333"/>
+                </a:solidFill>
+                <a:latin typeface="Arial"/>
+              </a:rPr>
+              <a:t> </a:t>
+            </a:r>
+            <a:r>
+              <a:rPr sz="800" dirty="0" err="1">
+                <a:solidFill>
+                  <a:srgbClr val="333333"/>
+                </a:solidFill>
+                <a:latin typeface="Arial"/>
+              </a:rPr>
+              <a:t>무너짐</a:t>
+            </a:r>
+            <a:endParaRPr sz="800" dirty="0">
+              <a:solidFill>
+                <a:srgbClr val="333333"/>
+              </a:solidFill>
+              <a:latin typeface="Arial"/>
+            </a:endParaRPr>
           </a:p>
           <a:p>
-            <a:r>
-              <a:rPr sz="900" b="1">
-                <a:solidFill>
-                  <a:srgbClr val="333333"/>
-                </a:solidFill>
-                <a:latin typeface="Arial"/>
-              </a:rPr>
-              <a:t/>
-            </a:r>
+            <a:endParaRPr sz="800" b="1" dirty="0">
+              <a:solidFill>
+                <a:srgbClr val="333333"/>
+              </a:solidFill>
+              <a:latin typeface="Arial"/>
+            </a:endParaRPr>
           </a:p>
           <a:p>
             <a:r>
-              <a:rPr sz="900" b="1">
-                <a:solidFill>
-                  <a:srgbClr val="333333"/>
-                </a:solidFill>
-                <a:latin typeface="Arial"/>
-              </a:rPr>
-              <a:t>· 수동 정리의 한계</a:t>
-            </a:r>
+              <a:rPr sz="800" b="1" dirty="0">
+                <a:solidFill>
+                  <a:srgbClr val="333333"/>
+                </a:solidFill>
+                <a:latin typeface="Arial"/>
+              </a:rPr>
+              <a:t>· </a:t>
+            </a:r>
+            <a:r>
+              <a:rPr sz="800" b="1" dirty="0" err="1">
+                <a:solidFill>
+                  <a:srgbClr val="333333"/>
+                </a:solidFill>
+                <a:latin typeface="Arial"/>
+              </a:rPr>
+              <a:t>수동</a:t>
+            </a:r>
+            <a:r>
+              <a:rPr sz="800" b="1" dirty="0">
+                <a:solidFill>
+                  <a:srgbClr val="333333"/>
+                </a:solidFill>
+                <a:latin typeface="Arial"/>
+              </a:rPr>
+              <a:t> </a:t>
+            </a:r>
+            <a:r>
+              <a:rPr sz="800" b="1" dirty="0" err="1">
+                <a:solidFill>
+                  <a:srgbClr val="333333"/>
+                </a:solidFill>
+                <a:latin typeface="Arial"/>
+              </a:rPr>
+              <a:t>정리의</a:t>
+            </a:r>
+            <a:r>
+              <a:rPr sz="800" b="1" dirty="0">
+                <a:solidFill>
+                  <a:srgbClr val="333333"/>
+                </a:solidFill>
+                <a:latin typeface="Arial"/>
+              </a:rPr>
+              <a:t> </a:t>
+            </a:r>
+            <a:r>
+              <a:rPr sz="800" b="1" dirty="0" err="1">
+                <a:solidFill>
+                  <a:srgbClr val="333333"/>
+                </a:solidFill>
+                <a:latin typeface="Arial"/>
+              </a:rPr>
+              <a:t>한계</a:t>
+            </a:r>
+            <a:endParaRPr sz="800" b="1" dirty="0">
+              <a:solidFill>
+                <a:srgbClr val="333333"/>
+              </a:solidFill>
+              <a:latin typeface="Arial"/>
+            </a:endParaRPr>
           </a:p>
           <a:p>
             <a:r>
-              <a:rPr sz="900" b="1">
-                <a:solidFill>
-                  <a:srgbClr val="333333"/>
-                </a:solidFill>
-                <a:latin typeface="Arial"/>
-              </a:rPr>
-              <a:t>  문서 1건당 약 30분 소요, 인원 교체 시 맥락·근거가 함께 단절</a:t>
-            </a:r>
+              <a:rPr sz="800" b="1" dirty="0">
+                <a:solidFill>
+                  <a:srgbClr val="333333"/>
+                </a:solidFill>
+                <a:latin typeface="Arial"/>
+              </a:rPr>
+              <a:t>  </a:t>
+            </a:r>
+            <a:r>
+              <a:rPr sz="800" dirty="0" err="1">
+                <a:solidFill>
+                  <a:srgbClr val="333333"/>
+                </a:solidFill>
+                <a:latin typeface="Arial"/>
+              </a:rPr>
+              <a:t>문서</a:t>
+            </a:r>
+            <a:r>
+              <a:rPr sz="800" dirty="0">
+                <a:solidFill>
+                  <a:srgbClr val="333333"/>
+                </a:solidFill>
+                <a:latin typeface="Arial"/>
+              </a:rPr>
+              <a:t> 1건당 약 30분 </a:t>
+            </a:r>
+            <a:r>
+              <a:rPr sz="800" dirty="0" err="1">
+                <a:solidFill>
+                  <a:srgbClr val="333333"/>
+                </a:solidFill>
+                <a:latin typeface="Arial"/>
+              </a:rPr>
+              <a:t>소요</a:t>
+            </a:r>
+            <a:r>
+              <a:rPr sz="800" dirty="0">
+                <a:solidFill>
+                  <a:srgbClr val="333333"/>
+                </a:solidFill>
+                <a:latin typeface="Arial"/>
+              </a:rPr>
+              <a:t>, </a:t>
+            </a:r>
+            <a:r>
+              <a:rPr sz="800" dirty="0" err="1">
+                <a:solidFill>
+                  <a:srgbClr val="333333"/>
+                </a:solidFill>
+                <a:latin typeface="Arial"/>
+              </a:rPr>
+              <a:t>인원</a:t>
+            </a:r>
+            <a:r>
+              <a:rPr sz="800" dirty="0">
+                <a:solidFill>
+                  <a:srgbClr val="333333"/>
+                </a:solidFill>
+                <a:latin typeface="Arial"/>
+              </a:rPr>
+              <a:t> </a:t>
+            </a:r>
+            <a:r>
+              <a:rPr sz="800" dirty="0" err="1">
+                <a:solidFill>
+                  <a:srgbClr val="333333"/>
+                </a:solidFill>
+                <a:latin typeface="Arial"/>
+              </a:rPr>
+              <a:t>교체</a:t>
+            </a:r>
+            <a:r>
+              <a:rPr sz="800" dirty="0">
+                <a:solidFill>
+                  <a:srgbClr val="333333"/>
+                </a:solidFill>
+                <a:latin typeface="Arial"/>
+              </a:rPr>
+              <a:t> 시 </a:t>
+            </a:r>
+            <a:r>
+              <a:rPr sz="800" dirty="0" err="1">
+                <a:solidFill>
+                  <a:srgbClr val="333333"/>
+                </a:solidFill>
+                <a:latin typeface="Arial"/>
+              </a:rPr>
+              <a:t>맥락·근거가</a:t>
+            </a:r>
+            <a:r>
+              <a:rPr sz="800" dirty="0">
+                <a:solidFill>
+                  <a:srgbClr val="333333"/>
+                </a:solidFill>
+                <a:latin typeface="Arial"/>
+              </a:rPr>
+              <a:t> </a:t>
+            </a:r>
+            <a:r>
+              <a:rPr sz="800" dirty="0" err="1">
+                <a:solidFill>
+                  <a:srgbClr val="333333"/>
+                </a:solidFill>
+                <a:latin typeface="Arial"/>
+              </a:rPr>
+              <a:t>함께</a:t>
+            </a:r>
+            <a:r>
+              <a:rPr sz="800" dirty="0">
+                <a:solidFill>
+                  <a:srgbClr val="333333"/>
+                </a:solidFill>
+                <a:latin typeface="Arial"/>
+              </a:rPr>
+              <a:t> </a:t>
+            </a:r>
+            <a:r>
+              <a:rPr sz="800" dirty="0" err="1">
+                <a:solidFill>
+                  <a:srgbClr val="333333"/>
+                </a:solidFill>
+                <a:latin typeface="Arial"/>
+              </a:rPr>
+              <a:t>단절</a:t>
+            </a:r>
+            <a:endParaRPr sz="800" dirty="0">
+              <a:solidFill>
+                <a:srgbClr val="333333"/>
+              </a:solidFill>
+              <a:latin typeface="Arial"/>
+            </a:endParaRPr>
           </a:p>
           <a:p>
-            <a:r>
-              <a:rPr sz="900" b="1">
-                <a:solidFill>
-                  <a:srgbClr val="333333"/>
-                </a:solidFill>
-                <a:latin typeface="Arial"/>
-              </a:rPr>
-              <a:t/>
-            </a:r>
+            <a:endParaRPr sz="800" b="1" dirty="0">
+              <a:solidFill>
+                <a:srgbClr val="333333"/>
+              </a:solidFill>
+              <a:latin typeface="Arial"/>
+            </a:endParaRPr>
           </a:p>
           <a:p>
             <a:r>
-              <a:rPr sz="900" b="1">
-                <a:solidFill>
-                  <a:srgbClr val="333333"/>
-                </a:solidFill>
-                <a:latin typeface="Arial"/>
-              </a:rPr>
-              <a:t>· 검색·재사용 저하</a:t>
-            </a:r>
+              <a:rPr sz="800" b="1" dirty="0">
+                <a:solidFill>
+                  <a:srgbClr val="333333"/>
+                </a:solidFill>
+                <a:latin typeface="Arial"/>
+              </a:rPr>
+              <a:t>· </a:t>
+            </a:r>
+            <a:r>
+              <a:rPr sz="800" b="1" dirty="0" err="1">
+                <a:solidFill>
+                  <a:srgbClr val="333333"/>
+                </a:solidFill>
+                <a:latin typeface="Arial"/>
+              </a:rPr>
+              <a:t>검색·재사용</a:t>
+            </a:r>
+            <a:r>
+              <a:rPr sz="800" b="1" dirty="0">
+                <a:solidFill>
+                  <a:srgbClr val="333333"/>
+                </a:solidFill>
+                <a:latin typeface="Arial"/>
+              </a:rPr>
+              <a:t> </a:t>
+            </a:r>
+            <a:r>
+              <a:rPr sz="800" b="1" dirty="0" err="1">
+                <a:solidFill>
+                  <a:srgbClr val="333333"/>
+                </a:solidFill>
+                <a:latin typeface="Arial"/>
+              </a:rPr>
+              <a:t>저하</a:t>
+            </a:r>
+            <a:endParaRPr sz="800" b="1" dirty="0">
+              <a:solidFill>
+                <a:srgbClr val="333333"/>
+              </a:solidFill>
+              <a:latin typeface="Arial"/>
+            </a:endParaRPr>
           </a:p>
           <a:p>
             <a:r>
-              <a:rPr sz="900" b="1">
-                <a:solidFill>
-                  <a:srgbClr val="333333"/>
-                </a:solidFill>
-                <a:latin typeface="Arial"/>
-              </a:rPr>
-              <a:t>  필요 정보 탐색이 어렵고 의사결정 근거 추적이 곤란</a:t>
-            </a:r>
+              <a:rPr sz="800" b="1" dirty="0">
+                <a:solidFill>
+                  <a:srgbClr val="333333"/>
+                </a:solidFill>
+                <a:latin typeface="Arial"/>
+              </a:rPr>
+              <a:t>  </a:t>
+            </a:r>
+            <a:r>
+              <a:rPr sz="800" dirty="0" err="1">
+                <a:solidFill>
+                  <a:srgbClr val="333333"/>
+                </a:solidFill>
+                <a:latin typeface="Arial"/>
+              </a:rPr>
+              <a:t>필요</a:t>
+            </a:r>
+            <a:r>
+              <a:rPr sz="800" dirty="0">
+                <a:solidFill>
+                  <a:srgbClr val="333333"/>
+                </a:solidFill>
+                <a:latin typeface="Arial"/>
+              </a:rPr>
+              <a:t> </a:t>
+            </a:r>
+            <a:r>
+              <a:rPr sz="800" dirty="0" err="1">
+                <a:solidFill>
+                  <a:srgbClr val="333333"/>
+                </a:solidFill>
+                <a:latin typeface="Arial"/>
+              </a:rPr>
+              <a:t>정보</a:t>
+            </a:r>
+            <a:r>
+              <a:rPr sz="800" dirty="0">
+                <a:solidFill>
+                  <a:srgbClr val="333333"/>
+                </a:solidFill>
+                <a:latin typeface="Arial"/>
+              </a:rPr>
+              <a:t> </a:t>
+            </a:r>
+            <a:r>
+              <a:rPr sz="800" dirty="0" err="1">
+                <a:solidFill>
+                  <a:srgbClr val="333333"/>
+                </a:solidFill>
+                <a:latin typeface="Arial"/>
+              </a:rPr>
+              <a:t>탐색이</a:t>
+            </a:r>
+            <a:r>
+              <a:rPr sz="800" dirty="0">
+                <a:solidFill>
+                  <a:srgbClr val="333333"/>
+                </a:solidFill>
+                <a:latin typeface="Arial"/>
+              </a:rPr>
+              <a:t> </a:t>
+            </a:r>
+            <a:r>
+              <a:rPr sz="800" dirty="0" err="1">
+                <a:solidFill>
+                  <a:srgbClr val="333333"/>
+                </a:solidFill>
+                <a:latin typeface="Arial"/>
+              </a:rPr>
+              <a:t>어렵고</a:t>
+            </a:r>
+            <a:r>
+              <a:rPr sz="800" dirty="0">
+                <a:solidFill>
+                  <a:srgbClr val="333333"/>
+                </a:solidFill>
+                <a:latin typeface="Arial"/>
+              </a:rPr>
+              <a:t> </a:t>
+            </a:r>
+            <a:r>
+              <a:rPr sz="800" dirty="0" err="1">
+                <a:solidFill>
+                  <a:srgbClr val="333333"/>
+                </a:solidFill>
+                <a:latin typeface="Arial"/>
+              </a:rPr>
+              <a:t>의사결정</a:t>
+            </a:r>
+            <a:r>
+              <a:rPr sz="800" dirty="0">
+                <a:solidFill>
+                  <a:srgbClr val="333333"/>
+                </a:solidFill>
+                <a:latin typeface="Arial"/>
+              </a:rPr>
+              <a:t> </a:t>
+            </a:r>
+            <a:r>
+              <a:rPr sz="800" dirty="0" err="1">
+                <a:solidFill>
+                  <a:srgbClr val="333333"/>
+                </a:solidFill>
+                <a:latin typeface="Arial"/>
+              </a:rPr>
+              <a:t>근거</a:t>
+            </a:r>
+            <a:r>
+              <a:rPr sz="800" dirty="0">
+                <a:solidFill>
+                  <a:srgbClr val="333333"/>
+                </a:solidFill>
+                <a:latin typeface="Arial"/>
+              </a:rPr>
+              <a:t> </a:t>
+            </a:r>
+            <a:r>
+              <a:rPr sz="800" dirty="0" err="1">
+                <a:solidFill>
+                  <a:srgbClr val="333333"/>
+                </a:solidFill>
+                <a:latin typeface="Arial"/>
+              </a:rPr>
+              <a:t>추적이</a:t>
+            </a:r>
+            <a:r>
+              <a:rPr sz="800" dirty="0">
+                <a:solidFill>
+                  <a:srgbClr val="333333"/>
+                </a:solidFill>
+                <a:latin typeface="Arial"/>
+              </a:rPr>
+              <a:t> </a:t>
+            </a:r>
+            <a:r>
+              <a:rPr sz="800" dirty="0" err="1">
+                <a:solidFill>
+                  <a:srgbClr val="333333"/>
+                </a:solidFill>
+                <a:latin typeface="Arial"/>
+              </a:rPr>
+              <a:t>곤란</a:t>
+            </a:r>
+            <a:endParaRPr sz="800" dirty="0">
+              <a:solidFill>
+                <a:srgbClr val="333333"/>
+              </a:solidFill>
+              <a:latin typeface="Arial"/>
+            </a:endParaRPr>
           </a:p>
         </p:txBody>
       </p:sp>
@@ -1940,157 +2712,1258 @@
               <a:buNone/>
             </a:pPr>
             <a:r>
-              <a:rPr sz="900" b="1">
-                <a:solidFill>
-                  <a:srgbClr val="333333"/>
-                </a:solidFill>
-                <a:latin typeface="Arial"/>
-              </a:rPr>
-              <a:t>· 멀티 에이전트 자동 적재</a:t>
-            </a:r>
-            <a:endParaRPr lang="en-US" sz="900" dirty="0"/>
+              <a:rPr sz="800" b="1" dirty="0">
+                <a:solidFill>
+                  <a:srgbClr val="333333"/>
+                </a:solidFill>
+                <a:latin typeface="Arial"/>
+              </a:rPr>
+              <a:t>· </a:t>
+            </a:r>
+            <a:r>
+              <a:rPr sz="800" b="1" dirty="0" err="1">
+                <a:solidFill>
+                  <a:srgbClr val="333333"/>
+                </a:solidFill>
+                <a:latin typeface="Arial"/>
+              </a:rPr>
+              <a:t>멀티</a:t>
+            </a:r>
+            <a:r>
+              <a:rPr sz="800" b="1" dirty="0">
+                <a:solidFill>
+                  <a:srgbClr val="333333"/>
+                </a:solidFill>
+                <a:latin typeface="Arial"/>
+              </a:rPr>
+              <a:t> </a:t>
+            </a:r>
+            <a:r>
+              <a:rPr sz="800" b="1" dirty="0" err="1">
+                <a:solidFill>
+                  <a:srgbClr val="333333"/>
+                </a:solidFill>
+                <a:latin typeface="Arial"/>
+              </a:rPr>
+              <a:t>에이전트</a:t>
+            </a:r>
+            <a:r>
+              <a:rPr sz="800" b="1" dirty="0">
+                <a:solidFill>
+                  <a:srgbClr val="333333"/>
+                </a:solidFill>
+                <a:latin typeface="Arial"/>
+              </a:rPr>
+              <a:t> </a:t>
+            </a:r>
+            <a:r>
+              <a:rPr sz="800" b="1" dirty="0" err="1">
+                <a:solidFill>
+                  <a:srgbClr val="333333"/>
+                </a:solidFill>
+                <a:latin typeface="Arial"/>
+              </a:rPr>
+              <a:t>자동</a:t>
+            </a:r>
+            <a:r>
+              <a:rPr sz="800" b="1" dirty="0">
+                <a:solidFill>
+                  <a:srgbClr val="333333"/>
+                </a:solidFill>
+                <a:latin typeface="Arial"/>
+              </a:rPr>
+              <a:t> </a:t>
+            </a:r>
+            <a:r>
+              <a:rPr sz="800" b="1" dirty="0" err="1">
+                <a:solidFill>
+                  <a:srgbClr val="333333"/>
+                </a:solidFill>
+                <a:latin typeface="Arial"/>
+              </a:rPr>
+              <a:t>적재</a:t>
+            </a:r>
+            <a:endParaRPr lang="en-US" sz="800" dirty="0"/>
           </a:p>
           <a:p>
             <a:r>
-              <a:rPr sz="900" b="1">
-                <a:solidFill>
-                  <a:srgbClr val="333333"/>
-                </a:solidFill>
-                <a:latin typeface="Arial"/>
-              </a:rPr>
-              <a:t>  LangGraph 기반 13 노드 파이프라인 (LLM 8 / 일반 5)</a:t>
+              <a:rPr sz="800" b="1" dirty="0">
+                <a:solidFill>
+                  <a:srgbClr val="333333"/>
+                </a:solidFill>
+                <a:latin typeface="Arial"/>
+              </a:rPr>
+              <a:t>  </a:t>
+            </a:r>
+            <a:r>
+              <a:rPr sz="800" b="1" dirty="0" err="1">
+                <a:solidFill>
+                  <a:srgbClr val="333333"/>
+                </a:solidFill>
+                <a:latin typeface="Arial"/>
+              </a:rPr>
+              <a:t>LangGraph</a:t>
+            </a:r>
+            <a:r>
+              <a:rPr sz="800" b="1" dirty="0">
+                <a:solidFill>
+                  <a:srgbClr val="333333"/>
+                </a:solidFill>
+                <a:latin typeface="Arial"/>
+              </a:rPr>
+              <a:t> </a:t>
+            </a:r>
+            <a:r>
+              <a:rPr sz="800" b="1" dirty="0" err="1">
+                <a:solidFill>
+                  <a:srgbClr val="333333"/>
+                </a:solidFill>
+                <a:latin typeface="Arial"/>
+              </a:rPr>
+              <a:t>기반</a:t>
+            </a:r>
+            <a:r>
+              <a:rPr sz="800" b="1" dirty="0">
+                <a:solidFill>
+                  <a:srgbClr val="333333"/>
+                </a:solidFill>
+                <a:latin typeface="Arial"/>
+              </a:rPr>
+              <a:t> 13 </a:t>
+            </a:r>
+            <a:r>
+              <a:rPr sz="800" b="1" dirty="0" err="1">
+                <a:solidFill>
+                  <a:srgbClr val="333333"/>
+                </a:solidFill>
+                <a:latin typeface="Arial"/>
+              </a:rPr>
+              <a:t>노드</a:t>
+            </a:r>
+            <a:r>
+              <a:rPr sz="800" b="1" dirty="0">
+                <a:solidFill>
+                  <a:srgbClr val="333333"/>
+                </a:solidFill>
+                <a:latin typeface="Arial"/>
+              </a:rPr>
+              <a:t> </a:t>
+            </a:r>
+            <a:r>
+              <a:rPr sz="800" b="1" dirty="0" err="1">
+                <a:solidFill>
+                  <a:srgbClr val="333333"/>
+                </a:solidFill>
+                <a:latin typeface="Arial"/>
+              </a:rPr>
+              <a:t>파이프라인</a:t>
+            </a:r>
+            <a:r>
+              <a:rPr sz="800" b="1" dirty="0">
+                <a:solidFill>
+                  <a:srgbClr val="333333"/>
+                </a:solidFill>
+                <a:latin typeface="Arial"/>
+              </a:rPr>
+              <a:t> (LLM 8 / </a:t>
+            </a:r>
+            <a:r>
+              <a:rPr sz="800" b="1" dirty="0" err="1">
+                <a:solidFill>
+                  <a:srgbClr val="333333"/>
+                </a:solidFill>
+                <a:latin typeface="Arial"/>
+              </a:rPr>
+              <a:t>일반</a:t>
+            </a:r>
+            <a:r>
+              <a:rPr sz="800" b="1" dirty="0">
+                <a:solidFill>
+                  <a:srgbClr val="333333"/>
+                </a:solidFill>
+                <a:latin typeface="Arial"/>
+              </a:rPr>
+              <a:t> 5)</a:t>
             </a:r>
           </a:p>
           <a:p>
             <a:r>
-              <a:rPr sz="900" b="1">
-                <a:solidFill>
-                  <a:srgbClr val="333333"/>
-                </a:solidFill>
-                <a:latin typeface="Arial"/>
-              </a:rPr>
-              <a:t>  수집 → 정규화 → 도메인분해 → 임베딩 → 유사도 → 충돌판정 → 병합 → 누락검토(피드백) → 상호참조 → 인덱싱</a:t>
-            </a:r>
+              <a:rPr sz="800" b="1" dirty="0">
+                <a:solidFill>
+                  <a:srgbClr val="333333"/>
+                </a:solidFill>
+                <a:latin typeface="Arial"/>
+              </a:rPr>
+              <a:t>  </a:t>
+            </a:r>
+            <a:r>
+              <a:rPr sz="800" b="1" dirty="0" err="1">
+                <a:solidFill>
+                  <a:srgbClr val="333333"/>
+                </a:solidFill>
+                <a:latin typeface="Arial"/>
+              </a:rPr>
+              <a:t>수집</a:t>
+            </a:r>
+            <a:r>
+              <a:rPr sz="800" b="1" dirty="0">
+                <a:solidFill>
+                  <a:srgbClr val="333333"/>
+                </a:solidFill>
+                <a:latin typeface="Arial"/>
+              </a:rPr>
+              <a:t> </a:t>
+            </a:r>
+            <a:r>
+              <a:rPr lang="en-US" altLang="ko-KR" sz="800" b="1" dirty="0" smtClean="0">
+                <a:solidFill>
+                  <a:srgbClr val="333333"/>
+                </a:solidFill>
+                <a:latin typeface="Arial"/>
+              </a:rPr>
+              <a:t>&gt;</a:t>
+            </a:r>
+            <a:r>
+              <a:rPr sz="800" b="1" dirty="0" smtClean="0">
+                <a:solidFill>
+                  <a:srgbClr val="333333"/>
+                </a:solidFill>
+                <a:latin typeface="Arial"/>
+              </a:rPr>
+              <a:t> </a:t>
+            </a:r>
+            <a:r>
+              <a:rPr sz="800" b="1" dirty="0" err="1">
+                <a:solidFill>
+                  <a:srgbClr val="333333"/>
+                </a:solidFill>
+                <a:latin typeface="Arial"/>
+              </a:rPr>
+              <a:t>정규화</a:t>
+            </a:r>
+            <a:r>
+              <a:rPr sz="800" b="1" dirty="0">
+                <a:solidFill>
+                  <a:srgbClr val="333333"/>
+                </a:solidFill>
+                <a:latin typeface="Arial"/>
+              </a:rPr>
+              <a:t> </a:t>
+            </a:r>
+            <a:r>
+              <a:rPr lang="en-US" altLang="ko-KR" sz="800" b="1" dirty="0" smtClean="0">
+                <a:solidFill>
+                  <a:srgbClr val="333333"/>
+                </a:solidFill>
+                <a:latin typeface="Arial"/>
+              </a:rPr>
+              <a:t>&gt;</a:t>
+            </a:r>
+            <a:r>
+              <a:rPr sz="800" b="1" dirty="0" smtClean="0">
+                <a:solidFill>
+                  <a:srgbClr val="333333"/>
+                </a:solidFill>
+                <a:latin typeface="Arial"/>
+              </a:rPr>
+              <a:t> </a:t>
+            </a:r>
+            <a:r>
+              <a:rPr sz="800" b="1" dirty="0" err="1">
+                <a:solidFill>
+                  <a:srgbClr val="333333"/>
+                </a:solidFill>
+                <a:latin typeface="Arial"/>
+              </a:rPr>
+              <a:t>도메인분해</a:t>
+            </a:r>
+            <a:r>
+              <a:rPr sz="800" b="1" dirty="0">
+                <a:solidFill>
+                  <a:srgbClr val="333333"/>
+                </a:solidFill>
+                <a:latin typeface="Arial"/>
+              </a:rPr>
+              <a:t> </a:t>
+            </a:r>
+            <a:r>
+              <a:rPr lang="en-US" altLang="ko-KR" sz="800" b="1" dirty="0" smtClean="0">
+                <a:solidFill>
+                  <a:srgbClr val="333333"/>
+                </a:solidFill>
+                <a:latin typeface="Arial"/>
+              </a:rPr>
+              <a:t>&gt;</a:t>
+            </a:r>
+            <a:r>
+              <a:rPr sz="800" b="1" dirty="0" smtClean="0">
+                <a:solidFill>
+                  <a:srgbClr val="333333"/>
+                </a:solidFill>
+                <a:latin typeface="Arial"/>
+              </a:rPr>
+              <a:t> </a:t>
+            </a:r>
+            <a:r>
+              <a:rPr sz="800" b="1" dirty="0" err="1">
+                <a:solidFill>
+                  <a:srgbClr val="333333"/>
+                </a:solidFill>
+                <a:latin typeface="Arial"/>
+              </a:rPr>
+              <a:t>임베딩</a:t>
+            </a:r>
+            <a:r>
+              <a:rPr sz="800" b="1" dirty="0">
+                <a:solidFill>
+                  <a:srgbClr val="333333"/>
+                </a:solidFill>
+                <a:latin typeface="Arial"/>
+              </a:rPr>
+              <a:t> </a:t>
+            </a:r>
+            <a:r>
+              <a:rPr lang="en-US" altLang="ko-KR" sz="800" b="1" dirty="0" smtClean="0">
+                <a:solidFill>
+                  <a:srgbClr val="333333"/>
+                </a:solidFill>
+                <a:latin typeface="Arial"/>
+              </a:rPr>
+              <a:t>&gt;</a:t>
+            </a:r>
+            <a:r>
+              <a:rPr sz="800" b="1" dirty="0" smtClean="0">
+                <a:solidFill>
+                  <a:srgbClr val="333333"/>
+                </a:solidFill>
+                <a:latin typeface="Arial"/>
+              </a:rPr>
+              <a:t> </a:t>
+            </a:r>
+            <a:r>
+              <a:rPr sz="800" b="1" dirty="0" err="1">
+                <a:solidFill>
+                  <a:srgbClr val="333333"/>
+                </a:solidFill>
+                <a:latin typeface="Arial"/>
+              </a:rPr>
+              <a:t>유사도</a:t>
+            </a:r>
+            <a:r>
+              <a:rPr sz="800" b="1" dirty="0">
+                <a:solidFill>
+                  <a:srgbClr val="333333"/>
+                </a:solidFill>
+                <a:latin typeface="Arial"/>
+              </a:rPr>
+              <a:t> </a:t>
+            </a:r>
+            <a:r>
+              <a:rPr lang="en-US" altLang="ko-KR" sz="800" b="1" dirty="0" smtClean="0">
+                <a:solidFill>
+                  <a:srgbClr val="333333"/>
+                </a:solidFill>
+                <a:latin typeface="Arial"/>
+              </a:rPr>
+              <a:t>&gt;</a:t>
+            </a:r>
+            <a:r>
+              <a:rPr sz="800" b="1" dirty="0" smtClean="0">
+                <a:solidFill>
+                  <a:srgbClr val="333333"/>
+                </a:solidFill>
+                <a:latin typeface="Arial"/>
+              </a:rPr>
+              <a:t> </a:t>
+            </a:r>
+            <a:r>
+              <a:rPr sz="800" b="1" dirty="0" err="1">
+                <a:solidFill>
+                  <a:srgbClr val="333333"/>
+                </a:solidFill>
+                <a:latin typeface="Arial"/>
+              </a:rPr>
+              <a:t>충돌판정</a:t>
+            </a:r>
+            <a:r>
+              <a:rPr sz="800" b="1" dirty="0">
+                <a:solidFill>
+                  <a:srgbClr val="333333"/>
+                </a:solidFill>
+                <a:latin typeface="Arial"/>
+              </a:rPr>
+              <a:t> </a:t>
+            </a:r>
+            <a:r>
+              <a:rPr lang="en-US" altLang="ko-KR" sz="800" b="1" dirty="0" smtClean="0">
+                <a:solidFill>
+                  <a:srgbClr val="333333"/>
+                </a:solidFill>
+                <a:latin typeface="Arial"/>
+              </a:rPr>
+              <a:t>&gt;</a:t>
+            </a:r>
+            <a:r>
+              <a:rPr sz="800" b="1" dirty="0" smtClean="0">
+                <a:solidFill>
+                  <a:srgbClr val="333333"/>
+                </a:solidFill>
+                <a:latin typeface="Arial"/>
+              </a:rPr>
+              <a:t> </a:t>
+            </a:r>
+            <a:r>
+              <a:rPr sz="800" b="1" dirty="0" err="1">
+                <a:solidFill>
+                  <a:srgbClr val="333333"/>
+                </a:solidFill>
+                <a:latin typeface="Arial"/>
+              </a:rPr>
+              <a:t>병합</a:t>
+            </a:r>
+            <a:r>
+              <a:rPr sz="800" b="1" dirty="0">
+                <a:solidFill>
+                  <a:srgbClr val="333333"/>
+                </a:solidFill>
+                <a:latin typeface="Arial"/>
+              </a:rPr>
+              <a:t> </a:t>
+            </a:r>
+            <a:r>
+              <a:rPr lang="en-US" altLang="ko-KR" sz="800" b="1" dirty="0" smtClean="0">
+                <a:solidFill>
+                  <a:srgbClr val="333333"/>
+                </a:solidFill>
+                <a:latin typeface="Arial"/>
+              </a:rPr>
+              <a:t>&gt;</a:t>
+            </a:r>
+            <a:r>
+              <a:rPr sz="800" b="1" dirty="0" smtClean="0">
+                <a:solidFill>
+                  <a:srgbClr val="333333"/>
+                </a:solidFill>
+                <a:latin typeface="Arial"/>
+              </a:rPr>
+              <a:t> </a:t>
+            </a:r>
+            <a:r>
+              <a:rPr sz="800" b="1" dirty="0" err="1">
+                <a:solidFill>
+                  <a:srgbClr val="333333"/>
+                </a:solidFill>
+                <a:latin typeface="Arial"/>
+              </a:rPr>
+              <a:t>누락검토</a:t>
+            </a:r>
+            <a:r>
+              <a:rPr sz="800" b="1" dirty="0">
+                <a:solidFill>
+                  <a:srgbClr val="333333"/>
+                </a:solidFill>
+                <a:latin typeface="Arial"/>
+              </a:rPr>
+              <a:t>(</a:t>
+            </a:r>
+            <a:r>
+              <a:rPr sz="800" b="1" dirty="0" err="1">
+                <a:solidFill>
+                  <a:srgbClr val="333333"/>
+                </a:solidFill>
+                <a:latin typeface="Arial"/>
+              </a:rPr>
+              <a:t>피드백</a:t>
+            </a:r>
+            <a:r>
+              <a:rPr sz="800" b="1" dirty="0">
+                <a:solidFill>
+                  <a:srgbClr val="333333"/>
+                </a:solidFill>
+                <a:latin typeface="Arial"/>
+              </a:rPr>
+              <a:t>) </a:t>
+            </a:r>
+            <a:r>
+              <a:rPr lang="en-US" altLang="ko-KR" sz="800" b="1" dirty="0" smtClean="0">
+                <a:solidFill>
+                  <a:srgbClr val="333333"/>
+                </a:solidFill>
+                <a:latin typeface="Arial"/>
+              </a:rPr>
+              <a:t>&gt;</a:t>
+            </a:r>
+            <a:r>
+              <a:rPr sz="800" b="1" dirty="0" smtClean="0">
+                <a:solidFill>
+                  <a:srgbClr val="333333"/>
+                </a:solidFill>
+                <a:latin typeface="Arial"/>
+              </a:rPr>
+              <a:t> </a:t>
+            </a:r>
+            <a:r>
+              <a:rPr sz="800" b="1" dirty="0" err="1">
+                <a:solidFill>
+                  <a:srgbClr val="333333"/>
+                </a:solidFill>
+                <a:latin typeface="Arial"/>
+              </a:rPr>
+              <a:t>상호참조</a:t>
+            </a:r>
+            <a:r>
+              <a:rPr sz="800" b="1" dirty="0">
+                <a:solidFill>
+                  <a:srgbClr val="333333"/>
+                </a:solidFill>
+                <a:latin typeface="Arial"/>
+              </a:rPr>
+              <a:t> </a:t>
+            </a:r>
+            <a:r>
+              <a:rPr lang="en-US" altLang="ko-KR" sz="800" b="1" dirty="0" smtClean="0">
+                <a:solidFill>
+                  <a:srgbClr val="333333"/>
+                </a:solidFill>
+                <a:latin typeface="Arial"/>
+              </a:rPr>
+              <a:t>&gt;</a:t>
+            </a:r>
+            <a:r>
+              <a:rPr sz="800" b="1" dirty="0" smtClean="0">
+                <a:solidFill>
+                  <a:srgbClr val="333333"/>
+                </a:solidFill>
+                <a:latin typeface="Arial"/>
+              </a:rPr>
+              <a:t> </a:t>
+            </a:r>
+            <a:r>
+              <a:rPr sz="800" b="1" dirty="0" err="1">
+                <a:solidFill>
+                  <a:srgbClr val="333333"/>
+                </a:solidFill>
+                <a:latin typeface="Arial"/>
+              </a:rPr>
+              <a:t>인덱싱</a:t>
+            </a:r>
+            <a:endParaRPr sz="800" b="1" dirty="0">
+              <a:solidFill>
+                <a:srgbClr val="333333"/>
+              </a:solidFill>
+              <a:latin typeface="Arial"/>
+            </a:endParaRPr>
           </a:p>
           <a:p>
-            <a:r>
-              <a:rPr sz="900" b="1">
-                <a:solidFill>
-                  <a:srgbClr val="333333"/>
-                </a:solidFill>
-                <a:latin typeface="Arial"/>
-              </a:rPr>
-              <a:t/>
-            </a:r>
+            <a:endParaRPr sz="800" b="1" dirty="0">
+              <a:solidFill>
+                <a:srgbClr val="333333"/>
+              </a:solidFill>
+              <a:latin typeface="Arial"/>
+            </a:endParaRPr>
           </a:p>
           <a:p>
             <a:r>
-              <a:rPr sz="900" b="1">
-                <a:solidFill>
-                  <a:srgbClr val="333333"/>
-                </a:solidFill>
-                <a:latin typeface="Arial"/>
-              </a:rPr>
-              <a:t>· LLM 자동 병합</a:t>
-            </a:r>
+              <a:rPr sz="800" b="1" dirty="0">
+                <a:solidFill>
+                  <a:srgbClr val="333333"/>
+                </a:solidFill>
+                <a:latin typeface="Arial"/>
+              </a:rPr>
+              <a:t>· LLM </a:t>
+            </a:r>
+            <a:r>
+              <a:rPr sz="800" b="1" dirty="0" err="1">
+                <a:solidFill>
+                  <a:srgbClr val="333333"/>
+                </a:solidFill>
+                <a:latin typeface="Arial"/>
+              </a:rPr>
+              <a:t>자동</a:t>
+            </a:r>
+            <a:r>
+              <a:rPr sz="800" b="1" dirty="0">
+                <a:solidFill>
+                  <a:srgbClr val="333333"/>
+                </a:solidFill>
+                <a:latin typeface="Arial"/>
+              </a:rPr>
+              <a:t> </a:t>
+            </a:r>
+            <a:r>
+              <a:rPr sz="800" b="1" dirty="0" err="1">
+                <a:solidFill>
+                  <a:srgbClr val="333333"/>
+                </a:solidFill>
+                <a:latin typeface="Arial"/>
+              </a:rPr>
+              <a:t>병합</a:t>
+            </a:r>
+            <a:endParaRPr sz="800" b="1" dirty="0">
+              <a:solidFill>
+                <a:srgbClr val="333333"/>
+              </a:solidFill>
+              <a:latin typeface="Arial"/>
+            </a:endParaRPr>
           </a:p>
           <a:p>
             <a:r>
-              <a:rPr sz="900" b="1">
-                <a:solidFill>
-                  <a:srgbClr val="333333"/>
-                </a:solidFill>
-                <a:latin typeface="Arial"/>
-              </a:rPr>
-              <a:t>  벡터 + LLM 2단계 동일성 판정으로 중복·충돌 자동 해소</a:t>
-            </a:r>
+              <a:rPr sz="800" b="1" dirty="0">
+                <a:solidFill>
+                  <a:srgbClr val="333333"/>
+                </a:solidFill>
+                <a:latin typeface="Arial"/>
+              </a:rPr>
+              <a:t>  </a:t>
+            </a:r>
+            <a:r>
+              <a:rPr sz="800" b="1" dirty="0" err="1">
+                <a:solidFill>
+                  <a:srgbClr val="333333"/>
+                </a:solidFill>
+                <a:latin typeface="Arial"/>
+              </a:rPr>
+              <a:t>벡터</a:t>
+            </a:r>
+            <a:r>
+              <a:rPr sz="800" b="1" dirty="0">
+                <a:solidFill>
+                  <a:srgbClr val="333333"/>
+                </a:solidFill>
+                <a:latin typeface="Arial"/>
+              </a:rPr>
+              <a:t> + LLM 2단계 </a:t>
+            </a:r>
+            <a:r>
+              <a:rPr sz="800" b="1" dirty="0" err="1">
+                <a:solidFill>
+                  <a:srgbClr val="333333"/>
+                </a:solidFill>
+                <a:latin typeface="Arial"/>
+              </a:rPr>
+              <a:t>동일성</a:t>
+            </a:r>
+            <a:r>
+              <a:rPr sz="800" b="1" dirty="0">
+                <a:solidFill>
+                  <a:srgbClr val="333333"/>
+                </a:solidFill>
+                <a:latin typeface="Arial"/>
+              </a:rPr>
+              <a:t> </a:t>
+            </a:r>
+            <a:r>
+              <a:rPr sz="800" b="1" dirty="0" err="1">
+                <a:solidFill>
+                  <a:srgbClr val="333333"/>
+                </a:solidFill>
+                <a:latin typeface="Arial"/>
+              </a:rPr>
+              <a:t>판정으로</a:t>
+            </a:r>
+            <a:r>
+              <a:rPr sz="800" b="1" dirty="0">
+                <a:solidFill>
+                  <a:srgbClr val="333333"/>
+                </a:solidFill>
+                <a:latin typeface="Arial"/>
+              </a:rPr>
+              <a:t> </a:t>
+            </a:r>
+            <a:r>
+              <a:rPr sz="800" b="1" dirty="0" err="1">
+                <a:solidFill>
+                  <a:srgbClr val="333333"/>
+                </a:solidFill>
+                <a:latin typeface="Arial"/>
+              </a:rPr>
+              <a:t>중복·충돌</a:t>
+            </a:r>
+            <a:r>
+              <a:rPr sz="800" b="1" dirty="0">
+                <a:solidFill>
+                  <a:srgbClr val="333333"/>
+                </a:solidFill>
+                <a:latin typeface="Arial"/>
+              </a:rPr>
+              <a:t> </a:t>
+            </a:r>
+            <a:r>
+              <a:rPr sz="800" b="1" dirty="0" err="1">
+                <a:solidFill>
+                  <a:srgbClr val="333333"/>
+                </a:solidFill>
+                <a:latin typeface="Arial"/>
+              </a:rPr>
+              <a:t>자동</a:t>
+            </a:r>
+            <a:r>
+              <a:rPr sz="800" b="1" dirty="0">
+                <a:solidFill>
+                  <a:srgbClr val="333333"/>
+                </a:solidFill>
+                <a:latin typeface="Arial"/>
+              </a:rPr>
+              <a:t> </a:t>
+            </a:r>
+            <a:r>
+              <a:rPr sz="800" b="1" dirty="0" err="1">
+                <a:solidFill>
+                  <a:srgbClr val="333333"/>
+                </a:solidFill>
+                <a:latin typeface="Arial"/>
+              </a:rPr>
+              <a:t>해소</a:t>
+            </a:r>
+            <a:endParaRPr sz="800" b="1" dirty="0">
+              <a:solidFill>
+                <a:srgbClr val="333333"/>
+              </a:solidFill>
+              <a:latin typeface="Arial"/>
+            </a:endParaRPr>
           </a:p>
           <a:p>
-            <a:r>
-              <a:rPr sz="900" b="1">
-                <a:solidFill>
-                  <a:srgbClr val="333333"/>
-                </a:solidFill>
-                <a:latin typeface="Arial"/>
-              </a:rPr>
-              <a:t/>
-            </a:r>
+            <a:endParaRPr sz="800" b="1" dirty="0">
+              <a:solidFill>
+                <a:srgbClr val="333333"/>
+              </a:solidFill>
+              <a:latin typeface="Arial"/>
+            </a:endParaRPr>
           </a:p>
           <a:p>
             <a:r>
-              <a:rPr sz="900" b="1">
-                <a:solidFill>
-                  <a:srgbClr val="333333"/>
-                </a:solidFill>
-                <a:latin typeface="Arial"/>
-              </a:rPr>
-              <a:t>· 하이브리드 검색 + 질의응답</a:t>
-            </a:r>
+              <a:rPr sz="800" b="1" dirty="0">
+                <a:solidFill>
+                  <a:srgbClr val="333333"/>
+                </a:solidFill>
+                <a:latin typeface="Arial"/>
+              </a:rPr>
+              <a:t>· </a:t>
+            </a:r>
+            <a:r>
+              <a:rPr sz="800" b="1" dirty="0" err="1">
+                <a:solidFill>
+                  <a:srgbClr val="333333"/>
+                </a:solidFill>
+                <a:latin typeface="Arial"/>
+              </a:rPr>
+              <a:t>하이브리드</a:t>
+            </a:r>
+            <a:r>
+              <a:rPr sz="800" b="1" dirty="0">
+                <a:solidFill>
+                  <a:srgbClr val="333333"/>
+                </a:solidFill>
+                <a:latin typeface="Arial"/>
+              </a:rPr>
+              <a:t> </a:t>
+            </a:r>
+            <a:r>
+              <a:rPr sz="800" b="1" dirty="0" err="1">
+                <a:solidFill>
+                  <a:srgbClr val="333333"/>
+                </a:solidFill>
+                <a:latin typeface="Arial"/>
+              </a:rPr>
+              <a:t>검색</a:t>
+            </a:r>
+            <a:r>
+              <a:rPr sz="800" b="1" dirty="0">
+                <a:solidFill>
+                  <a:srgbClr val="333333"/>
+                </a:solidFill>
+                <a:latin typeface="Arial"/>
+              </a:rPr>
+              <a:t> + </a:t>
+            </a:r>
+            <a:r>
+              <a:rPr sz="800" b="1" dirty="0" err="1">
+                <a:solidFill>
+                  <a:srgbClr val="333333"/>
+                </a:solidFill>
+                <a:latin typeface="Arial"/>
+              </a:rPr>
+              <a:t>질의응답</a:t>
+            </a:r>
+            <a:endParaRPr sz="800" b="1" dirty="0">
+              <a:solidFill>
+                <a:srgbClr val="333333"/>
+              </a:solidFill>
+              <a:latin typeface="Arial"/>
+            </a:endParaRPr>
           </a:p>
           <a:p>
             <a:r>
-              <a:rPr sz="900" b="1">
-                <a:solidFill>
-                  <a:srgbClr val="333333"/>
-                </a:solidFill>
-                <a:latin typeface="Arial"/>
-              </a:rPr>
-              <a:t>  BM25 + 벡터 RRF 융합 검색, 근거 인용 기반 LLM 답변</a:t>
-            </a:r>
+              <a:rPr sz="800" b="1" dirty="0">
+                <a:solidFill>
+                  <a:srgbClr val="333333"/>
+                </a:solidFill>
+                <a:latin typeface="Arial"/>
+              </a:rPr>
+              <a:t>  BM25 + </a:t>
+            </a:r>
+            <a:r>
+              <a:rPr sz="800" b="1" dirty="0" err="1">
+                <a:solidFill>
+                  <a:srgbClr val="333333"/>
+                </a:solidFill>
+                <a:latin typeface="Arial"/>
+              </a:rPr>
+              <a:t>벡터</a:t>
+            </a:r>
+            <a:r>
+              <a:rPr sz="800" b="1" dirty="0">
+                <a:solidFill>
+                  <a:srgbClr val="333333"/>
+                </a:solidFill>
+                <a:latin typeface="Arial"/>
+              </a:rPr>
+              <a:t> RRF </a:t>
+            </a:r>
+            <a:r>
+              <a:rPr sz="800" b="1" dirty="0" err="1">
+                <a:solidFill>
+                  <a:srgbClr val="333333"/>
+                </a:solidFill>
+                <a:latin typeface="Arial"/>
+              </a:rPr>
+              <a:t>융합</a:t>
+            </a:r>
+            <a:r>
+              <a:rPr sz="800" b="1" dirty="0">
+                <a:solidFill>
+                  <a:srgbClr val="333333"/>
+                </a:solidFill>
+                <a:latin typeface="Arial"/>
+              </a:rPr>
+              <a:t> </a:t>
+            </a:r>
+            <a:r>
+              <a:rPr sz="800" b="1" dirty="0" err="1">
+                <a:solidFill>
+                  <a:srgbClr val="333333"/>
+                </a:solidFill>
+                <a:latin typeface="Arial"/>
+              </a:rPr>
+              <a:t>검색</a:t>
+            </a:r>
+            <a:r>
+              <a:rPr sz="800" b="1" dirty="0">
+                <a:solidFill>
+                  <a:srgbClr val="333333"/>
+                </a:solidFill>
+                <a:latin typeface="Arial"/>
+              </a:rPr>
+              <a:t>, </a:t>
+            </a:r>
+            <a:r>
+              <a:rPr sz="800" b="1" dirty="0" err="1">
+                <a:solidFill>
+                  <a:srgbClr val="333333"/>
+                </a:solidFill>
+                <a:latin typeface="Arial"/>
+              </a:rPr>
+              <a:t>근거</a:t>
+            </a:r>
+            <a:r>
+              <a:rPr sz="800" b="1" dirty="0">
+                <a:solidFill>
+                  <a:srgbClr val="333333"/>
+                </a:solidFill>
+                <a:latin typeface="Arial"/>
+              </a:rPr>
+              <a:t> </a:t>
+            </a:r>
+            <a:r>
+              <a:rPr sz="800" b="1" dirty="0" err="1">
+                <a:solidFill>
+                  <a:srgbClr val="333333"/>
+                </a:solidFill>
+                <a:latin typeface="Arial"/>
+              </a:rPr>
+              <a:t>인용</a:t>
+            </a:r>
+            <a:r>
+              <a:rPr sz="800" b="1" dirty="0">
+                <a:solidFill>
+                  <a:srgbClr val="333333"/>
+                </a:solidFill>
+                <a:latin typeface="Arial"/>
+              </a:rPr>
+              <a:t> </a:t>
+            </a:r>
+            <a:r>
+              <a:rPr sz="800" b="1" dirty="0" err="1">
+                <a:solidFill>
+                  <a:srgbClr val="333333"/>
+                </a:solidFill>
+                <a:latin typeface="Arial"/>
+              </a:rPr>
+              <a:t>기반</a:t>
+            </a:r>
+            <a:r>
+              <a:rPr sz="800" b="1" dirty="0">
+                <a:solidFill>
+                  <a:srgbClr val="333333"/>
+                </a:solidFill>
+                <a:latin typeface="Arial"/>
+              </a:rPr>
+              <a:t> LLM </a:t>
+            </a:r>
+            <a:r>
+              <a:rPr sz="800" b="1" dirty="0" err="1">
+                <a:solidFill>
+                  <a:srgbClr val="333333"/>
+                </a:solidFill>
+                <a:latin typeface="Arial"/>
+              </a:rPr>
+              <a:t>답변</a:t>
+            </a:r>
+            <a:endParaRPr sz="800" b="1" dirty="0">
+              <a:solidFill>
+                <a:srgbClr val="333333"/>
+              </a:solidFill>
+              <a:latin typeface="Arial"/>
+            </a:endParaRPr>
           </a:p>
           <a:p>
-            <a:r>
-              <a:rPr sz="900" b="1">
-                <a:solidFill>
-                  <a:srgbClr val="333333"/>
-                </a:solidFill>
-                <a:latin typeface="Arial"/>
-              </a:rPr>
-              <a:t/>
-            </a:r>
+            <a:endParaRPr sz="800" b="1" dirty="0">
+              <a:solidFill>
+                <a:srgbClr val="333333"/>
+              </a:solidFill>
+              <a:latin typeface="Arial"/>
+            </a:endParaRPr>
           </a:p>
           <a:p>
             <a:r>
-              <a:rPr sz="900" b="1">
-                <a:solidFill>
-                  <a:srgbClr val="333333"/>
-                </a:solidFill>
-                <a:latin typeface="Arial"/>
-              </a:rPr>
-              <a:t>· 지식 그래프 자동 갱신</a:t>
-            </a:r>
+              <a:rPr sz="800" b="1" dirty="0">
+                <a:solidFill>
+                  <a:srgbClr val="333333"/>
+                </a:solidFill>
+                <a:latin typeface="Arial"/>
+              </a:rPr>
+              <a:t>· </a:t>
+            </a:r>
+            <a:r>
+              <a:rPr sz="800" b="1" dirty="0" err="1">
+                <a:solidFill>
+                  <a:srgbClr val="333333"/>
+                </a:solidFill>
+                <a:latin typeface="Arial"/>
+              </a:rPr>
+              <a:t>지식</a:t>
+            </a:r>
+            <a:r>
+              <a:rPr sz="800" b="1" dirty="0">
+                <a:solidFill>
+                  <a:srgbClr val="333333"/>
+                </a:solidFill>
+                <a:latin typeface="Arial"/>
+              </a:rPr>
+              <a:t> </a:t>
+            </a:r>
+            <a:r>
+              <a:rPr sz="800" b="1" dirty="0" err="1">
+                <a:solidFill>
+                  <a:srgbClr val="333333"/>
+                </a:solidFill>
+                <a:latin typeface="Arial"/>
+              </a:rPr>
+              <a:t>그래프</a:t>
+            </a:r>
+            <a:r>
+              <a:rPr sz="800" b="1" dirty="0">
+                <a:solidFill>
+                  <a:srgbClr val="333333"/>
+                </a:solidFill>
+                <a:latin typeface="Arial"/>
+              </a:rPr>
+              <a:t> </a:t>
+            </a:r>
+            <a:r>
+              <a:rPr sz="800" b="1" dirty="0" err="1">
+                <a:solidFill>
+                  <a:srgbClr val="333333"/>
+                </a:solidFill>
+                <a:latin typeface="Arial"/>
+              </a:rPr>
+              <a:t>자동</a:t>
+            </a:r>
+            <a:r>
+              <a:rPr sz="800" b="1" dirty="0">
+                <a:solidFill>
+                  <a:srgbClr val="333333"/>
+                </a:solidFill>
+                <a:latin typeface="Arial"/>
+              </a:rPr>
+              <a:t> </a:t>
+            </a:r>
+            <a:r>
+              <a:rPr sz="800" b="1" dirty="0" err="1">
+                <a:solidFill>
+                  <a:srgbClr val="333333"/>
+                </a:solidFill>
+                <a:latin typeface="Arial"/>
+              </a:rPr>
+              <a:t>갱신</a:t>
+            </a:r>
+            <a:endParaRPr sz="800" b="1" dirty="0">
+              <a:solidFill>
+                <a:srgbClr val="333333"/>
+              </a:solidFill>
+              <a:latin typeface="Arial"/>
+            </a:endParaRPr>
           </a:p>
           <a:p>
             <a:r>
-              <a:rPr sz="900" b="1">
-                <a:solidFill>
-                  <a:srgbClr val="333333"/>
-                </a:solidFill>
-                <a:latin typeface="Arial"/>
-              </a:rPr>
-              <a:t>  9종 엣지 + 상·중·하 신뢰도로 페이지 간 의미 관계 자동 유지</a:t>
-            </a:r>
+              <a:rPr sz="800" b="1" dirty="0">
+                <a:solidFill>
+                  <a:srgbClr val="333333"/>
+                </a:solidFill>
+                <a:latin typeface="Arial"/>
+              </a:rPr>
+              <a:t>  9종 </a:t>
+            </a:r>
+            <a:r>
+              <a:rPr sz="800" b="1" dirty="0" err="1">
+                <a:solidFill>
+                  <a:srgbClr val="333333"/>
+                </a:solidFill>
+                <a:latin typeface="Arial"/>
+              </a:rPr>
+              <a:t>엣지</a:t>
+            </a:r>
+            <a:r>
+              <a:rPr sz="800" b="1" dirty="0">
+                <a:solidFill>
+                  <a:srgbClr val="333333"/>
+                </a:solidFill>
+                <a:latin typeface="Arial"/>
+              </a:rPr>
+              <a:t> + </a:t>
+            </a:r>
+            <a:r>
+              <a:rPr sz="800" b="1" dirty="0" err="1">
+                <a:solidFill>
+                  <a:srgbClr val="333333"/>
+                </a:solidFill>
+                <a:latin typeface="Arial"/>
+              </a:rPr>
+              <a:t>상·중·하</a:t>
+            </a:r>
+            <a:r>
+              <a:rPr sz="800" b="1" dirty="0">
+                <a:solidFill>
+                  <a:srgbClr val="333333"/>
+                </a:solidFill>
+                <a:latin typeface="Arial"/>
+              </a:rPr>
+              <a:t> </a:t>
+            </a:r>
+            <a:r>
+              <a:rPr sz="800" b="1" dirty="0" err="1">
+                <a:solidFill>
+                  <a:srgbClr val="333333"/>
+                </a:solidFill>
+                <a:latin typeface="Arial"/>
+              </a:rPr>
+              <a:t>신뢰도로</a:t>
+            </a:r>
+            <a:r>
+              <a:rPr sz="800" b="1" dirty="0">
+                <a:solidFill>
+                  <a:srgbClr val="333333"/>
+                </a:solidFill>
+                <a:latin typeface="Arial"/>
+              </a:rPr>
+              <a:t> </a:t>
+            </a:r>
+            <a:r>
+              <a:rPr sz="800" b="1" dirty="0" err="1">
+                <a:solidFill>
+                  <a:srgbClr val="333333"/>
+                </a:solidFill>
+                <a:latin typeface="Arial"/>
+              </a:rPr>
+              <a:t>페이지</a:t>
+            </a:r>
+            <a:r>
+              <a:rPr sz="800" b="1" dirty="0">
+                <a:solidFill>
+                  <a:srgbClr val="333333"/>
+                </a:solidFill>
+                <a:latin typeface="Arial"/>
+              </a:rPr>
+              <a:t> 간 </a:t>
+            </a:r>
+            <a:r>
+              <a:rPr sz="800" b="1" dirty="0" err="1">
+                <a:solidFill>
+                  <a:srgbClr val="333333"/>
+                </a:solidFill>
+                <a:latin typeface="Arial"/>
+              </a:rPr>
+              <a:t>의미</a:t>
+            </a:r>
+            <a:r>
+              <a:rPr sz="800" b="1" dirty="0">
+                <a:solidFill>
+                  <a:srgbClr val="333333"/>
+                </a:solidFill>
+                <a:latin typeface="Arial"/>
+              </a:rPr>
+              <a:t> </a:t>
+            </a:r>
+            <a:r>
+              <a:rPr sz="800" b="1" dirty="0" err="1">
+                <a:solidFill>
+                  <a:srgbClr val="333333"/>
+                </a:solidFill>
+                <a:latin typeface="Arial"/>
+              </a:rPr>
+              <a:t>관계</a:t>
+            </a:r>
+            <a:r>
+              <a:rPr sz="800" b="1" dirty="0">
+                <a:solidFill>
+                  <a:srgbClr val="333333"/>
+                </a:solidFill>
+                <a:latin typeface="Arial"/>
+              </a:rPr>
+              <a:t> </a:t>
+            </a:r>
+            <a:r>
+              <a:rPr sz="800" b="1" dirty="0" err="1">
+                <a:solidFill>
+                  <a:srgbClr val="333333"/>
+                </a:solidFill>
+                <a:latin typeface="Arial"/>
+              </a:rPr>
+              <a:t>자동</a:t>
+            </a:r>
+            <a:r>
+              <a:rPr sz="800" b="1" dirty="0">
+                <a:solidFill>
+                  <a:srgbClr val="333333"/>
+                </a:solidFill>
+                <a:latin typeface="Arial"/>
+              </a:rPr>
+              <a:t> </a:t>
+            </a:r>
+            <a:r>
+              <a:rPr sz="800" b="1" dirty="0" err="1">
+                <a:solidFill>
+                  <a:srgbClr val="333333"/>
+                </a:solidFill>
+                <a:latin typeface="Arial"/>
+              </a:rPr>
+              <a:t>유지</a:t>
+            </a:r>
+            <a:endParaRPr sz="800" b="1" dirty="0">
+              <a:solidFill>
+                <a:srgbClr val="333333"/>
+              </a:solidFill>
+              <a:latin typeface="Arial"/>
+            </a:endParaRPr>
           </a:p>
           <a:p>
-            <a:r>
-              <a:rPr sz="900" b="1">
-                <a:solidFill>
-                  <a:srgbClr val="333333"/>
-                </a:solidFill>
-                <a:latin typeface="Arial"/>
-              </a:rPr>
-              <a:t/>
-            </a:r>
+            <a:endParaRPr sz="800" b="1" dirty="0">
+              <a:solidFill>
+                <a:srgbClr val="333333"/>
+              </a:solidFill>
+              <a:latin typeface="Arial"/>
+            </a:endParaRPr>
           </a:p>
           <a:p>
             <a:r>
-              <a:rPr sz="900" b="1">
-                <a:solidFill>
-                  <a:srgbClr val="333333"/>
-                </a:solidFill>
-                <a:latin typeface="Arial"/>
-              </a:rPr>
-              <a:t>기술 스택  ·  LangGraph · Azure OpenAI · Chroma · FastAPI + SSE · React Flow</a:t>
+              <a:rPr sz="800" b="1" dirty="0" err="1">
+                <a:solidFill>
+                  <a:srgbClr val="333333"/>
+                </a:solidFill>
+                <a:latin typeface="Arial"/>
+              </a:rPr>
+              <a:t>기술</a:t>
+            </a:r>
+            <a:r>
+              <a:rPr sz="800" b="1" dirty="0">
+                <a:solidFill>
+                  <a:srgbClr val="333333"/>
+                </a:solidFill>
+                <a:latin typeface="Arial"/>
+              </a:rPr>
+              <a:t> </a:t>
+            </a:r>
+            <a:r>
+              <a:rPr sz="800" b="1" dirty="0" err="1">
+                <a:solidFill>
+                  <a:srgbClr val="333333"/>
+                </a:solidFill>
+                <a:latin typeface="Arial"/>
+              </a:rPr>
+              <a:t>스택</a:t>
+            </a:r>
+            <a:r>
+              <a:rPr sz="800" b="1" dirty="0">
+                <a:solidFill>
+                  <a:srgbClr val="333333"/>
+                </a:solidFill>
+                <a:latin typeface="Arial"/>
+              </a:rPr>
+              <a:t>  ·  </a:t>
+            </a:r>
+            <a:r>
+              <a:rPr sz="800" b="1" dirty="0" err="1">
+                <a:solidFill>
+                  <a:srgbClr val="333333"/>
+                </a:solidFill>
+                <a:latin typeface="Arial"/>
+              </a:rPr>
+              <a:t>LangGraph</a:t>
+            </a:r>
+            <a:r>
+              <a:rPr sz="800" b="1" dirty="0">
+                <a:solidFill>
+                  <a:srgbClr val="333333"/>
+                </a:solidFill>
+                <a:latin typeface="Arial"/>
+              </a:rPr>
+              <a:t> · Azure </a:t>
+            </a:r>
+            <a:r>
+              <a:rPr sz="800" b="1" dirty="0" err="1">
+                <a:solidFill>
+                  <a:srgbClr val="333333"/>
+                </a:solidFill>
+                <a:latin typeface="Arial"/>
+              </a:rPr>
+              <a:t>OpenAI</a:t>
+            </a:r>
+            <a:r>
+              <a:rPr sz="800" b="1" dirty="0">
+                <a:solidFill>
+                  <a:srgbClr val="333333"/>
+                </a:solidFill>
+                <a:latin typeface="Arial"/>
+              </a:rPr>
+              <a:t> · Chroma · </a:t>
+            </a:r>
+            <a:r>
+              <a:rPr sz="800" b="1" dirty="0" err="1">
+                <a:solidFill>
+                  <a:srgbClr val="333333"/>
+                </a:solidFill>
+                <a:latin typeface="Arial"/>
+              </a:rPr>
+              <a:t>FastAPI</a:t>
+            </a:r>
+            <a:r>
+              <a:rPr sz="800" b="1" dirty="0">
+                <a:solidFill>
+                  <a:srgbClr val="333333"/>
+                </a:solidFill>
+                <a:latin typeface="Arial"/>
+              </a:rPr>
+              <a:t> + SSE · React Flow</a:t>
             </a:r>
           </a:p>
         </p:txBody>
@@ -2184,26 +4057,69 @@
               <a:buNone/>
             </a:pPr>
             <a:r>
-              <a:rPr b="1">
+              <a:rPr lang="ko-KR" altLang="en-US" sz="1200" b="1" dirty="0" smtClean="0">
                 <a:solidFill>
                   <a:srgbClr val="1A365D"/>
                 </a:solidFill>
                 <a:latin typeface="Arial"/>
               </a:rPr>
-              <a:t>~30초/건</a:t>
-            </a:r>
-            <a:endParaRPr lang="en-US" dirty="0"/>
+              <a:t>빠른 문서 관리</a:t>
+            </a:r>
+            <a:endParaRPr lang="en-US" altLang="ko-KR" sz="1200" b="1" dirty="0" smtClean="0">
+              <a:solidFill>
+                <a:srgbClr val="1A365D"/>
+              </a:solidFill>
+              <a:latin typeface="Arial"/>
+            </a:endParaRPr>
           </a:p>
           <a:p>
-            <a:pPr algn="ctr"/>
-            <a:r>
-              <a:rPr b="1">
+            <a:pPr marL="0" indent="0" algn="ctr">
+              <a:buNone/>
+            </a:pPr>
+            <a:r>
+              <a:rPr sz="900" b="1" dirty="0" smtClean="0">
                 <a:solidFill>
                   <a:srgbClr val="1A365D"/>
                 </a:solidFill>
                 <a:latin typeface="Arial"/>
               </a:rPr>
-              <a:t>자동 13단계 (수동 ~30분 대비 60배)</a:t>
+              <a:t>(</a:t>
+            </a:r>
+            <a:r>
+              <a:rPr sz="900" b="1" dirty="0" err="1">
+                <a:solidFill>
+                  <a:srgbClr val="1A365D"/>
+                </a:solidFill>
+                <a:latin typeface="Arial"/>
+              </a:rPr>
+              <a:t>수동</a:t>
+            </a:r>
+            <a:r>
+              <a:rPr sz="900" b="1" dirty="0">
+                <a:solidFill>
+                  <a:srgbClr val="1A365D"/>
+                </a:solidFill>
+                <a:latin typeface="Arial"/>
+              </a:rPr>
+              <a:t> ~30분 </a:t>
+            </a:r>
+            <a:r>
+              <a:rPr sz="900" b="1" dirty="0" err="1">
+                <a:solidFill>
+                  <a:srgbClr val="1A365D"/>
+                </a:solidFill>
+                <a:latin typeface="Arial"/>
+              </a:rPr>
+              <a:t>대비</a:t>
+            </a:r>
+            <a:r>
+              <a:rPr sz="900" b="1" dirty="0">
+                <a:solidFill>
+                  <a:srgbClr val="1A365D"/>
+                </a:solidFill>
+                <a:latin typeface="Arial"/>
+              </a:rPr>
+              <a:t> 60배)</a:t>
             </a:r>
           </a:p>
         </p:txBody>
@@ -2258,27 +4174,110 @@
               <a:buNone/>
             </a:pPr>
             <a:r>
-              <a:rPr b="1">
+              <a:rPr lang="ko-KR" altLang="en-US" sz="1200" b="1" dirty="0" smtClean="0">
                 <a:solidFill>
                   <a:srgbClr val="1A365D"/>
                 </a:solidFill>
                 <a:latin typeface="Arial"/>
               </a:rPr>
-              <a:t>커버리지 100%</a:t>
-            </a:r>
-            <a:endParaRPr lang="en-US" dirty="0"/>
-          </a:p>
-          <a:p>
-            <a:pPr algn="ctr"/>
-            <a:r>
-              <a:rPr b="1">
+              <a:t>누락 없는 문서 </a:t>
+            </a:r>
+            <a:r>
+              <a:rPr sz="1200" b="1" dirty="0" err="1" smtClean="0">
                 <a:solidFill>
                   <a:srgbClr val="1A365D"/>
                 </a:solidFill>
                 <a:latin typeface="Arial"/>
               </a:rPr>
-              <a:t>병합 누락 0건 · verify ↺ merge 재시도</a:t>
-            </a:r>
+              <a:t>병합</a:t>
+            </a:r>
+            <a:r>
+              <a:rPr sz="1200" b="1" dirty="0" smtClean="0">
+                <a:solidFill>
+                  <a:srgbClr val="1A365D"/>
+                </a:solidFill>
+                <a:latin typeface="Arial"/>
+              </a:rPr>
+              <a:t> </a:t>
+            </a:r>
+            <a:r>
+              <a:rPr lang="en-US" sz="1000" b="1" dirty="0">
+                <a:solidFill>
+                  <a:srgbClr val="1A365D"/>
+                </a:solidFill>
+                <a:latin typeface="Arial"/>
+              </a:rPr>
+              <a:t>(</a:t>
+            </a:r>
+            <a:r>
+              <a:rPr lang="ko-KR" altLang="en-US" sz="800" b="1" dirty="0" smtClean="0">
+                <a:solidFill>
+                  <a:srgbClr val="1A365D"/>
+                </a:solidFill>
+                <a:latin typeface="Arial"/>
+              </a:rPr>
+              <a:t>커버리지 </a:t>
+            </a:r>
+            <a:r>
+              <a:rPr lang="en-US" altLang="ko-KR" sz="800" b="1" dirty="0" smtClean="0">
+                <a:solidFill>
+                  <a:srgbClr val="1A365D"/>
+                </a:solidFill>
+                <a:latin typeface="Arial"/>
+              </a:rPr>
+              <a:t>100%, </a:t>
+            </a:r>
+            <a:r>
+              <a:rPr sz="800" b="1" dirty="0" err="1" smtClean="0">
+                <a:solidFill>
+                  <a:srgbClr val="1A365D"/>
+                </a:solidFill>
+                <a:latin typeface="Arial"/>
+              </a:rPr>
+              <a:t>누락</a:t>
+            </a:r>
+            <a:r>
+              <a:rPr sz="800" b="1" dirty="0" smtClean="0">
+                <a:solidFill>
+                  <a:srgbClr val="1A365D"/>
+                </a:solidFill>
+                <a:latin typeface="Arial"/>
+              </a:rPr>
+              <a:t> </a:t>
+            </a:r>
+            <a:r>
+              <a:rPr sz="800" b="1" dirty="0">
+                <a:solidFill>
+                  <a:srgbClr val="1A365D"/>
+                </a:solidFill>
+                <a:latin typeface="Arial"/>
+              </a:rPr>
+              <a:t>0</a:t>
+            </a:r>
+            <a:r>
+              <a:rPr sz="800" b="1" dirty="0" smtClean="0">
+                <a:solidFill>
+                  <a:srgbClr val="1A365D"/>
+                </a:solidFill>
+                <a:latin typeface="Arial"/>
+              </a:rPr>
+              <a:t>건</a:t>
+            </a:r>
+            <a:r>
+              <a:rPr lang="en-US" sz="800" b="1" dirty="0" smtClean="0">
+                <a:solidFill>
+                  <a:srgbClr val="1A365D"/>
+                </a:solidFill>
+                <a:latin typeface="Arial"/>
+              </a:rPr>
+              <a:t>)</a:t>
+            </a:r>
+            <a:endParaRPr sz="1200" b="1" dirty="0">
+              <a:solidFill>
+                <a:srgbClr val="1A365D"/>
+              </a:solidFill>
+              <a:latin typeface="Arial"/>
+            </a:endParaRPr>
           </a:p>
         </p:txBody>
       </p:sp>
@@ -2332,27 +4331,226 @@
               <a:buNone/>
             </a:pPr>
             <a:r>
-              <a:rPr b="1">
+              <a:rPr lang="ko-KR" altLang="en-US" sz="1600" b="1" dirty="0" smtClean="0">
                 <a:solidFill>
                   <a:srgbClr val="1A365D"/>
                 </a:solidFill>
                 <a:latin typeface="Arial"/>
               </a:rPr>
-              <a:t>100% 자동화</a:t>
-            </a:r>
-            <a:endParaRPr lang="en-US" dirty="0"/>
-          </a:p>
-          <a:p>
-            <a:pPr algn="ctr"/>
-            <a:r>
-              <a:rPr b="1">
+              <a:t>사람의 개입이 없는 완전 자동화 </a:t>
+            </a:r>
+            <a:r>
+              <a:rPr lang="en-US" altLang="ko-KR" b="1" dirty="0" smtClean="0">
                 <a:solidFill>
                   <a:srgbClr val="1A365D"/>
                 </a:solidFill>
                 <a:latin typeface="Arial"/>
               </a:rPr>
-              <a:t>분류 → 병합 → 검증 → 연결까지 사람 개입 0건</a:t>
-            </a:r>
+              <a:t/>
+            </a:r>
+            <a:br>
+              <a:rPr lang="en-US" altLang="ko-KR" b="1" dirty="0" smtClean="0">
+                <a:solidFill>
+                  <a:srgbClr val="1A365D"/>
+                </a:solidFill>
+                <a:latin typeface="Arial"/>
+              </a:rPr>
+            </a:br>
+            <a:r>
+              <a:rPr lang="en-US" altLang="ko-KR" sz="1050" b="1" dirty="0" smtClean="0">
+                <a:solidFill>
+                  <a:srgbClr val="1A365D"/>
+                </a:solidFill>
+                <a:latin typeface="Arial"/>
+              </a:rPr>
+              <a:t>(</a:t>
+            </a:r>
+            <a:r>
+              <a:rPr sz="900" b="1" dirty="0" err="1" smtClean="0">
+                <a:solidFill>
+                  <a:srgbClr val="1A365D"/>
+                </a:solidFill>
+                <a:latin typeface="Arial"/>
+              </a:rPr>
+              <a:t>분류</a:t>
+            </a:r>
+            <a:r>
+              <a:rPr sz="900" b="1" dirty="0" smtClean="0">
+                <a:solidFill>
+                  <a:srgbClr val="1A365D"/>
+                </a:solidFill>
+                <a:latin typeface="Arial"/>
+              </a:rPr>
+              <a:t> </a:t>
+            </a:r>
+            <a:r>
+              <a:rPr lang="en-US" altLang="ko-KR" sz="900" b="1" dirty="0" smtClean="0">
+                <a:solidFill>
+                  <a:srgbClr val="1A365D"/>
+                </a:solidFill>
+                <a:latin typeface="Arial"/>
+              </a:rPr>
+              <a:t>&gt;</a:t>
+            </a:r>
+            <a:r>
+              <a:rPr sz="900" b="1" dirty="0" smtClean="0">
+                <a:solidFill>
+                  <a:srgbClr val="1A365D"/>
+                </a:solidFill>
+                <a:latin typeface="Arial"/>
+              </a:rPr>
+              <a:t> </a:t>
+            </a:r>
+            <a:r>
+              <a:rPr sz="900" b="1" dirty="0" err="1">
+                <a:solidFill>
+                  <a:srgbClr val="1A365D"/>
+                </a:solidFill>
+                <a:latin typeface="Arial"/>
+              </a:rPr>
+              <a:t>병합</a:t>
+            </a:r>
+            <a:r>
+              <a:rPr sz="900" b="1" dirty="0">
+                <a:solidFill>
+                  <a:srgbClr val="1A365D"/>
+                </a:solidFill>
+                <a:latin typeface="Arial"/>
+              </a:rPr>
+              <a:t> </a:t>
+            </a:r>
+            <a:r>
+              <a:rPr lang="en-US" altLang="ko-KR" sz="900" b="1" dirty="0" smtClean="0">
+                <a:solidFill>
+                  <a:srgbClr val="1A365D"/>
+                </a:solidFill>
+                <a:latin typeface="Arial"/>
+              </a:rPr>
+              <a:t>&gt;</a:t>
+            </a:r>
+            <a:r>
+              <a:rPr sz="900" b="1" dirty="0" smtClean="0">
+                <a:solidFill>
+                  <a:srgbClr val="1A365D"/>
+                </a:solidFill>
+                <a:latin typeface="Arial"/>
+              </a:rPr>
+              <a:t> </a:t>
+            </a:r>
+            <a:r>
+              <a:rPr sz="900" b="1" dirty="0" err="1">
+                <a:solidFill>
+                  <a:srgbClr val="1A365D"/>
+                </a:solidFill>
+                <a:latin typeface="Arial"/>
+              </a:rPr>
+              <a:t>검증</a:t>
+            </a:r>
+            <a:r>
+              <a:rPr sz="900" b="1" dirty="0">
+                <a:solidFill>
+                  <a:srgbClr val="1A365D"/>
+                </a:solidFill>
+                <a:latin typeface="Arial"/>
+              </a:rPr>
+              <a:t> </a:t>
+            </a:r>
+            <a:r>
+              <a:rPr lang="en-US" altLang="ko-KR" sz="900" b="1" dirty="0" smtClean="0">
+                <a:solidFill>
+                  <a:srgbClr val="1A365D"/>
+                </a:solidFill>
+                <a:latin typeface="Arial"/>
+              </a:rPr>
+              <a:t>&gt;</a:t>
+            </a:r>
+            <a:r>
+              <a:rPr sz="900" b="1" dirty="0" smtClean="0">
+                <a:solidFill>
+                  <a:srgbClr val="1A365D"/>
+                </a:solidFill>
+                <a:latin typeface="Arial"/>
+              </a:rPr>
+              <a:t> </a:t>
+            </a:r>
+            <a:r>
+              <a:rPr sz="900" b="1" dirty="0" err="1">
+                <a:solidFill>
+                  <a:srgbClr val="1A365D"/>
+                </a:solidFill>
+                <a:latin typeface="Arial"/>
+              </a:rPr>
+              <a:t>연결까지</a:t>
+            </a:r>
+            <a:r>
+              <a:rPr sz="900" b="1" dirty="0">
+                <a:solidFill>
+                  <a:srgbClr val="1A365D"/>
+                </a:solidFill>
+                <a:latin typeface="Arial"/>
+              </a:rPr>
+              <a:t> </a:t>
+            </a:r>
+            <a:r>
+              <a:rPr sz="900" b="1" dirty="0" err="1">
+                <a:solidFill>
+                  <a:srgbClr val="1A365D"/>
+                </a:solidFill>
+                <a:latin typeface="Arial"/>
+              </a:rPr>
+              <a:t>사람</a:t>
+            </a:r>
+            <a:r>
+              <a:rPr sz="900" b="1" dirty="0">
+                <a:solidFill>
+                  <a:srgbClr val="1A365D"/>
+                </a:solidFill>
+                <a:latin typeface="Arial"/>
+              </a:rPr>
+              <a:t> </a:t>
+            </a:r>
+            <a:r>
+              <a:rPr sz="900" b="1" dirty="0" err="1">
+                <a:solidFill>
+                  <a:srgbClr val="1A365D"/>
+                </a:solidFill>
+                <a:latin typeface="Arial"/>
+              </a:rPr>
+              <a:t>개입</a:t>
+            </a:r>
+            <a:r>
+              <a:rPr sz="900" b="1" dirty="0">
+                <a:solidFill>
+                  <a:srgbClr val="1A365D"/>
+                </a:solidFill>
+                <a:latin typeface="Arial"/>
+              </a:rPr>
+              <a:t> </a:t>
+            </a:r>
+            <a:r>
+              <a:rPr lang="ko-KR" altLang="en-US" sz="900" b="1" dirty="0" smtClean="0">
+                <a:solidFill>
+                  <a:srgbClr val="1A365D"/>
+                </a:solidFill>
+                <a:latin typeface="Arial"/>
+              </a:rPr>
+              <a:t>불필요</a:t>
+            </a:r>
+            <a:r>
+              <a:rPr lang="en-US" altLang="ko-KR" sz="900" b="1" dirty="0" smtClean="0">
+                <a:solidFill>
+                  <a:srgbClr val="1A365D"/>
+                </a:solidFill>
+                <a:latin typeface="Arial"/>
+              </a:rPr>
+              <a:t>)</a:t>
+            </a:r>
+            <a:endParaRPr sz="900" b="1" dirty="0">
+              <a:solidFill>
+                <a:srgbClr val="1A365D"/>
+              </a:solidFill>
+              <a:latin typeface="Arial"/>
+            </a:endParaRPr>
           </a:p>
         </p:txBody>
       </p:sp>
@@ -2441,17 +4639,113 @@
           <a:bodyPr wrap="square" lIns="0" tIns="0" rIns="0" bIns="0" rtlCol="0" anchor="ctr"/>
           <a:lstStyle/>
           <a:p>
-            <a:pPr marL="0" indent="0" algn="ctr">
-              <a:buNone/>
-            </a:pPr>
-            <a:r>
-              <a:rPr sz="950" i="1">
+            <a:pPr algn="ctr"/>
+            <a:r>
+              <a:rPr lang="ko-KR" altLang="en-US" sz="950" i="1" dirty="0">
                 <a:solidFill>
                   <a:srgbClr val="FFFFFF"/>
                 </a:solidFill>
                 <a:latin typeface="Arial"/>
               </a:rPr>
-              <a:t>LLM 멀티 에이전트로 흩어진 SDLC 산출물을 자동 분류·병합·연결합니다.</a:t>
+              <a:t>흩어져 있던 </a:t>
+            </a:r>
+            <a:r>
+              <a:rPr lang="en-US" altLang="ko-KR" sz="950" i="1" dirty="0">
+                <a:solidFill>
+                  <a:srgbClr val="FFFFFF"/>
+                </a:solidFill>
+                <a:latin typeface="Arial"/>
+              </a:rPr>
+              <a:t>SDLC </a:t>
+            </a:r>
+            <a:r>
+              <a:rPr lang="ko-KR" altLang="en-US" sz="950" i="1" dirty="0">
+                <a:solidFill>
+                  <a:srgbClr val="FFFFFF"/>
+                </a:solidFill>
+                <a:latin typeface="Arial"/>
+              </a:rPr>
+              <a:t>산출물이</a:t>
+            </a:r>
+            <a:r>
+              <a:rPr lang="en-US" altLang="ko-KR" sz="950" i="1" dirty="0">
+                <a:solidFill>
+                  <a:srgbClr val="FFFFFF"/>
+                </a:solidFill>
+                <a:latin typeface="Arial"/>
+              </a:rPr>
+              <a:t>, 13</a:t>
+            </a:r>
+            <a:r>
+              <a:rPr lang="ko-KR" altLang="en-US" sz="950" i="1" dirty="0">
+                <a:solidFill>
+                  <a:srgbClr val="FFFFFF"/>
+                </a:solidFill>
+                <a:latin typeface="Arial"/>
+              </a:rPr>
+              <a:t>개의 </a:t>
+            </a:r>
+            <a:r>
+              <a:rPr lang="en-US" altLang="ko-KR" sz="950" i="1" dirty="0">
+                <a:solidFill>
+                  <a:srgbClr val="FFFFFF"/>
+                </a:solidFill>
+                <a:latin typeface="Arial"/>
+              </a:rPr>
+              <a:t>LLM </a:t>
+            </a:r>
+            <a:r>
+              <a:rPr lang="ko-KR" altLang="en-US" sz="950" i="1" dirty="0">
+                <a:solidFill>
+                  <a:srgbClr val="FFFFFF"/>
+                </a:solidFill>
+                <a:latin typeface="Arial"/>
+              </a:rPr>
+              <a:t>에이전트를 거쳐 </a:t>
+            </a:r>
+            <a:r>
+              <a:rPr lang="ko-KR" altLang="en-US" sz="950" i="1" dirty="0" smtClean="0">
+                <a:solidFill>
+                  <a:srgbClr val="FFFFFF"/>
+                </a:solidFill>
+                <a:latin typeface="Arial"/>
+              </a:rPr>
+              <a:t> </a:t>
+            </a:r>
+            <a:r>
+              <a:rPr lang="en-US" altLang="ko-KR" sz="950" i="1" dirty="0" smtClean="0">
+                <a:solidFill>
+                  <a:srgbClr val="FFFFFF"/>
+                </a:solidFill>
+                <a:latin typeface="Arial"/>
+              </a:rPr>
+              <a:t/>
+            </a:r>
+            <a:br>
+              <a:rPr lang="en-US" altLang="ko-KR" sz="950" i="1" dirty="0" smtClean="0">
+                <a:solidFill>
+                  <a:srgbClr val="FFFFFF"/>
+                </a:solidFill>
+                <a:latin typeface="Arial"/>
+              </a:rPr>
+            </a:br>
+            <a:r>
+              <a:rPr lang="ko-KR" altLang="en-US" sz="950" i="1" dirty="0" smtClean="0">
+                <a:solidFill>
+                  <a:srgbClr val="FFFFFF"/>
+                </a:solidFill>
+                <a:latin typeface="Arial"/>
+              </a:rPr>
+              <a:t>하나의 통합된 위키로 자동 재구성됩니다</a:t>
+            </a:r>
+            <a:r>
+              <a:rPr lang="en-US" altLang="ko-KR" sz="950" i="1" dirty="0" smtClean="0">
+                <a:solidFill>
+                  <a:srgbClr val="FFFFFF"/>
+                </a:solidFill>
+                <a:latin typeface="Arial"/>
+              </a:rPr>
+              <a:t>.</a:t>
             </a:r>
             <a:endParaRPr lang="en-US" sz="950" dirty="0"/>
           </a:p>
@@ -2985,58 +5279,385 @@
               <a:buNone/>
             </a:pPr>
             <a:r>
-              <a:rPr sz="850" b="1">
-                <a:solidFill>
-                  <a:srgbClr val="333333"/>
-                </a:solidFill>
-                <a:latin typeface="Arial"/>
-              </a:rPr>
-              <a:t>선택 이유</a:t>
+              <a:rPr sz="850" b="1" dirty="0" err="1">
+                <a:solidFill>
+                  <a:srgbClr val="333333"/>
+                </a:solidFill>
+                <a:latin typeface="Arial"/>
+              </a:rPr>
+              <a:t>선택</a:t>
+            </a:r>
+            <a:r>
+              <a:rPr sz="850" b="1" dirty="0">
+                <a:solidFill>
+                  <a:srgbClr val="333333"/>
+                </a:solidFill>
+                <a:latin typeface="Arial"/>
+              </a:rPr>
+              <a:t> </a:t>
+            </a:r>
+            <a:r>
+              <a:rPr sz="850" b="1" dirty="0" err="1">
+                <a:solidFill>
+                  <a:srgbClr val="333333"/>
+                </a:solidFill>
+                <a:latin typeface="Arial"/>
+              </a:rPr>
+              <a:t>이유</a:t>
             </a:r>
             <a:endParaRPr lang="en-US" sz="850" dirty="0"/>
           </a:p>
           <a:p>
             <a:r>
-              <a:rPr sz="850" b="1">
-                <a:solidFill>
-                  <a:srgbClr val="333333"/>
-                </a:solidFill>
-                <a:latin typeface="Arial"/>
-              </a:rPr>
-              <a:t>조건부 엣지로 verify ↺ merge 피드백과 decompose 분기를 한 그래프에 그릴 수 있어 ReAct/Chain 한계 극복.</a:t>
+              <a:rPr sz="850" b="1" dirty="0" err="1">
+                <a:solidFill>
+                  <a:srgbClr val="333333"/>
+                </a:solidFill>
+                <a:latin typeface="Arial"/>
+              </a:rPr>
+              <a:t>조건부</a:t>
+            </a:r>
+            <a:r>
+              <a:rPr sz="850" b="1" dirty="0">
+                <a:solidFill>
+                  <a:srgbClr val="333333"/>
+                </a:solidFill>
+                <a:latin typeface="Arial"/>
+              </a:rPr>
+              <a:t> </a:t>
+            </a:r>
+            <a:r>
+              <a:rPr sz="850" b="1" dirty="0" err="1">
+                <a:solidFill>
+                  <a:srgbClr val="333333"/>
+                </a:solidFill>
+                <a:latin typeface="Arial"/>
+              </a:rPr>
+              <a:t>엣지로</a:t>
+            </a:r>
+            <a:r>
+              <a:rPr sz="850" b="1" dirty="0">
+                <a:solidFill>
+                  <a:srgbClr val="333333"/>
+                </a:solidFill>
+                <a:latin typeface="Arial"/>
+              </a:rPr>
+              <a:t> verify </a:t>
+            </a:r>
+            <a:r>
+              <a:rPr lang="en-US" sz="850" b="1" dirty="0" smtClean="0">
+                <a:solidFill>
+                  <a:srgbClr val="333333"/>
+                </a:solidFill>
+                <a:latin typeface="Arial"/>
+              </a:rPr>
+              <a:t>&amp; </a:t>
+            </a:r>
+            <a:r>
+              <a:rPr sz="850" b="1" dirty="0" smtClean="0">
+                <a:solidFill>
+                  <a:srgbClr val="333333"/>
+                </a:solidFill>
+                <a:latin typeface="Arial"/>
+              </a:rPr>
+              <a:t>merge </a:t>
+            </a:r>
+            <a:r>
+              <a:rPr sz="850" b="1" dirty="0" err="1">
+                <a:solidFill>
+                  <a:srgbClr val="333333"/>
+                </a:solidFill>
+                <a:latin typeface="Arial"/>
+              </a:rPr>
+              <a:t>피드백과</a:t>
+            </a:r>
+            <a:r>
+              <a:rPr sz="850" b="1" dirty="0">
+                <a:solidFill>
+                  <a:srgbClr val="333333"/>
+                </a:solidFill>
+                <a:latin typeface="Arial"/>
+              </a:rPr>
+              <a:t> decompose </a:t>
+            </a:r>
+            <a:r>
+              <a:rPr sz="850" b="1" dirty="0" err="1">
+                <a:solidFill>
+                  <a:srgbClr val="333333"/>
+                </a:solidFill>
+                <a:latin typeface="Arial"/>
+              </a:rPr>
+              <a:t>분기를</a:t>
+            </a:r>
+            <a:r>
+              <a:rPr sz="850" b="1" dirty="0">
+                <a:solidFill>
+                  <a:srgbClr val="333333"/>
+                </a:solidFill>
+                <a:latin typeface="Arial"/>
+              </a:rPr>
+              <a:t> 한 </a:t>
+            </a:r>
+            <a:r>
+              <a:rPr sz="850" b="1" dirty="0" err="1">
+                <a:solidFill>
+                  <a:srgbClr val="333333"/>
+                </a:solidFill>
+                <a:latin typeface="Arial"/>
+              </a:rPr>
+              <a:t>그래프에</a:t>
+            </a:r>
+            <a:r>
+              <a:rPr sz="850" b="1" dirty="0">
+                <a:solidFill>
+                  <a:srgbClr val="333333"/>
+                </a:solidFill>
+                <a:latin typeface="Arial"/>
+              </a:rPr>
+              <a:t> </a:t>
+            </a:r>
+            <a:r>
+              <a:rPr sz="850" b="1" dirty="0" err="1">
+                <a:solidFill>
+                  <a:srgbClr val="333333"/>
+                </a:solidFill>
+                <a:latin typeface="Arial"/>
+              </a:rPr>
+              <a:t>그릴</a:t>
+            </a:r>
+            <a:r>
+              <a:rPr sz="850" b="1" dirty="0">
+                <a:solidFill>
+                  <a:srgbClr val="333333"/>
+                </a:solidFill>
+                <a:latin typeface="Arial"/>
+              </a:rPr>
+              <a:t> 수 </a:t>
+            </a:r>
+            <a:r>
+              <a:rPr sz="850" b="1" dirty="0" err="1">
+                <a:solidFill>
+                  <a:srgbClr val="333333"/>
+                </a:solidFill>
+                <a:latin typeface="Arial"/>
+              </a:rPr>
+              <a:t>있어</a:t>
+            </a:r>
+            <a:r>
+              <a:rPr sz="850" b="1" dirty="0">
+                <a:solidFill>
+                  <a:srgbClr val="333333"/>
+                </a:solidFill>
+                <a:latin typeface="Arial"/>
+              </a:rPr>
+              <a:t> </a:t>
+            </a:r>
+            <a:r>
+              <a:rPr sz="850" b="1" dirty="0" err="1">
+                <a:solidFill>
+                  <a:srgbClr val="333333"/>
+                </a:solidFill>
+                <a:latin typeface="Arial"/>
+              </a:rPr>
+              <a:t>ReAct</a:t>
+            </a:r>
+            <a:r>
+              <a:rPr sz="850" b="1" dirty="0">
+                <a:solidFill>
+                  <a:srgbClr val="333333"/>
+                </a:solidFill>
+                <a:latin typeface="Arial"/>
+              </a:rPr>
+              <a:t>/Chain </a:t>
+            </a:r>
+            <a:r>
+              <a:rPr sz="850" b="1" dirty="0" err="1">
+                <a:solidFill>
+                  <a:srgbClr val="333333"/>
+                </a:solidFill>
+                <a:latin typeface="Arial"/>
+              </a:rPr>
+              <a:t>한계</a:t>
+            </a:r>
+            <a:r>
+              <a:rPr sz="850" b="1" dirty="0">
+                <a:solidFill>
+                  <a:srgbClr val="333333"/>
+                </a:solidFill>
+                <a:latin typeface="Arial"/>
+              </a:rPr>
+              <a:t> </a:t>
+            </a:r>
+            <a:r>
+              <a:rPr sz="850" b="1" dirty="0" err="1">
+                <a:solidFill>
+                  <a:srgbClr val="333333"/>
+                </a:solidFill>
+                <a:latin typeface="Arial"/>
+              </a:rPr>
+              <a:t>극복</a:t>
+            </a:r>
+            <a:r>
+              <a:rPr sz="850" b="1" dirty="0">
+                <a:solidFill>
+                  <a:srgbClr val="333333"/>
+                </a:solidFill>
+                <a:latin typeface="Arial"/>
+              </a:rPr>
+              <a:t>.</a:t>
             </a:r>
           </a:p>
           <a:p>
-            <a:r>
-              <a:rPr sz="850" b="1">
-                <a:solidFill>
-                  <a:srgbClr val="333333"/>
-                </a:solidFill>
-                <a:latin typeface="Arial"/>
-              </a:rPr>
-              <a:t/>
-            </a:r>
+            <a:endParaRPr sz="850" b="1" dirty="0">
+              <a:solidFill>
+                <a:srgbClr val="333333"/>
+              </a:solidFill>
+              <a:latin typeface="Arial"/>
+            </a:endParaRPr>
           </a:p>
           <a:p>
             <a:r>
-              <a:rPr sz="850" b="1">
-                <a:solidFill>
-                  <a:srgbClr val="333333"/>
-                </a:solidFill>
-                <a:latin typeface="Arial"/>
-              </a:rPr>
-              <a:t>핵심 활용</a:t>
-            </a:r>
+              <a:rPr sz="850" b="1" dirty="0" err="1">
+                <a:solidFill>
+                  <a:srgbClr val="333333"/>
+                </a:solidFill>
+                <a:latin typeface="Arial"/>
+              </a:rPr>
+              <a:t>핵심</a:t>
+            </a:r>
+            <a:r>
+              <a:rPr sz="850" b="1" dirty="0">
+                <a:solidFill>
+                  <a:srgbClr val="333333"/>
+                </a:solidFill>
+                <a:latin typeface="Arial"/>
+              </a:rPr>
+              <a:t> </a:t>
+            </a:r>
+            <a:r>
+              <a:rPr sz="850" b="1" dirty="0" err="1">
+                <a:solidFill>
+                  <a:srgbClr val="333333"/>
+                </a:solidFill>
+                <a:latin typeface="Arial"/>
+              </a:rPr>
+              <a:t>활용</a:t>
+            </a:r>
+            <a:endParaRPr sz="850" b="1" dirty="0">
+              <a:solidFill>
+                <a:srgbClr val="333333"/>
+              </a:solidFill>
+              <a:latin typeface="Arial"/>
+            </a:endParaRPr>
           </a:p>
           <a:p>
             <a:r>
-              <a:rPr sz="850" b="1">
-                <a:solidFill>
-                  <a:srgbClr val="333333"/>
-                </a:solidFill>
-                <a:latin typeface="Arial"/>
-              </a:rPr>
-              <a:t>per-run SSE → React Flow 실시간 점등. 디버깅·시연 동시.</a:t>
+              <a:rPr sz="850" b="1" dirty="0">
+                <a:solidFill>
+                  <a:srgbClr val="333333"/>
+                </a:solidFill>
+                <a:latin typeface="Arial"/>
+              </a:rPr>
+              <a:t>per-run SSE </a:t>
+            </a:r>
+            <a:r>
+              <a:rPr lang="en-US" altLang="ko-KR" sz="850" b="1" dirty="0" smtClean="0">
+                <a:solidFill>
+                  <a:srgbClr val="333333"/>
+                </a:solidFill>
+                <a:latin typeface="Arial"/>
+              </a:rPr>
+              <a:t>&gt;</a:t>
+            </a:r>
+            <a:r>
+              <a:rPr sz="850" b="1" dirty="0" smtClean="0">
+                <a:solidFill>
+                  <a:srgbClr val="333333"/>
+                </a:solidFill>
+                <a:latin typeface="Arial"/>
+              </a:rPr>
+              <a:t> </a:t>
+            </a:r>
+            <a:r>
+              <a:rPr sz="850" b="1" dirty="0">
+                <a:solidFill>
+                  <a:srgbClr val="333333"/>
+                </a:solidFill>
+                <a:latin typeface="Arial"/>
+              </a:rPr>
+              <a:t>React Flow </a:t>
+            </a:r>
+            <a:r>
+              <a:rPr sz="850" b="1" dirty="0" err="1">
+                <a:solidFill>
+                  <a:srgbClr val="333333"/>
+                </a:solidFill>
+                <a:latin typeface="Arial"/>
+              </a:rPr>
+              <a:t>실시간</a:t>
+            </a:r>
+            <a:r>
+              <a:rPr sz="850" b="1" dirty="0">
+                <a:solidFill>
+                  <a:srgbClr val="333333"/>
+                </a:solidFill>
+                <a:latin typeface="Arial"/>
+              </a:rPr>
+              <a:t> </a:t>
+            </a:r>
+            <a:r>
+              <a:rPr sz="850" b="1" dirty="0" err="1">
+                <a:solidFill>
+                  <a:srgbClr val="333333"/>
+                </a:solidFill>
+                <a:latin typeface="Arial"/>
+              </a:rPr>
+              <a:t>점등</a:t>
+            </a:r>
+            <a:r>
+              <a:rPr sz="850" b="1" dirty="0">
+                <a:solidFill>
+                  <a:srgbClr val="333333"/>
+                </a:solidFill>
+                <a:latin typeface="Arial"/>
+              </a:rPr>
+              <a:t>. </a:t>
+            </a:r>
+            <a:r>
+              <a:rPr sz="850" b="1" dirty="0" err="1">
+                <a:solidFill>
+                  <a:srgbClr val="333333"/>
+                </a:solidFill>
+                <a:latin typeface="Arial"/>
+              </a:rPr>
+              <a:t>디버깅·시연</a:t>
+            </a:r>
+            <a:r>
+              <a:rPr sz="850" b="1" dirty="0">
+                <a:solidFill>
+                  <a:srgbClr val="333333"/>
+                </a:solidFill>
+                <a:latin typeface="Arial"/>
+              </a:rPr>
+              <a:t> </a:t>
+            </a:r>
+            <a:r>
+              <a:rPr sz="850" b="1" dirty="0" err="1">
+                <a:solidFill>
+                  <a:srgbClr val="333333"/>
+                </a:solidFill>
+                <a:latin typeface="Arial"/>
+              </a:rPr>
+              <a:t>동시</a:t>
+            </a:r>
+            <a:r>
+              <a:rPr sz="850" b="1" dirty="0">
+                <a:solidFill>
+                  <a:srgbClr val="333333"/>
+                </a:solidFill>
+                <a:latin typeface="Arial"/>
+              </a:rPr>
+              <a:t>.</a:t>
             </a:r>
           </a:p>
         </p:txBody>
@@ -3217,58 +5838,367 @@
               <a:buNone/>
             </a:pPr>
             <a:r>
-              <a:rPr sz="850" b="1">
-                <a:solidFill>
-                  <a:srgbClr val="333333"/>
-                </a:solidFill>
-                <a:latin typeface="Arial"/>
-              </a:rPr>
-              <a:t>선택 이유</a:t>
+              <a:rPr sz="850" b="1" dirty="0" err="1">
+                <a:solidFill>
+                  <a:srgbClr val="333333"/>
+                </a:solidFill>
+                <a:latin typeface="Arial"/>
+              </a:rPr>
+              <a:t>선택</a:t>
+            </a:r>
+            <a:r>
+              <a:rPr sz="850" b="1" dirty="0">
+                <a:solidFill>
+                  <a:srgbClr val="333333"/>
+                </a:solidFill>
+                <a:latin typeface="Arial"/>
+              </a:rPr>
+              <a:t> </a:t>
+            </a:r>
+            <a:r>
+              <a:rPr sz="850" b="1" dirty="0" err="1">
+                <a:solidFill>
+                  <a:srgbClr val="333333"/>
+                </a:solidFill>
+                <a:latin typeface="Arial"/>
+              </a:rPr>
+              <a:t>이유</a:t>
             </a:r>
             <a:endParaRPr lang="en-US" sz="850" dirty="0"/>
           </a:p>
           <a:p>
             <a:r>
-              <a:rPr sz="850" b="1">
-                <a:solidFill>
-                  <a:srgbClr val="333333"/>
-                </a:solidFill>
-                <a:latin typeface="Arial"/>
-              </a:rPr>
-              <a:t>Fine-tuning 없이 본문을 그대로 근거로 활용. Chroma 임베딩과 BM25를 RRF로 융합해 키워드·의미 동시 검색.</a:t>
+              <a:rPr sz="850" b="1" dirty="0">
+                <a:solidFill>
+                  <a:srgbClr val="333333"/>
+                </a:solidFill>
+                <a:latin typeface="Arial"/>
+              </a:rPr>
+              <a:t>Fine-tuning </a:t>
+            </a:r>
+            <a:r>
+              <a:rPr sz="850" b="1" dirty="0" err="1">
+                <a:solidFill>
+                  <a:srgbClr val="333333"/>
+                </a:solidFill>
+                <a:latin typeface="Arial"/>
+              </a:rPr>
+              <a:t>없이</a:t>
+            </a:r>
+            <a:r>
+              <a:rPr sz="850" b="1" dirty="0">
+                <a:solidFill>
+                  <a:srgbClr val="333333"/>
+                </a:solidFill>
+                <a:latin typeface="Arial"/>
+              </a:rPr>
+              <a:t> </a:t>
+            </a:r>
+            <a:r>
+              <a:rPr sz="850" b="1" dirty="0" err="1">
+                <a:solidFill>
+                  <a:srgbClr val="333333"/>
+                </a:solidFill>
+                <a:latin typeface="Arial"/>
+              </a:rPr>
+              <a:t>본문을</a:t>
+            </a:r>
+            <a:r>
+              <a:rPr sz="850" b="1" dirty="0">
+                <a:solidFill>
+                  <a:srgbClr val="333333"/>
+                </a:solidFill>
+                <a:latin typeface="Arial"/>
+              </a:rPr>
+              <a:t> </a:t>
+            </a:r>
+            <a:r>
+              <a:rPr sz="850" b="1" dirty="0" err="1">
+                <a:solidFill>
+                  <a:srgbClr val="333333"/>
+                </a:solidFill>
+                <a:latin typeface="Arial"/>
+              </a:rPr>
+              <a:t>그대로</a:t>
+            </a:r>
+            <a:r>
+              <a:rPr sz="850" b="1" dirty="0">
+                <a:solidFill>
+                  <a:srgbClr val="333333"/>
+                </a:solidFill>
+                <a:latin typeface="Arial"/>
+              </a:rPr>
+              <a:t> </a:t>
+            </a:r>
+            <a:r>
+              <a:rPr sz="850" b="1" dirty="0" err="1">
+                <a:solidFill>
+                  <a:srgbClr val="333333"/>
+                </a:solidFill>
+                <a:latin typeface="Arial"/>
+              </a:rPr>
+              <a:t>근거로</a:t>
+            </a:r>
+            <a:r>
+              <a:rPr sz="850" b="1" dirty="0">
+                <a:solidFill>
+                  <a:srgbClr val="333333"/>
+                </a:solidFill>
+                <a:latin typeface="Arial"/>
+              </a:rPr>
+              <a:t> </a:t>
+            </a:r>
+            <a:r>
+              <a:rPr sz="850" b="1" dirty="0" err="1">
+                <a:solidFill>
+                  <a:srgbClr val="333333"/>
+                </a:solidFill>
+                <a:latin typeface="Arial"/>
+              </a:rPr>
+              <a:t>활용</a:t>
+            </a:r>
+            <a:r>
+              <a:rPr sz="850" b="1" dirty="0">
+                <a:solidFill>
+                  <a:srgbClr val="333333"/>
+                </a:solidFill>
+                <a:latin typeface="Arial"/>
+              </a:rPr>
+              <a:t>. Chroma </a:t>
+            </a:r>
+            <a:r>
+              <a:rPr sz="850" b="1" dirty="0" err="1">
+                <a:solidFill>
+                  <a:srgbClr val="333333"/>
+                </a:solidFill>
+                <a:latin typeface="Arial"/>
+              </a:rPr>
+              <a:t>임베딩과</a:t>
+            </a:r>
+            <a:r>
+              <a:rPr sz="850" b="1" dirty="0">
+                <a:solidFill>
+                  <a:srgbClr val="333333"/>
+                </a:solidFill>
+                <a:latin typeface="Arial"/>
+              </a:rPr>
+              <a:t> BM25를 </a:t>
+            </a:r>
+            <a:r>
+              <a:rPr sz="850" b="1" dirty="0" err="1">
+                <a:solidFill>
+                  <a:srgbClr val="333333"/>
+                </a:solidFill>
+                <a:latin typeface="Arial"/>
+              </a:rPr>
+              <a:t>RRF로</a:t>
+            </a:r>
+            <a:r>
+              <a:rPr sz="850" b="1" dirty="0">
+                <a:solidFill>
+                  <a:srgbClr val="333333"/>
+                </a:solidFill>
+                <a:latin typeface="Arial"/>
+              </a:rPr>
+              <a:t> </a:t>
+            </a:r>
+            <a:r>
+              <a:rPr sz="850" b="1" dirty="0" err="1">
+                <a:solidFill>
+                  <a:srgbClr val="333333"/>
+                </a:solidFill>
+                <a:latin typeface="Arial"/>
+              </a:rPr>
+              <a:t>융합해</a:t>
+            </a:r>
+            <a:r>
+              <a:rPr sz="850" b="1" dirty="0">
+                <a:solidFill>
+                  <a:srgbClr val="333333"/>
+                </a:solidFill>
+                <a:latin typeface="Arial"/>
+              </a:rPr>
+              <a:t> </a:t>
+            </a:r>
+            <a:r>
+              <a:rPr sz="850" b="1" dirty="0" err="1">
+                <a:solidFill>
+                  <a:srgbClr val="333333"/>
+                </a:solidFill>
+                <a:latin typeface="Arial"/>
+              </a:rPr>
+              <a:t>키워드·의미</a:t>
+            </a:r>
+            <a:r>
+              <a:rPr sz="850" b="1" dirty="0">
+                <a:solidFill>
+                  <a:srgbClr val="333333"/>
+                </a:solidFill>
+                <a:latin typeface="Arial"/>
+              </a:rPr>
+              <a:t> </a:t>
+            </a:r>
+            <a:r>
+              <a:rPr sz="850" b="1" dirty="0" err="1">
+                <a:solidFill>
+                  <a:srgbClr val="333333"/>
+                </a:solidFill>
+                <a:latin typeface="Arial"/>
+              </a:rPr>
+              <a:t>동시</a:t>
+            </a:r>
+            <a:r>
+              <a:rPr sz="850" b="1" dirty="0">
+                <a:solidFill>
+                  <a:srgbClr val="333333"/>
+                </a:solidFill>
+                <a:latin typeface="Arial"/>
+              </a:rPr>
+              <a:t> </a:t>
+            </a:r>
+            <a:r>
+              <a:rPr sz="850" b="1" dirty="0" err="1">
+                <a:solidFill>
+                  <a:srgbClr val="333333"/>
+                </a:solidFill>
+                <a:latin typeface="Arial"/>
+              </a:rPr>
+              <a:t>검색</a:t>
+            </a:r>
+            <a:r>
+              <a:rPr sz="850" b="1" dirty="0">
+                <a:solidFill>
+                  <a:srgbClr val="333333"/>
+                </a:solidFill>
+                <a:latin typeface="Arial"/>
+              </a:rPr>
+              <a:t>.</a:t>
             </a:r>
           </a:p>
           <a:p>
-            <a:r>
-              <a:rPr sz="850" b="1">
-                <a:solidFill>
-                  <a:srgbClr val="333333"/>
-                </a:solidFill>
-                <a:latin typeface="Arial"/>
-              </a:rPr>
-              <a:t/>
-            </a:r>
+            <a:endParaRPr sz="850" b="1" dirty="0">
+              <a:solidFill>
+                <a:srgbClr val="333333"/>
+              </a:solidFill>
+              <a:latin typeface="Arial"/>
+            </a:endParaRPr>
           </a:p>
           <a:p>
             <a:r>
-              <a:rPr sz="850" b="1">
-                <a:solidFill>
-                  <a:srgbClr val="333333"/>
-                </a:solidFill>
-                <a:latin typeface="Arial"/>
-              </a:rPr>
-              <a:t>핵심 성과</a:t>
-            </a:r>
+              <a:rPr sz="850" b="1" dirty="0" err="1">
+                <a:solidFill>
+                  <a:srgbClr val="333333"/>
+                </a:solidFill>
+                <a:latin typeface="Arial"/>
+              </a:rPr>
+              <a:t>핵심</a:t>
+            </a:r>
+            <a:r>
+              <a:rPr sz="850" b="1" dirty="0">
+                <a:solidFill>
+                  <a:srgbClr val="333333"/>
+                </a:solidFill>
+                <a:latin typeface="Arial"/>
+              </a:rPr>
+              <a:t> </a:t>
+            </a:r>
+            <a:r>
+              <a:rPr sz="850" b="1" dirty="0" err="1">
+                <a:solidFill>
+                  <a:srgbClr val="333333"/>
+                </a:solidFill>
+                <a:latin typeface="Arial"/>
+              </a:rPr>
+              <a:t>성과</a:t>
+            </a:r>
+            <a:endParaRPr sz="850" b="1" dirty="0">
+              <a:solidFill>
+                <a:srgbClr val="333333"/>
+              </a:solidFill>
+              <a:latin typeface="Arial"/>
+            </a:endParaRPr>
           </a:p>
           <a:p>
             <a:r>
-              <a:rPr sz="850" b="1">
-                <a:solidFill>
-                  <a:srgbClr val="333333"/>
-                </a:solidFill>
-                <a:latin typeface="Arial"/>
-              </a:rPr>
-              <a:t>벡터 + LLM judge 2단계 판정 → false-positive 0건, 커버리지 100%.</a:t>
+              <a:rPr sz="850" b="1" dirty="0" err="1">
+                <a:solidFill>
+                  <a:srgbClr val="333333"/>
+                </a:solidFill>
+                <a:latin typeface="Arial"/>
+              </a:rPr>
+              <a:t>벡터</a:t>
+            </a:r>
+            <a:r>
+              <a:rPr sz="850" b="1" dirty="0">
+                <a:solidFill>
+                  <a:srgbClr val="333333"/>
+                </a:solidFill>
+                <a:latin typeface="Arial"/>
+              </a:rPr>
+              <a:t> + LLM judge 2단계 </a:t>
+            </a:r>
+            <a:r>
+              <a:rPr sz="850" b="1" dirty="0" err="1">
+                <a:solidFill>
+                  <a:srgbClr val="333333"/>
+                </a:solidFill>
+                <a:latin typeface="Arial"/>
+              </a:rPr>
+              <a:t>판정</a:t>
+            </a:r>
+            <a:r>
+              <a:rPr sz="850" b="1" dirty="0">
+                <a:solidFill>
+                  <a:srgbClr val="333333"/>
+                </a:solidFill>
+                <a:latin typeface="Arial"/>
+              </a:rPr>
+              <a:t> </a:t>
+            </a:r>
+            <a:r>
+              <a:rPr lang="en-US" altLang="ko-KR" sz="850" b="1" dirty="0" smtClean="0">
+                <a:solidFill>
+                  <a:srgbClr val="333333"/>
+                </a:solidFill>
+                <a:latin typeface="Arial"/>
+              </a:rPr>
+              <a:t>&gt;</a:t>
+            </a:r>
+            <a:r>
+              <a:rPr sz="850" b="1" dirty="0" smtClean="0">
+                <a:solidFill>
+                  <a:srgbClr val="333333"/>
+                </a:solidFill>
+                <a:latin typeface="Arial"/>
+              </a:rPr>
+              <a:t> </a:t>
+            </a:r>
+            <a:r>
+              <a:rPr sz="850" b="1" dirty="0">
+                <a:solidFill>
+                  <a:srgbClr val="333333"/>
+                </a:solidFill>
+                <a:latin typeface="Arial"/>
+              </a:rPr>
+              <a:t>false-positive 0건, </a:t>
+            </a:r>
+            <a:r>
+              <a:rPr sz="850" b="1" dirty="0" err="1">
+                <a:solidFill>
+                  <a:srgbClr val="333333"/>
+                </a:solidFill>
+                <a:latin typeface="Arial"/>
+              </a:rPr>
+              <a:t>커버리지</a:t>
+            </a:r>
+            <a:r>
+              <a:rPr sz="850" b="1" dirty="0">
+                <a:solidFill>
+                  <a:srgbClr val="333333"/>
+                </a:solidFill>
+                <a:latin typeface="Arial"/>
+              </a:rPr>
+              <a:t> 100%.</a:t>
             </a:r>
           </a:p>
         </p:txBody>
@@ -3449,59 +6379,462 @@
               <a:buNone/>
             </a:pPr>
             <a:r>
-              <a:rPr sz="850" b="1">
-                <a:solidFill>
-                  <a:srgbClr val="333333"/>
-                </a:solidFill>
-                <a:latin typeface="Arial"/>
-              </a:rPr>
-              <a:t>선택 이유</a:t>
-            </a:r>
-            <a:endParaRPr lang="en-US" sz="850" dirty="0"/>
+              <a:rPr sz="700" b="1" dirty="0" err="1">
+                <a:solidFill>
+                  <a:srgbClr val="333333"/>
+                </a:solidFill>
+                <a:latin typeface="Arial"/>
+              </a:rPr>
+              <a:t>선택</a:t>
+            </a:r>
+            <a:r>
+              <a:rPr sz="700" b="1" dirty="0">
+                <a:solidFill>
+                  <a:srgbClr val="333333"/>
+                </a:solidFill>
+                <a:latin typeface="Arial"/>
+              </a:rPr>
+              <a:t> </a:t>
+            </a:r>
+            <a:r>
+              <a:rPr sz="700" b="1" dirty="0" err="1">
+                <a:solidFill>
+                  <a:srgbClr val="333333"/>
+                </a:solidFill>
+                <a:latin typeface="Arial"/>
+              </a:rPr>
+              <a:t>이유</a:t>
+            </a:r>
+            <a:endParaRPr lang="en-US" sz="700" dirty="0"/>
           </a:p>
           <a:p>
             <a:r>
-              <a:rPr sz="850" b="1">
-                <a:solidFill>
-                  <a:srgbClr val="333333"/>
-                </a:solidFill>
-                <a:latin typeface="Arial"/>
-              </a:rPr>
-              <a:t>wikilink 단독으로는 페이지 관계의 의미가 표현되지 않음. 9종 엣지 타입 + 상·중·하 신뢰도로 관계를 구조화.</a:t>
-            </a:r>
+              <a:rPr lang="en-US" altLang="ko-KR" sz="850" b="1" dirty="0" err="1">
+                <a:solidFill>
+                  <a:srgbClr val="333333"/>
+                </a:solidFill>
+                <a:latin typeface="Arial"/>
+              </a:rPr>
+              <a:t>wikilink</a:t>
+            </a:r>
+            <a:r>
+              <a:rPr lang="en-US" altLang="ko-KR" sz="850" b="1" dirty="0">
+                <a:solidFill>
+                  <a:srgbClr val="333333"/>
+                </a:solidFill>
+                <a:latin typeface="Arial"/>
+              </a:rPr>
+              <a:t> </a:t>
+            </a:r>
+            <a:r>
+              <a:rPr lang="ko-KR" altLang="en-US" sz="850" b="1" dirty="0">
+                <a:solidFill>
+                  <a:srgbClr val="333333"/>
+                </a:solidFill>
+                <a:latin typeface="Arial"/>
+              </a:rPr>
+              <a:t>단독으로는 페이지 관계의 의미가 표현되지 않음</a:t>
+            </a:r>
+            <a:r>
+              <a:rPr lang="en-US" altLang="ko-KR" sz="850" b="1" dirty="0">
+                <a:solidFill>
+                  <a:srgbClr val="333333"/>
+                </a:solidFill>
+                <a:latin typeface="Arial"/>
+              </a:rPr>
+              <a:t>. 9</a:t>
+            </a:r>
+            <a:r>
+              <a:rPr lang="ko-KR" altLang="en-US" sz="850" b="1" dirty="0">
+                <a:solidFill>
+                  <a:srgbClr val="333333"/>
+                </a:solidFill>
+                <a:latin typeface="Arial"/>
+              </a:rPr>
+              <a:t>종  </a:t>
+            </a:r>
+            <a:r>
+              <a:rPr lang="ko-KR" altLang="en-US" sz="850" b="1" dirty="0" err="1">
+                <a:solidFill>
+                  <a:srgbClr val="333333"/>
+                </a:solidFill>
+                <a:latin typeface="Arial"/>
+              </a:rPr>
+              <a:t>엣지</a:t>
+            </a:r>
+            <a:r>
+              <a:rPr lang="ko-KR" altLang="en-US" sz="850" b="1" dirty="0">
+                <a:solidFill>
+                  <a:srgbClr val="333333"/>
+                </a:solidFill>
+                <a:latin typeface="Arial"/>
+              </a:rPr>
+              <a:t> 타입 </a:t>
+            </a:r>
+            <a:r>
+              <a:rPr lang="en-US" altLang="ko-KR" sz="850" b="1" dirty="0">
+                <a:solidFill>
+                  <a:srgbClr val="333333"/>
+                </a:solidFill>
+                <a:latin typeface="Arial"/>
+              </a:rPr>
+              <a:t>+ </a:t>
+            </a:r>
+            <a:r>
+              <a:rPr lang="ko-KR" altLang="en-US" sz="850" b="1" dirty="0">
+                <a:solidFill>
+                  <a:srgbClr val="333333"/>
+                </a:solidFill>
+                <a:latin typeface="Arial"/>
+              </a:rPr>
+              <a:t>상</a:t>
+            </a:r>
+            <a:r>
+              <a:rPr lang="en-US" altLang="ko-KR" sz="850" b="1" dirty="0">
+                <a:solidFill>
+                  <a:srgbClr val="333333"/>
+                </a:solidFill>
+                <a:latin typeface="Arial"/>
+              </a:rPr>
+              <a:t>·</a:t>
+            </a:r>
+            <a:r>
+              <a:rPr lang="ko-KR" altLang="en-US" sz="850" b="1" dirty="0">
+                <a:solidFill>
+                  <a:srgbClr val="333333"/>
+                </a:solidFill>
+                <a:latin typeface="Arial"/>
+              </a:rPr>
+              <a:t>중</a:t>
+            </a:r>
+            <a:r>
+              <a:rPr lang="en-US" altLang="ko-KR" sz="850" b="1" dirty="0">
+                <a:solidFill>
+                  <a:srgbClr val="333333"/>
+                </a:solidFill>
+                <a:latin typeface="Arial"/>
+              </a:rPr>
+              <a:t>·</a:t>
+            </a:r>
+            <a:r>
+              <a:rPr lang="ko-KR" altLang="en-US" sz="850" b="1" dirty="0">
+                <a:solidFill>
+                  <a:srgbClr val="333333"/>
+                </a:solidFill>
+                <a:latin typeface="Arial"/>
+              </a:rPr>
+              <a:t>하 신뢰도로 관계를 구조화</a:t>
+            </a:r>
+            <a:r>
+              <a:rPr lang="en-US" altLang="ko-KR" sz="850" b="1" dirty="0">
+                <a:solidFill>
+                  <a:srgbClr val="333333"/>
+                </a:solidFill>
+                <a:latin typeface="Arial"/>
+              </a:rPr>
+              <a:t>.</a:t>
+            </a:r>
+            <a:endParaRPr sz="850" b="1" dirty="0">
+              <a:solidFill>
+                <a:srgbClr val="333333"/>
+              </a:solidFill>
+              <a:latin typeface="Arial"/>
+            </a:endParaRPr>
           </a:p>
           <a:p>
             <a:r>
-              <a:rPr sz="850" b="1">
-                <a:solidFill>
-                  <a:srgbClr val="333333"/>
-                </a:solidFill>
-                <a:latin typeface="Arial"/>
-              </a:rPr>
-              <a:t/>
-            </a:r>
+              <a:rPr sz="700" b="1" dirty="0" err="1">
+                <a:solidFill>
+                  <a:srgbClr val="333333"/>
+                </a:solidFill>
+                <a:latin typeface="Arial"/>
+              </a:rPr>
+              <a:t>구현</a:t>
+            </a:r>
+            <a:r>
+              <a:rPr sz="700" b="1" dirty="0">
+                <a:solidFill>
+                  <a:srgbClr val="333333"/>
+                </a:solidFill>
+                <a:latin typeface="Arial"/>
+              </a:rPr>
+              <a:t> </a:t>
+            </a:r>
+            <a:r>
+              <a:rPr sz="700" b="1" dirty="0" err="1">
+                <a:solidFill>
+                  <a:srgbClr val="333333"/>
+                </a:solidFill>
+                <a:latin typeface="Arial"/>
+              </a:rPr>
+              <a:t>포인트</a:t>
+            </a:r>
+            <a:endParaRPr sz="700" b="1" dirty="0">
+              <a:solidFill>
+                <a:srgbClr val="333333"/>
+              </a:solidFill>
+              <a:latin typeface="Arial"/>
+            </a:endParaRPr>
           </a:p>
           <a:p>
             <a:r>
-              <a:rPr sz="850" b="1">
-                <a:solidFill>
-                  <a:srgbClr val="333333"/>
-                </a:solidFill>
-                <a:latin typeface="Arial"/>
-              </a:rPr>
-              <a:t>구현 포인트</a:t>
-            </a:r>
-          </a:p>
-          <a:p>
-            <a:r>
-              <a:rPr sz="850" b="1">
-                <a:solidFill>
-                  <a:srgbClr val="333333"/>
-                </a:solidFill>
-                <a:latin typeface="Arial"/>
-              </a:rPr>
-              <a:t>crossref Agent가 LLM 단일 호출로 관계 타입·신뢰도·근거를 동시 산출. 5단 evidence (요약·사유·인용·공유 개념·함께 볼 때)를 본문 표와 그래프에 동시 반영.</a:t>
-            </a:r>
+              <a:rPr lang="ko-KR" altLang="en-US" sz="850" b="1" dirty="0">
+                <a:solidFill>
+                  <a:srgbClr val="333333"/>
+                </a:solidFill>
+                <a:latin typeface="Arial"/>
+              </a:rPr>
+              <a:t> </a:t>
+            </a:r>
+            <a:r>
+              <a:rPr lang="en-US" altLang="ko-KR" sz="850" b="1" dirty="0" err="1">
+                <a:solidFill>
+                  <a:srgbClr val="333333"/>
+                </a:solidFill>
+                <a:latin typeface="Arial"/>
+              </a:rPr>
+              <a:t>crossref</a:t>
+            </a:r>
+            <a:r>
+              <a:rPr lang="en-US" altLang="ko-KR" sz="850" b="1" dirty="0">
+                <a:solidFill>
+                  <a:srgbClr val="333333"/>
+                </a:solidFill>
+                <a:latin typeface="Arial"/>
+              </a:rPr>
+              <a:t> Agent</a:t>
+            </a:r>
+            <a:r>
+              <a:rPr lang="ko-KR" altLang="en-US" sz="850" b="1" dirty="0">
+                <a:solidFill>
+                  <a:srgbClr val="333333"/>
+                </a:solidFill>
+                <a:latin typeface="Arial"/>
+              </a:rPr>
+              <a:t>가 </a:t>
+            </a:r>
+            <a:r>
+              <a:rPr lang="en-US" altLang="ko-KR" sz="850" b="1" dirty="0">
+                <a:solidFill>
+                  <a:srgbClr val="333333"/>
+                </a:solidFill>
+                <a:latin typeface="Arial"/>
+              </a:rPr>
+              <a:t>LLM </a:t>
+            </a:r>
+            <a:r>
+              <a:rPr lang="ko-KR" altLang="en-US" sz="850" b="1" dirty="0">
+                <a:solidFill>
+                  <a:srgbClr val="333333"/>
+                </a:solidFill>
+                <a:latin typeface="Arial"/>
+              </a:rPr>
+              <a:t>단일 호출로 관계 타입</a:t>
+            </a:r>
+            <a:r>
+              <a:rPr lang="en-US" altLang="ko-KR" sz="850" b="1" dirty="0">
+                <a:solidFill>
+                  <a:srgbClr val="333333"/>
+                </a:solidFill>
+                <a:latin typeface="Arial"/>
+              </a:rPr>
+              <a:t>·</a:t>
+            </a:r>
+            <a:r>
+              <a:rPr lang="ko-KR" altLang="en-US" sz="850" b="1" dirty="0">
+                <a:solidFill>
+                  <a:srgbClr val="333333"/>
+                </a:solidFill>
+                <a:latin typeface="Arial"/>
+              </a:rPr>
+              <a:t>신뢰도</a:t>
+            </a:r>
+            <a:r>
+              <a:rPr lang="en-US" altLang="ko-KR" sz="850" b="1" dirty="0">
+                <a:solidFill>
+                  <a:srgbClr val="333333"/>
+                </a:solidFill>
+                <a:latin typeface="Arial"/>
+              </a:rPr>
+              <a:t>·</a:t>
+            </a:r>
+            <a:r>
+              <a:rPr lang="ko-KR" altLang="en-US" sz="850" b="1" dirty="0">
+                <a:solidFill>
+                  <a:srgbClr val="333333"/>
+                </a:solidFill>
+                <a:latin typeface="Arial"/>
+              </a:rPr>
+              <a:t>근거를 </a:t>
+            </a:r>
+            <a:r>
+              <a:rPr lang="ko-KR" altLang="en-US" sz="850" b="1" dirty="0">
+                <a:solidFill>
+                  <a:srgbClr val="333333"/>
+                </a:solidFill>
+                <a:latin typeface="Arial"/>
+              </a:rPr>
+              <a:t>동시 산출</a:t>
+            </a:r>
+            <a:r>
+              <a:rPr lang="en-US" altLang="ko-KR" sz="850" b="1" dirty="0">
+                <a:solidFill>
+                  <a:srgbClr val="333333"/>
+                </a:solidFill>
+                <a:latin typeface="Arial"/>
+              </a:rPr>
+              <a:t>. 5</a:t>
+            </a:r>
+            <a:r>
+              <a:rPr lang="ko-KR" altLang="en-US" sz="850" b="1" dirty="0">
+                <a:solidFill>
+                  <a:srgbClr val="333333"/>
+                </a:solidFill>
+                <a:latin typeface="Arial"/>
+              </a:rPr>
+              <a:t>단 </a:t>
+            </a:r>
+            <a:r>
+              <a:rPr lang="en-US" altLang="ko-KR" sz="850" b="1" dirty="0">
+                <a:solidFill>
+                  <a:srgbClr val="333333"/>
+                </a:solidFill>
+                <a:latin typeface="Arial"/>
+              </a:rPr>
+              <a:t>evidence (</a:t>
+            </a:r>
+            <a:r>
+              <a:rPr lang="ko-KR" altLang="en-US" sz="850" b="1" dirty="0">
+                <a:solidFill>
+                  <a:srgbClr val="333333"/>
+                </a:solidFill>
+                <a:latin typeface="Arial"/>
+              </a:rPr>
+              <a:t>요약</a:t>
+            </a:r>
+            <a:r>
+              <a:rPr lang="en-US" altLang="ko-KR" sz="850" b="1" dirty="0">
+                <a:solidFill>
+                  <a:srgbClr val="333333"/>
+                </a:solidFill>
+                <a:latin typeface="Arial"/>
+              </a:rPr>
+              <a:t>·</a:t>
+            </a:r>
+            <a:r>
+              <a:rPr lang="ko-KR" altLang="en-US" sz="850" b="1" dirty="0">
+                <a:solidFill>
+                  <a:srgbClr val="333333"/>
+                </a:solidFill>
+                <a:latin typeface="Arial"/>
+              </a:rPr>
+              <a:t>사유</a:t>
+            </a:r>
+            <a:r>
+              <a:rPr lang="en-US" altLang="ko-KR" sz="850" b="1" dirty="0">
+                <a:solidFill>
+                  <a:srgbClr val="333333"/>
+                </a:solidFill>
+                <a:latin typeface="Arial"/>
+              </a:rPr>
+              <a:t>·</a:t>
+            </a:r>
+            <a:r>
+              <a:rPr lang="ko-KR" altLang="en-US" sz="850" b="1" dirty="0">
+                <a:solidFill>
+                  <a:srgbClr val="333333"/>
+                </a:solidFill>
+                <a:latin typeface="Arial"/>
+              </a:rPr>
+              <a:t>인용</a:t>
+            </a:r>
+            <a:r>
+              <a:rPr lang="en-US" altLang="ko-KR" sz="850" b="1" dirty="0">
+                <a:solidFill>
+                  <a:srgbClr val="333333"/>
+                </a:solidFill>
+                <a:latin typeface="Arial"/>
+              </a:rPr>
+              <a:t>·</a:t>
+            </a:r>
+            <a:r>
+              <a:rPr lang="ko-KR" altLang="en-US" sz="850" b="1" dirty="0">
+                <a:solidFill>
+                  <a:srgbClr val="333333"/>
+                </a:solidFill>
+                <a:latin typeface="Arial"/>
+              </a:rPr>
+              <a:t>공유 개념</a:t>
+            </a:r>
+            <a:r>
+              <a:rPr lang="en-US" altLang="ko-KR" sz="850" b="1" dirty="0">
+                <a:solidFill>
+                  <a:srgbClr val="333333"/>
+                </a:solidFill>
+                <a:latin typeface="Arial"/>
+              </a:rPr>
+              <a:t>·</a:t>
+            </a:r>
+            <a:r>
+              <a:rPr lang="ko-KR" altLang="en-US" sz="850" b="1" dirty="0">
+                <a:solidFill>
+                  <a:srgbClr val="333333"/>
+                </a:solidFill>
+                <a:latin typeface="Arial"/>
+              </a:rPr>
+              <a:t>함께 볼 때</a:t>
+            </a:r>
+            <a:r>
+              <a:rPr lang="en-US" altLang="ko-KR" sz="850" b="1" dirty="0">
+                <a:solidFill>
+                  <a:srgbClr val="333333"/>
+                </a:solidFill>
+                <a:latin typeface="Arial"/>
+              </a:rPr>
+              <a:t>)</a:t>
+            </a:r>
+            <a:r>
+              <a:rPr lang="ko-KR" altLang="en-US" sz="850" b="1" dirty="0">
+                <a:solidFill>
+                  <a:srgbClr val="333333"/>
+                </a:solidFill>
+                <a:latin typeface="Arial"/>
+              </a:rPr>
+              <a:t>를 </a:t>
+            </a:r>
+            <a:r>
+              <a:rPr lang="ko-KR" altLang="en-US" sz="850" b="1" dirty="0">
+                <a:solidFill>
+                  <a:srgbClr val="333333"/>
+                </a:solidFill>
+                <a:latin typeface="Arial"/>
+              </a:rPr>
+              <a:t>본문 표와 </a:t>
+            </a:r>
+            <a:r>
+              <a:rPr lang="ko-KR" altLang="en-US" sz="850" b="1" dirty="0">
+                <a:solidFill>
+                  <a:srgbClr val="333333"/>
+                </a:solidFill>
+                <a:latin typeface="Arial"/>
+              </a:rPr>
+              <a:t>그래프에 동시 반영</a:t>
+            </a:r>
+            <a:r>
+              <a:rPr lang="en-US" altLang="ko-KR" sz="850" b="1" dirty="0">
+                <a:solidFill>
+                  <a:srgbClr val="333333"/>
+                </a:solidFill>
+                <a:latin typeface="Arial"/>
+              </a:rPr>
+              <a:t>.</a:t>
+            </a:r>
+            <a:endParaRPr sz="850" b="1" dirty="0">
+              <a:solidFill>
+                <a:srgbClr val="333333"/>
+              </a:solidFill>
+              <a:latin typeface="Arial"/>
+            </a:endParaRPr>
           </a:p>
         </p:txBody>
       </p:sp>
@@ -3521,8 +6854,8 @@
         </p:blipFill>
         <p:spPr>
           <a:xfrm>
-            <a:off x="723103" y="1888236"/>
-            <a:ext cx="3683578" cy="1920240"/>
+            <a:off x="506538" y="1223586"/>
+            <a:ext cx="4104933" cy="3393476"/>
           </a:xfrm>
           <a:prstGeom prst="rect">
             <a:avLst/>
@@ -3860,8 +7193,8 @@
         </p:nvSpPr>
         <p:spPr>
           <a:xfrm>
-            <a:off x="420624" y="1033272"/>
-            <a:ext cx="8302752" cy="548640"/>
+            <a:off x="420624" y="987552"/>
+            <a:ext cx="8302752" cy="594360"/>
           </a:xfrm>
           <a:prstGeom prst="rect">
             <a:avLst/>
@@ -3873,63 +7206,412 @@
           <a:bodyPr wrap="square" lIns="0" tIns="0" rIns="0" bIns="0" rtlCol="0" anchor="t"/>
           <a:lstStyle/>
           <a:p>
-            <a:pPr marL="0" indent="0">
-              <a:buNone/>
+            <a:pPr marL="171450" indent="-171450">
+              <a:buFont typeface="Arial" panose="020B0604020202020204" pitchFamily="34" charset="0"/>
+              <a:buChar char="•"/>
             </a:pPr>
             <a:r>
-              <a:rPr sz="1000">
+              <a:rPr lang="en-US" altLang="ko-KR" sz="900" dirty="0" err="1">
                 <a:solidFill>
                   <a:srgbClr val="FFFFFF"/>
                 </a:solidFill>
                 <a:latin typeface="Arial"/>
               </a:rPr>
-              <a:t>단순 RAG·ReAct 만으로는 SDLC 산출물의 중복·모순을 해소할 수 없음.</a:t>
-            </a:r>
-            <a:endParaRPr lang="en-US" sz="1000" dirty="0"/>
+              <a:t>RAG·ReAct</a:t>
+            </a:r>
+            <a:r>
+              <a:rPr lang="en-US" altLang="ko-KR" sz="900" dirty="0">
+                <a:solidFill>
+                  <a:srgbClr val="FFFFFF"/>
+                </a:solidFill>
+                <a:latin typeface="Arial"/>
+              </a:rPr>
+              <a:t> </a:t>
+            </a:r>
+            <a:r>
+              <a:rPr lang="ko-KR" altLang="en-US" sz="900" dirty="0">
+                <a:solidFill>
+                  <a:srgbClr val="FFFFFF"/>
+                </a:solidFill>
+                <a:latin typeface="Arial"/>
+              </a:rPr>
+              <a:t>단독 패턴으로는 </a:t>
+            </a:r>
+            <a:r>
+              <a:rPr lang="en-US" altLang="ko-KR" sz="900" dirty="0">
+                <a:solidFill>
+                  <a:srgbClr val="FFFFFF"/>
+                </a:solidFill>
+                <a:latin typeface="Arial"/>
+              </a:rPr>
+              <a:t>SDLC </a:t>
+            </a:r>
+            <a:r>
+              <a:rPr lang="ko-KR" altLang="en-US" sz="900" dirty="0">
+                <a:solidFill>
+                  <a:srgbClr val="FFFFFF"/>
+                </a:solidFill>
+                <a:latin typeface="Arial"/>
+              </a:rPr>
+              <a:t>산출물의 중복</a:t>
+            </a:r>
+            <a:r>
+              <a:rPr lang="en-US" altLang="ko-KR" sz="900" dirty="0">
+                <a:solidFill>
+                  <a:srgbClr val="FFFFFF"/>
+                </a:solidFill>
+                <a:latin typeface="Arial"/>
+              </a:rPr>
+              <a:t>·</a:t>
+            </a:r>
+            <a:r>
+              <a:rPr lang="ko-KR" altLang="en-US" sz="900" dirty="0">
+                <a:solidFill>
+                  <a:srgbClr val="FFFFFF"/>
+                </a:solidFill>
+                <a:latin typeface="Arial"/>
+              </a:rPr>
+              <a:t>모순을 </a:t>
+            </a:r>
+            <a:r>
+              <a:rPr lang="ko-KR" altLang="en-US" sz="900" dirty="0" smtClean="0">
+                <a:solidFill>
+                  <a:srgbClr val="FFFFFF"/>
+                </a:solidFill>
+                <a:latin typeface="Arial"/>
+              </a:rPr>
+              <a:t>구조적으로 해소할 </a:t>
+            </a:r>
+            <a:r>
+              <a:rPr lang="ko-KR" altLang="en-US" sz="900" dirty="0">
+                <a:solidFill>
+                  <a:srgbClr val="FFFFFF"/>
+                </a:solidFill>
+                <a:latin typeface="Arial"/>
+              </a:rPr>
+              <a:t>수 없음</a:t>
+            </a:r>
+            <a:endParaRPr lang="en-US" sz="900" dirty="0">
+              <a:solidFill>
+                <a:srgbClr val="FFFFFF"/>
+              </a:solidFill>
+              <a:latin typeface="Arial"/>
+            </a:endParaRPr>
           </a:p>
           <a:p>
-            <a:r>
-              <a:rPr sz="1000">
+            <a:pPr marL="171450" indent="-171450">
+              <a:buFont typeface="Arial" panose="020B0604020202020204" pitchFamily="34" charset="0"/>
+              <a:buChar char="•"/>
+            </a:pPr>
+            <a:r>
+              <a:rPr lang="ko-KR" altLang="en-US" sz="900" dirty="0">
                 <a:solidFill>
                   <a:srgbClr val="FFFFFF"/>
                 </a:solidFill>
                 <a:latin typeface="Arial"/>
               </a:rPr>
-              <a:t/>
-            </a:r>
+              <a:t>동일 주제의 반복 </a:t>
+            </a:r>
+            <a:r>
+              <a:rPr lang="ko-KR" altLang="en-US" sz="900" dirty="0" smtClean="0">
+                <a:solidFill>
+                  <a:srgbClr val="FFFFFF"/>
+                </a:solidFill>
+                <a:latin typeface="Arial"/>
+              </a:rPr>
+              <a:t>적재 </a:t>
+            </a:r>
+            <a:r>
+              <a:rPr lang="en-US" altLang="ko-KR" sz="900" dirty="0" smtClean="0">
+                <a:solidFill>
+                  <a:srgbClr val="FFFFFF"/>
+                </a:solidFill>
+                <a:latin typeface="Arial"/>
+              </a:rPr>
+              <a:t>: v1/v2 </a:t>
+            </a:r>
+            <a:r>
+              <a:rPr lang="ko-KR" altLang="en-US" sz="900" dirty="0" err="1">
+                <a:solidFill>
+                  <a:srgbClr val="FFFFFF"/>
+                </a:solidFill>
+                <a:latin typeface="Arial"/>
+              </a:rPr>
+              <a:t>후속본이</a:t>
+            </a:r>
+            <a:r>
+              <a:rPr lang="ko-KR" altLang="en-US" sz="900" dirty="0">
+                <a:solidFill>
+                  <a:srgbClr val="FFFFFF"/>
+                </a:solidFill>
+                <a:latin typeface="Arial"/>
+              </a:rPr>
+              <a:t> 별도 페이지로 분기되거나</a:t>
+            </a:r>
+            <a:r>
+              <a:rPr lang="en-US" altLang="ko-KR" sz="900" dirty="0">
+                <a:solidFill>
+                  <a:srgbClr val="FFFFFF"/>
+                </a:solidFill>
+                <a:latin typeface="Arial"/>
+              </a:rPr>
+              <a:t>, </a:t>
+            </a:r>
+            <a:r>
+              <a:rPr lang="ko-KR" altLang="en-US" sz="900" dirty="0">
+                <a:solidFill>
+                  <a:srgbClr val="FFFFFF"/>
+                </a:solidFill>
+                <a:latin typeface="Arial"/>
+              </a:rPr>
+              <a:t>일괄 병합 </a:t>
+            </a:r>
+            <a:r>
+              <a:rPr lang="ko-KR" altLang="en-US" sz="900" dirty="0" smtClean="0">
+                <a:solidFill>
+                  <a:srgbClr val="FFFFFF"/>
+                </a:solidFill>
+                <a:latin typeface="Arial"/>
+              </a:rPr>
+              <a:t>과정에서 정보 </a:t>
+            </a:r>
+            <a:r>
+              <a:rPr lang="ko-KR" altLang="en-US" sz="900" dirty="0">
+                <a:solidFill>
+                  <a:srgbClr val="FFFFFF"/>
+                </a:solidFill>
+                <a:latin typeface="Arial"/>
+              </a:rPr>
+              <a:t>손실 발생</a:t>
+            </a:r>
+            <a:r>
+              <a:rPr sz="900" dirty="0" smtClean="0">
+                <a:solidFill>
+                  <a:srgbClr val="FFFFFF"/>
+                </a:solidFill>
+                <a:latin typeface="Arial"/>
+              </a:rPr>
+              <a:t>· </a:t>
+            </a:r>
+            <a:endParaRPr lang="en-US" sz="900" dirty="0" smtClean="0">
+              <a:solidFill>
+                <a:srgbClr val="FFFFFF"/>
+              </a:solidFill>
+              <a:latin typeface="Arial"/>
+            </a:endParaRPr>
           </a:p>
           <a:p>
-            <a:r>
-              <a:rPr sz="1000">
+            <a:pPr marL="171450" indent="-171450">
+              <a:buFont typeface="Arial" panose="020B0604020202020204" pitchFamily="34" charset="0"/>
+              <a:buChar char="•"/>
+            </a:pPr>
+            <a:r>
+              <a:rPr lang="ko-KR" altLang="en-US" sz="900" dirty="0" err="1">
                 <a:solidFill>
                   <a:srgbClr val="FFFFFF"/>
                 </a:solidFill>
                 <a:latin typeface="Arial"/>
               </a:rPr>
-              <a:t>· 같은 주제 v1/v2 → 중복 페이지 또는 병합 시 정보 누락</a:t>
-            </a:r>
+              <a:t>다도메인</a:t>
+            </a:r>
+            <a:r>
+              <a:rPr lang="ko-KR" altLang="en-US" sz="900" dirty="0">
+                <a:solidFill>
+                  <a:srgbClr val="FFFFFF"/>
+                </a:solidFill>
+                <a:latin typeface="Arial"/>
+              </a:rPr>
+              <a:t> 복합 </a:t>
+            </a:r>
+            <a:r>
+              <a:rPr lang="ko-KR" altLang="en-US" sz="900" dirty="0" smtClean="0">
+                <a:solidFill>
+                  <a:srgbClr val="FFFFFF"/>
+                </a:solidFill>
+                <a:latin typeface="Arial"/>
+              </a:rPr>
+              <a:t>문서 </a:t>
+            </a:r>
+            <a:r>
+              <a:rPr lang="en-US" altLang="ko-KR" sz="900" dirty="0" smtClean="0">
+                <a:solidFill>
+                  <a:srgbClr val="FFFFFF"/>
+                </a:solidFill>
+                <a:latin typeface="Arial"/>
+              </a:rPr>
+              <a:t>: </a:t>
+            </a:r>
+            <a:r>
+              <a:rPr lang="ko-KR" altLang="en-US" sz="900" dirty="0" smtClean="0">
+                <a:solidFill>
+                  <a:srgbClr val="FFFFFF"/>
+                </a:solidFill>
+                <a:latin typeface="Arial"/>
+              </a:rPr>
+              <a:t>단일 </a:t>
+            </a:r>
+            <a:r>
+              <a:rPr lang="ko-KR" altLang="en-US" sz="900" dirty="0">
+                <a:solidFill>
+                  <a:srgbClr val="FFFFFF"/>
+                </a:solidFill>
+                <a:latin typeface="Arial"/>
+              </a:rPr>
+              <a:t>페이지로 통합되어 </a:t>
+            </a:r>
+            <a:r>
+              <a:rPr lang="ko-KR" altLang="en-US" sz="900" dirty="0" err="1">
+                <a:solidFill>
+                  <a:srgbClr val="FFFFFF"/>
+                </a:solidFill>
+                <a:latin typeface="Arial"/>
+              </a:rPr>
+              <a:t>도메인별</a:t>
+            </a:r>
+            <a:r>
+              <a:rPr lang="ko-KR" altLang="en-US" sz="900" dirty="0">
+                <a:solidFill>
+                  <a:srgbClr val="FFFFFF"/>
+                </a:solidFill>
+                <a:latin typeface="Arial"/>
+              </a:rPr>
+              <a:t> 검색</a:t>
+            </a:r>
+            <a:r>
+              <a:rPr lang="en-US" altLang="ko-KR" sz="900" dirty="0">
+                <a:solidFill>
+                  <a:srgbClr val="FFFFFF"/>
+                </a:solidFill>
+                <a:latin typeface="Arial"/>
+              </a:rPr>
+              <a:t>·</a:t>
+            </a:r>
+            <a:r>
+              <a:rPr lang="ko-KR" altLang="en-US" sz="900" dirty="0">
+                <a:solidFill>
+                  <a:srgbClr val="FFFFFF"/>
+                </a:solidFill>
+                <a:latin typeface="Arial"/>
+              </a:rPr>
+              <a:t>재사용 정밀도 </a:t>
+            </a:r>
+            <a:r>
+              <a:rPr lang="ko-KR" altLang="en-US" sz="900" dirty="0" smtClean="0">
+                <a:solidFill>
+                  <a:srgbClr val="FFFFFF"/>
+                </a:solidFill>
+                <a:latin typeface="Arial"/>
+              </a:rPr>
+              <a:t>저하</a:t>
+            </a:r>
+            <a:endParaRPr lang="en-US" sz="900" dirty="0" smtClean="0">
+              <a:solidFill>
+                <a:srgbClr val="FFFFFF"/>
+              </a:solidFill>
+              <a:latin typeface="Arial"/>
+            </a:endParaRPr>
           </a:p>
           <a:p>
-            <a:r>
-              <a:rPr sz="1000">
+            <a:pPr marL="171450" indent="-171450">
+              <a:buFont typeface="Arial" panose="020B0604020202020204" pitchFamily="34" charset="0"/>
+              <a:buChar char="•"/>
+            </a:pPr>
+            <a:r>
+              <a:rPr lang="ko-KR" altLang="en-US" sz="900" dirty="0">
                 <a:solidFill>
                   <a:srgbClr val="FFFFFF"/>
                 </a:solidFill>
                 <a:latin typeface="Arial"/>
               </a:rPr>
-              <a:t>· 다도메인 문서 → 한 페이지 욱여넣기로 검색 흐려짐</a:t>
-            </a:r>
-          </a:p>
-          <a:p>
-            <a:r>
-              <a:rPr sz="1000">
+              <a:t>벡터 유사도 단독 </a:t>
+            </a:r>
+            <a:r>
+              <a:rPr lang="ko-KR" altLang="en-US" sz="900" dirty="0" smtClean="0">
                 <a:solidFill>
                   <a:srgbClr val="FFFFFF"/>
                 </a:solidFill>
                 <a:latin typeface="Arial"/>
               </a:rPr>
-              <a:t>· 벡터 유사도 단독 → false-positive 잘못된 합병</a:t>
-            </a:r>
+              <a:t>판정 </a:t>
+            </a:r>
+            <a:r>
+              <a:rPr lang="en-US" altLang="ko-KR" sz="900" dirty="0" smtClean="0">
+                <a:solidFill>
+                  <a:srgbClr val="FFFFFF"/>
+                </a:solidFill>
+                <a:latin typeface="Arial"/>
+              </a:rPr>
+              <a:t>: </a:t>
+            </a:r>
+            <a:r>
+              <a:rPr lang="ko-KR" altLang="en-US" sz="900" dirty="0" smtClean="0">
+                <a:solidFill>
+                  <a:srgbClr val="FFFFFF"/>
+                </a:solidFill>
+                <a:latin typeface="Arial"/>
+              </a:rPr>
+              <a:t>거리 </a:t>
+            </a:r>
+            <a:r>
+              <a:rPr lang="ko-KR" altLang="en-US" sz="900" dirty="0">
+                <a:solidFill>
+                  <a:srgbClr val="FFFFFF"/>
+                </a:solidFill>
+                <a:latin typeface="Arial"/>
+              </a:rPr>
+              <a:t>임계값만으로는 의미적 동일성 식별에 </a:t>
+            </a:r>
+            <a:r>
+              <a:rPr lang="ko-KR" altLang="en-US" sz="900" dirty="0" smtClean="0">
+                <a:solidFill>
+                  <a:srgbClr val="FFFFFF"/>
+                </a:solidFill>
+                <a:latin typeface="Arial"/>
+              </a:rPr>
+              <a:t>한계</a:t>
+            </a:r>
+            <a:r>
+              <a:rPr lang="en-US" altLang="ko-KR" sz="900" dirty="0">
+                <a:solidFill>
+                  <a:srgbClr val="FFFFFF"/>
+                </a:solidFill>
+                <a:latin typeface="Arial"/>
+              </a:rPr>
+              <a:t> </a:t>
+            </a:r>
+            <a:r>
+              <a:rPr lang="en-US" altLang="ko-KR" sz="900" dirty="0" smtClean="0">
+                <a:solidFill>
+                  <a:srgbClr val="FFFFFF"/>
+                </a:solidFill>
+                <a:latin typeface="Arial"/>
+              </a:rPr>
+              <a:t> </a:t>
+            </a:r>
+            <a:r>
+              <a:rPr lang="en-US" altLang="ko-KR" sz="900" dirty="0">
+                <a:solidFill>
+                  <a:srgbClr val="FFFFFF"/>
+                </a:solidFill>
+                <a:latin typeface="Arial"/>
+              </a:rPr>
+              <a:t>false-positive </a:t>
+            </a:r>
+            <a:r>
+              <a:rPr lang="ko-KR" altLang="en-US" sz="900" dirty="0">
+                <a:solidFill>
+                  <a:srgbClr val="FFFFFF"/>
+                </a:solidFill>
+                <a:latin typeface="Arial"/>
+              </a:rPr>
+              <a:t>합병 발생</a:t>
+            </a:r>
+            <a:endParaRPr sz="900" dirty="0">
+              <a:solidFill>
+                <a:srgbClr val="FFFFFF"/>
+              </a:solidFill>
+              <a:latin typeface="Arial"/>
+            </a:endParaRPr>
           </a:p>
         </p:txBody>
       </p:sp>
@@ -4043,155 +7725,954 @@
           <a:bodyPr wrap="square" lIns="0" tIns="0" rIns="0" bIns="0" rtlCol="0" anchor="t"/>
           <a:lstStyle/>
           <a:p>
-            <a:pPr marL="0" indent="0">
+            <a:pPr marL="0" indent="0" algn="ctr">
               <a:buNone/>
             </a:pPr>
             <a:r>
-              <a:rPr sz="900" b="1">
-                <a:solidFill>
-                  <a:srgbClr val="333333"/>
-                </a:solidFill>
-                <a:latin typeface="Arial"/>
-              </a:rPr>
-              <a:t>LangGraph StateGraph 13 노드 위에 다음 세 가지 핵심 구조를 설계</a:t>
-            </a:r>
+              <a:rPr sz="1050" b="1" dirty="0" err="1">
+                <a:solidFill>
+                  <a:srgbClr val="FF0000"/>
+                </a:solidFill>
+                <a:latin typeface="Arial"/>
+              </a:rPr>
+              <a:t>LangGraph</a:t>
+            </a:r>
+            <a:r>
+              <a:rPr sz="1050" b="1" dirty="0">
+                <a:solidFill>
+                  <a:srgbClr val="FF0000"/>
+                </a:solidFill>
+                <a:latin typeface="Arial"/>
+              </a:rPr>
+              <a:t> </a:t>
+            </a:r>
+            <a:r>
+              <a:rPr sz="1050" b="1" dirty="0" err="1" smtClean="0">
+                <a:solidFill>
+                  <a:srgbClr val="FF0000"/>
+                </a:solidFill>
+                <a:latin typeface="Arial"/>
+              </a:rPr>
+              <a:t>노드</a:t>
+            </a:r>
+            <a:r>
+              <a:rPr sz="1050" b="1" dirty="0" smtClean="0">
+                <a:solidFill>
+                  <a:srgbClr val="FF0000"/>
+                </a:solidFill>
+                <a:latin typeface="Arial"/>
+              </a:rPr>
+              <a:t> </a:t>
+            </a:r>
+            <a:r>
+              <a:rPr sz="1050" b="1" dirty="0" err="1">
+                <a:solidFill>
+                  <a:srgbClr val="FF0000"/>
+                </a:solidFill>
+                <a:latin typeface="Arial"/>
+              </a:rPr>
+              <a:t>위에</a:t>
+            </a:r>
+            <a:r>
+              <a:rPr sz="1050" b="1" dirty="0">
+                <a:solidFill>
+                  <a:srgbClr val="FF0000"/>
+                </a:solidFill>
+                <a:latin typeface="Arial"/>
+              </a:rPr>
+              <a:t> </a:t>
+            </a:r>
+            <a:r>
+              <a:rPr sz="1050" b="1" dirty="0" err="1">
+                <a:solidFill>
+                  <a:srgbClr val="FF0000"/>
+                </a:solidFill>
+                <a:latin typeface="Arial"/>
+              </a:rPr>
+              <a:t>다음</a:t>
+            </a:r>
+            <a:r>
+              <a:rPr sz="1050" b="1" dirty="0">
+                <a:solidFill>
+                  <a:srgbClr val="FF0000"/>
+                </a:solidFill>
+                <a:latin typeface="Arial"/>
+              </a:rPr>
+              <a:t> 세 </a:t>
+            </a:r>
+            <a:r>
+              <a:rPr sz="1050" b="1" dirty="0" err="1">
+                <a:solidFill>
+                  <a:srgbClr val="FF0000"/>
+                </a:solidFill>
+                <a:latin typeface="Arial"/>
+              </a:rPr>
+              <a:t>가지</a:t>
+            </a:r>
+            <a:r>
+              <a:rPr sz="1050" b="1" dirty="0">
+                <a:solidFill>
+                  <a:srgbClr val="FF0000"/>
+                </a:solidFill>
+                <a:latin typeface="Arial"/>
+              </a:rPr>
+              <a:t> </a:t>
+            </a:r>
+            <a:r>
+              <a:rPr sz="1050" b="1" dirty="0" err="1">
+                <a:solidFill>
+                  <a:srgbClr val="FF0000"/>
+                </a:solidFill>
+                <a:latin typeface="Arial"/>
+              </a:rPr>
+              <a:t>핵심</a:t>
+            </a:r>
+            <a:r>
+              <a:rPr sz="1050" b="1" dirty="0">
+                <a:solidFill>
+                  <a:srgbClr val="FF0000"/>
+                </a:solidFill>
+                <a:latin typeface="Arial"/>
+              </a:rPr>
+              <a:t> </a:t>
+            </a:r>
+            <a:r>
+              <a:rPr sz="1050" b="1" dirty="0" err="1">
+                <a:solidFill>
+                  <a:srgbClr val="FF0000"/>
+                </a:solidFill>
+                <a:latin typeface="Arial"/>
+              </a:rPr>
+              <a:t>구조를</a:t>
+            </a:r>
+            <a:r>
+              <a:rPr sz="1050" b="1" dirty="0">
+                <a:solidFill>
+                  <a:srgbClr val="FF0000"/>
+                </a:solidFill>
+                <a:latin typeface="Arial"/>
+              </a:rPr>
+              <a:t> </a:t>
+            </a:r>
+            <a:r>
+              <a:rPr sz="1050" b="1" dirty="0" err="1">
+                <a:solidFill>
+                  <a:srgbClr val="FF0000"/>
+                </a:solidFill>
+                <a:latin typeface="Arial"/>
+              </a:rPr>
+              <a:t>설계</a:t>
+            </a:r>
+            <a:endParaRPr lang="en-US" sz="1050" b="1" dirty="0">
+              <a:solidFill>
+                <a:srgbClr val="FF0000"/>
+              </a:solidFill>
+            </a:endParaRPr>
+          </a:p>
+          <a:p>
             <a:endParaRPr lang="en-US" sz="900" dirty="0"/>
           </a:p>
           <a:p>
             <a:r>
-              <a:rPr sz="900" b="1">
-                <a:solidFill>
-                  <a:srgbClr val="333333"/>
-                </a:solidFill>
-                <a:latin typeface="Arial"/>
-              </a:rPr>
-              <a:t/>
-            </a:r>
+              <a:rPr sz="900" b="1" dirty="0">
+                <a:solidFill>
+                  <a:srgbClr val="333333"/>
+                </a:solidFill>
+                <a:latin typeface="Arial"/>
+              </a:rPr>
+              <a:t>· </a:t>
+            </a:r>
+            <a:r>
+              <a:rPr lang="en-US" sz="1050" b="1" dirty="0">
+                <a:solidFill>
+                  <a:srgbClr val="333333"/>
+                </a:solidFill>
+                <a:latin typeface="Arial"/>
+              </a:rPr>
+              <a:t>V</a:t>
+            </a:r>
+            <a:r>
+              <a:rPr sz="1050" b="1" dirty="0" smtClean="0">
+                <a:solidFill>
+                  <a:srgbClr val="333333"/>
+                </a:solidFill>
+                <a:latin typeface="Arial"/>
+              </a:rPr>
+              <a:t>erify </a:t>
+            </a:r>
+            <a:r>
+              <a:rPr lang="en-US" sz="1050" b="1" dirty="0" smtClean="0">
+                <a:solidFill>
+                  <a:srgbClr val="333333"/>
+                </a:solidFill>
+                <a:latin typeface="Arial"/>
+              </a:rPr>
+              <a:t>&amp;</a:t>
+            </a:r>
+            <a:r>
+              <a:rPr sz="1050" b="1" dirty="0" smtClean="0">
+                <a:solidFill>
+                  <a:srgbClr val="333333"/>
+                </a:solidFill>
+                <a:latin typeface="Arial"/>
+              </a:rPr>
+              <a:t> </a:t>
+            </a:r>
+            <a:r>
+              <a:rPr lang="en-US" sz="1050" b="1" dirty="0">
+                <a:solidFill>
+                  <a:srgbClr val="333333"/>
+                </a:solidFill>
+                <a:latin typeface="Arial"/>
+              </a:rPr>
+              <a:t>M</a:t>
+            </a:r>
+            <a:r>
+              <a:rPr sz="1050" b="1" dirty="0" smtClean="0">
+                <a:solidFill>
+                  <a:srgbClr val="333333"/>
+                </a:solidFill>
+                <a:latin typeface="Arial"/>
+              </a:rPr>
+              <a:t>erge </a:t>
+            </a:r>
+            <a:r>
+              <a:rPr sz="1050" b="1" dirty="0" err="1">
+                <a:solidFill>
+                  <a:srgbClr val="333333"/>
+                </a:solidFill>
+                <a:latin typeface="Arial"/>
+              </a:rPr>
+              <a:t>피드백</a:t>
+            </a:r>
+            <a:r>
+              <a:rPr sz="1050" b="1" dirty="0">
+                <a:solidFill>
+                  <a:srgbClr val="333333"/>
+                </a:solidFill>
+                <a:latin typeface="Arial"/>
+              </a:rPr>
+              <a:t> </a:t>
+            </a:r>
+            <a:r>
+              <a:rPr sz="1050" b="1" dirty="0" err="1" smtClean="0">
+                <a:solidFill>
+                  <a:srgbClr val="333333"/>
+                </a:solidFill>
+                <a:latin typeface="Arial"/>
+              </a:rPr>
+              <a:t>루프</a:t>
+            </a:r>
+            <a:endParaRPr lang="en-US" sz="1050" b="1" dirty="0" smtClean="0">
+              <a:solidFill>
+                <a:srgbClr val="333333"/>
+              </a:solidFill>
+              <a:latin typeface="Arial"/>
+            </a:endParaRPr>
           </a:p>
           <a:p>
             <a:r>
-              <a:rPr sz="900" b="1">
-                <a:solidFill>
-                  <a:srgbClr val="333333"/>
-                </a:solidFill>
-                <a:latin typeface="Arial"/>
-              </a:rPr>
-              <a:t>· verify ↺ merge 피드백 루프</a:t>
-            </a:r>
+              <a:rPr lang="en-US" altLang="ko-KR" sz="1100" b="1" dirty="0">
+                <a:solidFill>
+                  <a:srgbClr val="333333"/>
+                </a:solidFill>
+                <a:latin typeface="Arial"/>
+              </a:rPr>
+              <a:t> </a:t>
+            </a:r>
+            <a:r>
+              <a:rPr lang="en-US" altLang="ko-KR" sz="1100" b="1" dirty="0" smtClean="0">
+                <a:solidFill>
+                  <a:srgbClr val="333333"/>
+                </a:solidFill>
+                <a:latin typeface="Arial"/>
+              </a:rPr>
+              <a:t>  </a:t>
+            </a:r>
+            <a:r>
+              <a:rPr lang="en-US" altLang="ko-KR" sz="900" b="1" dirty="0" smtClean="0">
+                <a:solidFill>
+                  <a:srgbClr val="333333"/>
+                </a:solidFill>
+                <a:latin typeface="Arial"/>
+              </a:rPr>
+              <a:t>1. </a:t>
+            </a:r>
+            <a:r>
+              <a:rPr lang="ko-KR" altLang="en-US" sz="900" b="1" dirty="0" smtClean="0">
+                <a:solidFill>
+                  <a:srgbClr val="333333"/>
+                </a:solidFill>
+                <a:latin typeface="Arial"/>
+              </a:rPr>
+              <a:t>병합 </a:t>
+            </a:r>
+            <a:r>
+              <a:rPr lang="ko-KR" altLang="en-US" sz="900" b="1" dirty="0">
+                <a:solidFill>
+                  <a:srgbClr val="333333"/>
+                </a:solidFill>
+                <a:latin typeface="Arial"/>
+              </a:rPr>
+              <a:t>결과의 커버리지를 </a:t>
+            </a:r>
+            <a:r>
+              <a:rPr lang="en-US" altLang="ko-KR" sz="900" b="1" dirty="0">
+                <a:solidFill>
+                  <a:srgbClr val="333333"/>
+                </a:solidFill>
+                <a:latin typeface="Arial"/>
+              </a:rPr>
+              <a:t>LLM</a:t>
+            </a:r>
+            <a:r>
+              <a:rPr lang="ko-KR" altLang="en-US" sz="900" b="1" dirty="0">
+                <a:solidFill>
+                  <a:srgbClr val="333333"/>
+                </a:solidFill>
+                <a:latin typeface="Arial"/>
+              </a:rPr>
+              <a:t>이 정량 </a:t>
+            </a:r>
+            <a:r>
+              <a:rPr lang="ko-KR" altLang="en-US" sz="900" b="1" dirty="0" smtClean="0">
+                <a:solidFill>
+                  <a:srgbClr val="333333"/>
+                </a:solidFill>
+                <a:latin typeface="Arial"/>
+              </a:rPr>
+              <a:t>평가</a:t>
+            </a:r>
+            <a:r>
+              <a:rPr lang="en-US" altLang="ko-KR" sz="900" b="1" dirty="0" smtClean="0">
+                <a:solidFill>
+                  <a:srgbClr val="333333"/>
+                </a:solidFill>
+                <a:latin typeface="Arial"/>
+              </a:rPr>
+              <a:t>, </a:t>
+            </a:r>
+            <a:r>
+              <a:rPr lang="ko-KR" altLang="en-US" sz="900" b="1" dirty="0" err="1">
+                <a:solidFill>
+                  <a:srgbClr val="333333"/>
+                </a:solidFill>
+                <a:latin typeface="Arial"/>
+              </a:rPr>
+              <a:t>미충족</a:t>
+            </a:r>
+            <a:r>
+              <a:rPr lang="ko-KR" altLang="en-US" sz="900" b="1" dirty="0">
+                <a:solidFill>
+                  <a:srgbClr val="333333"/>
+                </a:solidFill>
+                <a:latin typeface="Arial"/>
+              </a:rPr>
+              <a:t> </a:t>
+            </a:r>
+            <a:r>
+              <a:rPr lang="ko-KR" altLang="en-US" sz="900" b="1" dirty="0" smtClean="0">
+                <a:solidFill>
+                  <a:srgbClr val="333333"/>
+                </a:solidFill>
+                <a:latin typeface="Arial"/>
+              </a:rPr>
+              <a:t>시 </a:t>
+            </a:r>
+            <a:r>
+              <a:rPr lang="en-US" altLang="ko-KR" sz="900" b="1" dirty="0" smtClean="0">
+                <a:solidFill>
+                  <a:srgbClr val="333333"/>
+                </a:solidFill>
+                <a:latin typeface="Arial"/>
+              </a:rPr>
+              <a:t>conditional </a:t>
+            </a:r>
+            <a:r>
+              <a:rPr lang="en-US" altLang="ko-KR" sz="900" b="1" dirty="0">
+                <a:solidFill>
+                  <a:srgbClr val="333333"/>
+                </a:solidFill>
+                <a:latin typeface="Arial"/>
+              </a:rPr>
+              <a:t>edge</a:t>
+            </a:r>
+            <a:r>
+              <a:rPr lang="ko-KR" altLang="en-US" sz="900" b="1" dirty="0">
+                <a:solidFill>
+                  <a:srgbClr val="333333"/>
+                </a:solidFill>
+                <a:latin typeface="Arial"/>
+              </a:rPr>
+              <a:t>로 </a:t>
+            </a:r>
+            <a:r>
+              <a:rPr lang="ko-KR" altLang="en-US" sz="900" b="1" dirty="0" smtClean="0">
+                <a:solidFill>
+                  <a:srgbClr val="333333"/>
+                </a:solidFill>
+                <a:latin typeface="Arial"/>
+              </a:rPr>
+              <a:t>   </a:t>
+            </a:r>
+            <a:r>
+              <a:rPr lang="en-US" altLang="ko-KR" sz="900" b="1" dirty="0" smtClean="0">
+                <a:solidFill>
+                  <a:srgbClr val="333333"/>
+                </a:solidFill>
+                <a:latin typeface="Arial"/>
+              </a:rPr>
+              <a:t/>
+            </a:r>
+            <a:br>
+              <a:rPr lang="en-US" altLang="ko-KR" sz="900" b="1" dirty="0" smtClean="0">
+                <a:solidFill>
+                  <a:srgbClr val="333333"/>
+                </a:solidFill>
+                <a:latin typeface="Arial"/>
+              </a:rPr>
+            </a:br>
+            <a:r>
+              <a:rPr lang="en-US" altLang="ko-KR" sz="900" b="1" dirty="0" smtClean="0">
+                <a:solidFill>
+                  <a:srgbClr val="333333"/>
+                </a:solidFill>
+                <a:latin typeface="Arial"/>
+              </a:rPr>
+              <a:t>        merge </a:t>
+            </a:r>
+            <a:r>
+              <a:rPr lang="ko-KR" altLang="en-US" sz="900" b="1" dirty="0" smtClean="0">
+                <a:solidFill>
+                  <a:srgbClr val="333333"/>
+                </a:solidFill>
+                <a:latin typeface="Arial"/>
+              </a:rPr>
+              <a:t>노드에 </a:t>
+            </a:r>
+            <a:r>
+              <a:rPr lang="en-US" altLang="ko-KR" sz="900" b="1" dirty="0">
+                <a:solidFill>
+                  <a:srgbClr val="333333"/>
+                </a:solidFill>
+                <a:latin typeface="Arial"/>
+              </a:rPr>
+              <a:t>1</a:t>
+            </a:r>
+            <a:r>
+              <a:rPr lang="ko-KR" altLang="en-US" sz="900" b="1" dirty="0">
+                <a:solidFill>
+                  <a:srgbClr val="333333"/>
+                </a:solidFill>
+                <a:latin typeface="Arial"/>
+              </a:rPr>
+              <a:t>회 자동 재진입</a:t>
+            </a:r>
+            <a:r>
+              <a:rPr sz="900" b="1" dirty="0" smtClean="0">
+                <a:solidFill>
+                  <a:srgbClr val="333333"/>
+                </a:solidFill>
+                <a:latin typeface="Arial"/>
+              </a:rPr>
+              <a:t>  </a:t>
+            </a:r>
+            <a:endParaRPr lang="en-US" sz="900" b="1" dirty="0" smtClean="0">
+              <a:solidFill>
+                <a:srgbClr val="333333"/>
+              </a:solidFill>
+              <a:latin typeface="Arial"/>
+            </a:endParaRPr>
           </a:p>
           <a:p>
             <a:r>
-              <a:rPr sz="900" b="1">
-                <a:solidFill>
-                  <a:srgbClr val="333333"/>
-                </a:solidFill>
-                <a:latin typeface="Arial"/>
-              </a:rPr>
-              <a:t>  병합 직후 LLM이 양쪽 본문의 커버리지를 정량 계산하고, 부족 시 conditional edge로 merge 단계에 1회 자동 회귀.</a:t>
-            </a:r>
+              <a:rPr lang="ko-KR" altLang="en-US" sz="900" b="1" dirty="0" smtClean="0">
+                <a:solidFill>
+                  <a:srgbClr val="333333"/>
+                </a:solidFill>
+                <a:latin typeface="Arial"/>
+              </a:rPr>
+              <a:t>    </a:t>
+            </a:r>
+            <a:r>
+              <a:rPr lang="en-US" altLang="ko-KR" sz="900" b="1" dirty="0" smtClean="0">
+                <a:solidFill>
+                  <a:srgbClr val="333333"/>
+                </a:solidFill>
+                <a:latin typeface="Arial"/>
+              </a:rPr>
+              <a:t>2. </a:t>
+            </a:r>
+            <a:r>
+              <a:rPr lang="ko-KR" altLang="en-US" sz="900" b="1" dirty="0" smtClean="0">
+                <a:solidFill>
+                  <a:srgbClr val="333333"/>
+                </a:solidFill>
+                <a:latin typeface="Arial"/>
+              </a:rPr>
+              <a:t>단일 </a:t>
+            </a:r>
+            <a:r>
+              <a:rPr lang="ko-KR" altLang="en-US" sz="900" b="1" dirty="0">
+                <a:solidFill>
+                  <a:srgbClr val="333333"/>
+                </a:solidFill>
+                <a:latin typeface="Arial"/>
+              </a:rPr>
+              <a:t>호출 병합 대비 정보 누락이 </a:t>
+            </a:r>
+            <a:r>
+              <a:rPr lang="en-US" altLang="ko-KR" sz="900" b="1" dirty="0">
+                <a:solidFill>
+                  <a:srgbClr val="333333"/>
+                </a:solidFill>
+                <a:latin typeface="Arial"/>
+              </a:rPr>
+              <a:t>0</a:t>
+            </a:r>
+            <a:r>
+              <a:rPr lang="ko-KR" altLang="en-US" sz="900" b="1" dirty="0">
+                <a:solidFill>
+                  <a:srgbClr val="333333"/>
+                </a:solidFill>
+                <a:latin typeface="Arial"/>
+              </a:rPr>
+              <a:t>건으로 </a:t>
+            </a:r>
+            <a:r>
+              <a:rPr lang="ko-KR" altLang="en-US" sz="900" b="1" dirty="0" smtClean="0">
+                <a:solidFill>
+                  <a:srgbClr val="333333"/>
+                </a:solidFill>
+                <a:latin typeface="Arial"/>
+              </a:rPr>
+              <a:t>수렴</a:t>
+            </a:r>
+            <a:endParaRPr lang="en-US" altLang="ko-KR" sz="900" b="1" dirty="0" smtClean="0">
+              <a:solidFill>
+                <a:srgbClr val="333333"/>
+              </a:solidFill>
+              <a:latin typeface="Arial"/>
+            </a:endParaRPr>
           </a:p>
           <a:p>
             <a:r>
-              <a:rPr sz="900" b="1">
-                <a:solidFill>
-                  <a:srgbClr val="333333"/>
-                </a:solidFill>
-                <a:latin typeface="Arial"/>
-              </a:rPr>
-              <a:t>  단순 1-shot 병합 대비 누락률 0으로 수렴.</a:t>
-            </a:r>
+              <a:rPr lang="en-US" altLang="ko-KR" sz="800" b="1" dirty="0" smtClean="0">
+                <a:solidFill>
+                  <a:srgbClr val="333333"/>
+                </a:solidFill>
+                <a:latin typeface="Arial"/>
+              </a:rPr>
+              <a:t/>
+            </a:r>
+            <a:br>
+              <a:rPr lang="en-US" altLang="ko-KR" sz="800" b="1" dirty="0" smtClean="0">
+                <a:solidFill>
+                  <a:srgbClr val="333333"/>
+                </a:solidFill>
+                <a:latin typeface="Arial"/>
+              </a:rPr>
+            </a:br>
+            <a:endParaRPr sz="900" b="1" dirty="0">
+              <a:solidFill>
+                <a:srgbClr val="333333"/>
+              </a:solidFill>
+              <a:latin typeface="Arial"/>
+            </a:endParaRPr>
           </a:p>
           <a:p>
             <a:r>
-              <a:rPr sz="900" b="1">
-                <a:solidFill>
-                  <a:srgbClr val="333333"/>
-                </a:solidFill>
-                <a:latin typeface="Arial"/>
-              </a:rPr>
-              <a:t/>
-            </a:r>
+              <a:rPr sz="900" b="1" dirty="0">
+                <a:solidFill>
+                  <a:srgbClr val="333333"/>
+                </a:solidFill>
+                <a:latin typeface="Arial"/>
+              </a:rPr>
+              <a:t>· </a:t>
+            </a:r>
+            <a:r>
+              <a:rPr lang="en-US" sz="900" b="1" dirty="0">
+                <a:solidFill>
+                  <a:srgbClr val="333333"/>
+                </a:solidFill>
+                <a:latin typeface="Arial"/>
+              </a:rPr>
+              <a:t>D</a:t>
+            </a:r>
+            <a:r>
+              <a:rPr sz="1050" b="1" dirty="0" smtClean="0">
+                <a:solidFill>
+                  <a:srgbClr val="333333"/>
+                </a:solidFill>
+                <a:latin typeface="Arial"/>
+              </a:rPr>
+              <a:t>ecompose </a:t>
+            </a:r>
+            <a:r>
+              <a:rPr sz="1050" b="1" dirty="0" err="1">
+                <a:solidFill>
+                  <a:srgbClr val="333333"/>
+                </a:solidFill>
+                <a:latin typeface="Arial"/>
+              </a:rPr>
+              <a:t>도메인</a:t>
+            </a:r>
+            <a:r>
+              <a:rPr sz="1050" b="1" dirty="0">
+                <a:solidFill>
+                  <a:srgbClr val="333333"/>
+                </a:solidFill>
+                <a:latin typeface="Arial"/>
+              </a:rPr>
+              <a:t> </a:t>
+            </a:r>
+            <a:r>
+              <a:rPr sz="1050" b="1" dirty="0" err="1">
+                <a:solidFill>
+                  <a:srgbClr val="333333"/>
+                </a:solidFill>
+                <a:latin typeface="Arial"/>
+              </a:rPr>
+              <a:t>분해</a:t>
+            </a:r>
+            <a:r>
+              <a:rPr sz="1050" b="1" dirty="0">
+                <a:solidFill>
+                  <a:srgbClr val="333333"/>
+                </a:solidFill>
+                <a:latin typeface="Arial"/>
+              </a:rPr>
+              <a:t> </a:t>
+            </a:r>
+            <a:r>
+              <a:rPr sz="1050" b="1" dirty="0" err="1">
+                <a:solidFill>
+                  <a:srgbClr val="333333"/>
+                </a:solidFill>
+                <a:latin typeface="Arial"/>
+              </a:rPr>
+              <a:t>분기</a:t>
+            </a:r>
+            <a:endParaRPr sz="1050" b="1" dirty="0">
+              <a:solidFill>
+                <a:srgbClr val="333333"/>
+              </a:solidFill>
+              <a:latin typeface="Arial"/>
+            </a:endParaRPr>
           </a:p>
           <a:p>
             <a:r>
-              <a:rPr sz="900" b="1">
-                <a:solidFill>
-                  <a:srgbClr val="333333"/>
-                </a:solidFill>
-                <a:latin typeface="Arial"/>
-              </a:rPr>
-              <a:t>· decompose 도메인 분해 분기</a:t>
-            </a:r>
+              <a:rPr lang="en-US" altLang="ko-KR" sz="900" b="1" dirty="0" smtClean="0">
+                <a:solidFill>
+                  <a:srgbClr val="333333"/>
+                </a:solidFill>
+                <a:latin typeface="Arial"/>
+              </a:rPr>
+              <a:t>   1. </a:t>
+            </a:r>
+            <a:r>
+              <a:rPr lang="ko-KR" altLang="en-US" sz="900" b="1" dirty="0" err="1" smtClean="0">
+                <a:solidFill>
+                  <a:srgbClr val="333333"/>
+                </a:solidFill>
+                <a:latin typeface="Arial"/>
+              </a:rPr>
+              <a:t>다도메인</a:t>
+            </a:r>
+            <a:r>
+              <a:rPr lang="ko-KR" altLang="en-US" sz="900" b="1" dirty="0" smtClean="0">
+                <a:solidFill>
+                  <a:srgbClr val="333333"/>
+                </a:solidFill>
+                <a:latin typeface="Arial"/>
+              </a:rPr>
+              <a:t> </a:t>
+            </a:r>
+            <a:r>
+              <a:rPr lang="ko-KR" altLang="en-US" sz="900" b="1" dirty="0">
+                <a:solidFill>
+                  <a:srgbClr val="333333"/>
+                </a:solidFill>
+                <a:latin typeface="Arial"/>
+              </a:rPr>
+              <a:t>문서를 </a:t>
+            </a:r>
+            <a:r>
+              <a:rPr lang="en-US" altLang="ko-KR" sz="900" b="1" dirty="0">
+                <a:solidFill>
+                  <a:srgbClr val="333333"/>
+                </a:solidFill>
+                <a:latin typeface="Arial"/>
+              </a:rPr>
+              <a:t>LLM</a:t>
+            </a:r>
+            <a:r>
+              <a:rPr lang="ko-KR" altLang="en-US" sz="900" b="1" dirty="0">
+                <a:solidFill>
+                  <a:srgbClr val="333333"/>
+                </a:solidFill>
+                <a:latin typeface="Arial"/>
+              </a:rPr>
+              <a:t>이 도메인 경계로 분해 </a:t>
+            </a:r>
+            <a:r>
+              <a:rPr lang="en-US" altLang="ko-KR" sz="900" b="1" dirty="0">
+                <a:solidFill>
+                  <a:srgbClr val="333333"/>
+                </a:solidFill>
+                <a:latin typeface="Arial"/>
+              </a:rPr>
+              <a:t>— </a:t>
+            </a:r>
+            <a:r>
+              <a:rPr lang="ko-KR" altLang="en-US" sz="900" b="1" dirty="0" err="1">
+                <a:solidFill>
+                  <a:srgbClr val="333333"/>
+                </a:solidFill>
+                <a:latin typeface="Arial"/>
+              </a:rPr>
+              <a:t>도메인별</a:t>
+            </a:r>
+            <a:r>
+              <a:rPr lang="ko-KR" altLang="en-US" sz="900" b="1" dirty="0">
+                <a:solidFill>
+                  <a:srgbClr val="333333"/>
+                </a:solidFill>
+                <a:latin typeface="Arial"/>
+              </a:rPr>
+              <a:t> </a:t>
+            </a:r>
+            <a:r>
+              <a:rPr lang="ko-KR" altLang="en-US" sz="900" b="1" dirty="0" smtClean="0">
+                <a:solidFill>
+                  <a:srgbClr val="333333"/>
+                </a:solidFill>
+                <a:latin typeface="Arial"/>
+              </a:rPr>
+              <a:t>병렬로 처리</a:t>
+            </a:r>
+            <a:endParaRPr sz="900" b="1" dirty="0">
+              <a:solidFill>
+                <a:srgbClr val="333333"/>
+              </a:solidFill>
+              <a:latin typeface="Arial"/>
+            </a:endParaRPr>
           </a:p>
           <a:p>
             <a:r>
-              <a:rPr sz="900" b="1">
-                <a:solidFill>
-                  <a:srgbClr val="333333"/>
-                </a:solidFill>
-                <a:latin typeface="Arial"/>
-              </a:rPr>
-              <a:t>  복합 도메인 문서를 LLM이 도메인 단위로 식별하고, child run 으로 split해 병렬 처리.</a:t>
-            </a:r>
+              <a:rPr sz="900" b="1" dirty="0">
+                <a:solidFill>
+                  <a:srgbClr val="333333"/>
+                </a:solidFill>
+                <a:latin typeface="Arial"/>
+              </a:rPr>
+              <a:t>  </a:t>
+            </a:r>
+            <a:r>
+              <a:rPr lang="en-US" sz="900" b="1" dirty="0" smtClean="0">
+                <a:solidFill>
+                  <a:srgbClr val="333333"/>
+                </a:solidFill>
+                <a:latin typeface="Arial"/>
+              </a:rPr>
+              <a:t> 2. </a:t>
+            </a:r>
+            <a:r>
+              <a:rPr lang="ko-KR" altLang="en-US" sz="900" b="1" dirty="0" smtClean="0">
+                <a:solidFill>
+                  <a:srgbClr val="333333"/>
+                </a:solidFill>
+                <a:latin typeface="Arial"/>
+              </a:rPr>
+              <a:t>단일 </a:t>
+            </a:r>
+            <a:r>
+              <a:rPr lang="ko-KR" altLang="en-US" sz="900" b="1" dirty="0">
+                <a:solidFill>
+                  <a:srgbClr val="333333"/>
+                </a:solidFill>
+                <a:latin typeface="Arial"/>
+              </a:rPr>
+              <a:t>페이지 통합 방식 대비 도메인 검색</a:t>
+            </a:r>
+            <a:r>
+              <a:rPr lang="en-US" altLang="ko-KR" sz="900" b="1" dirty="0">
+                <a:solidFill>
+                  <a:srgbClr val="333333"/>
+                </a:solidFill>
+                <a:latin typeface="Arial"/>
+              </a:rPr>
+              <a:t>·</a:t>
+            </a:r>
+            <a:r>
+              <a:rPr lang="ko-KR" altLang="en-US" sz="900" b="1" dirty="0">
+                <a:solidFill>
+                  <a:srgbClr val="333333"/>
+                </a:solidFill>
+                <a:latin typeface="Arial"/>
+              </a:rPr>
+              <a:t>재사용 정밀도 </a:t>
+            </a:r>
+            <a:r>
+              <a:rPr lang="ko-KR" altLang="en-US" sz="900" b="1" dirty="0" smtClean="0">
+                <a:solidFill>
+                  <a:srgbClr val="333333"/>
+                </a:solidFill>
+                <a:latin typeface="Arial"/>
+              </a:rPr>
+              <a:t>향상</a:t>
+            </a:r>
+            <a:endParaRPr lang="en-US" altLang="ko-KR" sz="900" b="1" dirty="0" smtClean="0">
+              <a:solidFill>
+                <a:srgbClr val="333333"/>
+              </a:solidFill>
+              <a:latin typeface="Arial"/>
+            </a:endParaRPr>
           </a:p>
           <a:p>
             <a:r>
-              <a:rPr sz="900" b="1">
-                <a:solidFill>
-                  <a:srgbClr val="333333"/>
-                </a:solidFill>
-                <a:latin typeface="Arial"/>
-              </a:rPr>
-              <a:t>  한 페이지 욱여넣기를 해소해 검색·재사용 정밀도 향상.</a:t>
-            </a:r>
+              <a:rPr lang="en-US" altLang="ko-KR" sz="800" b="1" dirty="0" smtClean="0">
+                <a:solidFill>
+                  <a:srgbClr val="333333"/>
+                </a:solidFill>
+                <a:latin typeface="Arial"/>
+              </a:rPr>
+              <a:t/>
+            </a:r>
+            <a:br>
+              <a:rPr lang="en-US" altLang="ko-KR" sz="800" b="1" dirty="0" smtClean="0">
+                <a:solidFill>
+                  <a:srgbClr val="333333"/>
+                </a:solidFill>
+                <a:latin typeface="Arial"/>
+              </a:rPr>
+            </a:br>
+            <a:endParaRPr sz="900" b="1" dirty="0">
+              <a:solidFill>
+                <a:srgbClr val="333333"/>
+              </a:solidFill>
+              <a:latin typeface="Arial"/>
+            </a:endParaRPr>
           </a:p>
           <a:p>
             <a:r>
-              <a:rPr sz="900" b="1">
-                <a:solidFill>
-                  <a:srgbClr val="333333"/>
-                </a:solidFill>
-                <a:latin typeface="Arial"/>
-              </a:rPr>
-              <a:t/>
-            </a:r>
+              <a:rPr sz="1050" b="1" dirty="0">
+                <a:solidFill>
+                  <a:srgbClr val="333333"/>
+                </a:solidFill>
+                <a:latin typeface="Arial"/>
+              </a:rPr>
+              <a:t>· </a:t>
+            </a:r>
+            <a:r>
+              <a:rPr sz="1050" b="1" dirty="0" err="1">
+                <a:solidFill>
+                  <a:srgbClr val="333333"/>
+                </a:solidFill>
+                <a:latin typeface="Arial"/>
+              </a:rPr>
+              <a:t>벡터</a:t>
+            </a:r>
+            <a:r>
+              <a:rPr sz="1050" b="1" dirty="0">
+                <a:solidFill>
+                  <a:srgbClr val="333333"/>
+                </a:solidFill>
+                <a:latin typeface="Arial"/>
+              </a:rPr>
+              <a:t> + LLM 2단계 </a:t>
+            </a:r>
+            <a:r>
+              <a:rPr sz="1050" b="1" dirty="0" err="1">
+                <a:solidFill>
+                  <a:srgbClr val="333333"/>
+                </a:solidFill>
+                <a:latin typeface="Arial"/>
+              </a:rPr>
+              <a:t>동일성</a:t>
+            </a:r>
+            <a:r>
+              <a:rPr sz="1050" b="1" dirty="0">
+                <a:solidFill>
+                  <a:srgbClr val="333333"/>
+                </a:solidFill>
+                <a:latin typeface="Arial"/>
+              </a:rPr>
+              <a:t> </a:t>
+            </a:r>
+            <a:r>
+              <a:rPr sz="1050" b="1" dirty="0" err="1">
+                <a:solidFill>
+                  <a:srgbClr val="333333"/>
+                </a:solidFill>
+                <a:latin typeface="Arial"/>
+              </a:rPr>
+              <a:t>판정</a:t>
+            </a:r>
+            <a:endParaRPr sz="1050" b="1" dirty="0">
+              <a:solidFill>
+                <a:srgbClr val="333333"/>
+              </a:solidFill>
+              <a:latin typeface="Arial"/>
+            </a:endParaRPr>
           </a:p>
           <a:p>
             <a:r>
-              <a:rPr sz="900" b="1">
-                <a:solidFill>
-                  <a:srgbClr val="333333"/>
-                </a:solidFill>
-                <a:latin typeface="Arial"/>
-              </a:rPr>
-              <a:t>· 벡터 + LLM 2단계 동일성 판정</a:t>
-            </a:r>
-          </a:p>
-          <a:p>
-            <a:r>
-              <a:rPr sz="900" b="1">
-                <a:solidFill>
-                  <a:srgbClr val="333333"/>
-                </a:solidFill>
-                <a:latin typeface="Arial"/>
-              </a:rPr>
-              <a:t>  Chroma 거리 게이트로 후보를 추리고 LLM judge가 의미적 동일성을 재결정.</a:t>
-            </a:r>
-          </a:p>
-          <a:p>
-            <a:r>
-              <a:rPr sz="900" b="1">
-                <a:solidFill>
-                  <a:srgbClr val="333333"/>
-                </a:solidFill>
-                <a:latin typeface="Arial"/>
-              </a:rPr>
-              <a:t>  거리 단독 임계값의 false-positive 를 LLM이 보정해 잘못된 합병 0건.</a:t>
-            </a:r>
-          </a:p>
-          <a:p>
-            <a:r>
-              <a:rPr sz="900" b="1">
+              <a:rPr lang="en-US" sz="900" b="1" dirty="0" smtClean="0">
+                <a:solidFill>
+                  <a:srgbClr val="333333"/>
+                </a:solidFill>
+                <a:latin typeface="Arial"/>
+              </a:rPr>
+              <a:t>   1. </a:t>
+            </a:r>
+            <a:r>
+              <a:rPr lang="en-US" altLang="ko-KR" sz="900" b="1" dirty="0">
+                <a:solidFill>
+                  <a:srgbClr val="333333"/>
+                </a:solidFill>
+                <a:latin typeface="Arial"/>
+              </a:rPr>
+              <a:t>Chroma </a:t>
+            </a:r>
+            <a:r>
+              <a:rPr lang="ko-KR" altLang="en-US" sz="900" b="1" dirty="0">
+                <a:solidFill>
+                  <a:srgbClr val="333333"/>
+                </a:solidFill>
+                <a:latin typeface="Arial"/>
+              </a:rPr>
+              <a:t>거리 게이트로 후보를 추출 </a:t>
+            </a:r>
+            <a:r>
+              <a:rPr lang="en-US" altLang="ko-KR" sz="900" b="1" dirty="0">
+                <a:solidFill>
+                  <a:srgbClr val="333333"/>
+                </a:solidFill>
+                <a:latin typeface="Arial"/>
+              </a:rPr>
+              <a:t>— LLM judge </a:t>
+            </a:r>
+            <a:r>
+              <a:rPr lang="ko-KR" altLang="en-US" sz="900" b="1" dirty="0">
+                <a:solidFill>
+                  <a:srgbClr val="333333"/>
+                </a:solidFill>
+                <a:latin typeface="Arial"/>
+              </a:rPr>
+              <a:t>가 </a:t>
+            </a:r>
+            <a:r>
+              <a:rPr lang="ko-KR" altLang="en-US" sz="900" b="1" dirty="0" smtClean="0">
+                <a:solidFill>
+                  <a:srgbClr val="333333"/>
+                </a:solidFill>
+                <a:latin typeface="Arial"/>
+              </a:rPr>
+              <a:t>의미적 동일성을 </a:t>
+            </a:r>
+            <a:r>
+              <a:rPr lang="en-US" altLang="ko-KR" sz="900" b="1" dirty="0" smtClean="0">
                 <a:solidFill>
                   <a:srgbClr val="333333"/>
                 </a:solidFill>
@@ -4199,28 +8680,163 @@
               </a:rPr>
               <a:t/>
             </a:r>
-          </a:p>
-          <a:p>
-            <a:r>
-              <a:rPr sz="900" b="1">
-                <a:solidFill>
-                  <a:srgbClr val="333333"/>
-                </a:solidFill>
-                <a:latin typeface="Arial"/>
-              </a:rPr>
-              <a:t>부가  ·  충돌 정책 4종 (llm_merge / manual / prefer_incoming / prefer_existing)</a:t>
-            </a:r>
-          </a:p>
-          <a:p>
-            <a:r>
-              <a:rPr sz="900" b="1">
-                <a:solidFill>
-                  <a:srgbClr val="333333"/>
-                </a:solidFill>
-                <a:latin typeface="Arial"/>
-              </a:rPr>
-              <a:t>         의미 엣지 9종 + 상·중·하 신뢰도로 그래프 저장</a:t>
-            </a:r>
+            <a:br>
+              <a:rPr lang="en-US" altLang="ko-KR" sz="900" b="1" dirty="0" smtClean="0">
+                <a:solidFill>
+                  <a:srgbClr val="333333"/>
+                </a:solidFill>
+                <a:latin typeface="Arial"/>
+              </a:rPr>
+            </a:br>
+            <a:r>
+              <a:rPr lang="en-US" altLang="ko-KR" sz="900" b="1" dirty="0" smtClean="0">
+                <a:solidFill>
+                  <a:srgbClr val="333333"/>
+                </a:solidFill>
+                <a:latin typeface="Arial"/>
+              </a:rPr>
+              <a:t>       </a:t>
+            </a:r>
+            <a:r>
+              <a:rPr lang="ko-KR" altLang="en-US" sz="900" b="1" dirty="0" smtClean="0">
+                <a:solidFill>
+                  <a:srgbClr val="333333"/>
+                </a:solidFill>
+                <a:latin typeface="Arial"/>
+              </a:rPr>
+              <a:t>재판정</a:t>
+            </a:r>
+            <a:r>
+              <a:rPr sz="900" b="1" dirty="0" smtClean="0">
+                <a:solidFill>
+                  <a:srgbClr val="333333"/>
+                </a:solidFill>
+                <a:latin typeface="Arial"/>
+              </a:rPr>
+              <a:t>  </a:t>
+            </a:r>
+            <a:r>
+              <a:rPr lang="en-US" sz="900" b="1" dirty="0" smtClean="0">
+                <a:solidFill>
+                  <a:srgbClr val="333333"/>
+                </a:solidFill>
+                <a:latin typeface="Arial"/>
+              </a:rPr>
+              <a:t/>
+            </a:r>
+            <a:br>
+              <a:rPr lang="en-US" sz="900" b="1" dirty="0" smtClean="0">
+                <a:solidFill>
+                  <a:srgbClr val="333333"/>
+                </a:solidFill>
+                <a:latin typeface="Arial"/>
+              </a:rPr>
+            </a:br>
+            <a:r>
+              <a:rPr lang="en-US" sz="900" b="1" dirty="0" smtClean="0">
+                <a:solidFill>
+                  <a:srgbClr val="333333"/>
+                </a:solidFill>
+                <a:latin typeface="Arial"/>
+              </a:rPr>
+              <a:t>   2. </a:t>
+            </a:r>
+            <a:r>
+              <a:rPr lang="ko-KR" altLang="en-US" sz="900" b="1" dirty="0" smtClean="0">
+                <a:solidFill>
+                  <a:srgbClr val="333333"/>
+                </a:solidFill>
+                <a:latin typeface="Arial"/>
+              </a:rPr>
+              <a:t>단</a:t>
+            </a:r>
+            <a:r>
+              <a:rPr lang="ko-KR" altLang="en-US" sz="900" b="1" dirty="0" smtClean="0">
+                <a:solidFill>
+                  <a:srgbClr val="333333"/>
+                </a:solidFill>
+                <a:latin typeface="Arial"/>
+              </a:rPr>
+              <a:t>일 </a:t>
+            </a:r>
+            <a:r>
+              <a:rPr lang="ko-KR" altLang="en-US" sz="900" b="1" dirty="0">
+                <a:solidFill>
+                  <a:srgbClr val="333333"/>
+                </a:solidFill>
+                <a:latin typeface="Arial"/>
+              </a:rPr>
+              <a:t>거리 </a:t>
+            </a:r>
+            <a:r>
+              <a:rPr lang="ko-KR" altLang="en-US" sz="900" b="1" dirty="0" err="1">
+                <a:solidFill>
+                  <a:srgbClr val="333333"/>
+                </a:solidFill>
+                <a:latin typeface="Arial"/>
+              </a:rPr>
+              <a:t>임계값</a:t>
+            </a:r>
+            <a:r>
+              <a:rPr lang="ko-KR" altLang="en-US" sz="900" b="1" dirty="0">
+                <a:solidFill>
+                  <a:srgbClr val="333333"/>
+                </a:solidFill>
+                <a:latin typeface="Arial"/>
+              </a:rPr>
+              <a:t> 방식 대비 </a:t>
+            </a:r>
+            <a:r>
+              <a:rPr lang="en-US" altLang="ko-KR" sz="900" b="1" dirty="0">
+                <a:solidFill>
+                  <a:srgbClr val="333333"/>
+                </a:solidFill>
+                <a:latin typeface="Arial"/>
+              </a:rPr>
+              <a:t>false-positive </a:t>
+            </a:r>
+            <a:r>
+              <a:rPr lang="ko-KR" altLang="en-US" sz="900" b="1" dirty="0">
+                <a:solidFill>
+                  <a:srgbClr val="333333"/>
+                </a:solidFill>
+                <a:latin typeface="Arial"/>
+              </a:rPr>
+              <a:t>합병이 </a:t>
+            </a:r>
+            <a:r>
+              <a:rPr lang="en-US" altLang="ko-KR" sz="900" b="1" dirty="0">
+                <a:solidFill>
+                  <a:srgbClr val="333333"/>
+                </a:solidFill>
+                <a:latin typeface="Arial"/>
+              </a:rPr>
+              <a:t>0</a:t>
+            </a:r>
+            <a:r>
+              <a:rPr lang="ko-KR" altLang="en-US" sz="900" b="1" dirty="0">
+                <a:solidFill>
+                  <a:srgbClr val="333333"/>
+                </a:solidFill>
+                <a:latin typeface="Arial"/>
+              </a:rPr>
+              <a:t>건으로 </a:t>
+            </a:r>
+            <a:r>
+              <a:rPr lang="ko-KR" altLang="en-US" sz="900" b="1" dirty="0" smtClean="0">
+                <a:solidFill>
+                  <a:srgbClr val="333333"/>
+                </a:solidFill>
+                <a:latin typeface="Arial"/>
+              </a:rPr>
+              <a:t>수렴</a:t>
+            </a:r>
+            <a:endParaRPr sz="900" b="1" dirty="0">
+              <a:solidFill>
+                <a:srgbClr val="333333"/>
+              </a:solidFill>
+              <a:latin typeface="Arial"/>
+            </a:endParaRPr>
           </a:p>
         </p:txBody>
       </p:sp>
@@ -4454,7 +9070,7 @@
                 <a:buNone/>
               </a:pPr>
               <a:r>
-                <a:rPr sz="1800" b="1">
+                <a:rPr sz="1800" b="1" dirty="0">
                   <a:solidFill>
                     <a:srgbClr val="1A365D"/>
                   </a:solidFill>
@@ -4514,25 +9130,88 @@
                 <a:buNone/>
               </a:pPr>
               <a:r>
-                <a:rPr sz="850" b="1">
+                <a:rPr sz="850" b="1" dirty="0" err="1">
                   <a:solidFill>
                     <a:srgbClr val="1A365D"/>
                   </a:solidFill>
                   <a:latin typeface="Arial"/>
                 </a:rPr>
-                <a:t>처리 속도</a:t>
+                <a:t>처리</a:t>
+              </a:r>
+              <a:r>
+                <a:rPr sz="850" b="1" dirty="0">
+                  <a:solidFill>
+                    <a:srgbClr val="1A365D"/>
+                  </a:solidFill>
+                  <a:latin typeface="Arial"/>
+                </a:rPr>
+                <a:t> </a:t>
+              </a:r>
+              <a:r>
+                <a:rPr sz="850" b="1" dirty="0" err="1">
+                  <a:solidFill>
+                    <a:srgbClr val="1A365D"/>
+                  </a:solidFill>
+                  <a:latin typeface="Arial"/>
+                </a:rPr>
+                <a:t>속도</a:t>
               </a:r>
               <a:endParaRPr lang="en-US" sz="850" dirty="0"/>
             </a:p>
             <a:p>
               <a:r>
-                <a:rPr sz="850" b="1">
+                <a:rPr sz="850" b="1" dirty="0" err="1">
                   <a:solidFill>
                     <a:srgbClr val="1A365D"/>
                   </a:solidFill>
                   <a:latin typeface="Arial"/>
                 </a:rPr>
-                <a:t>수동 ~30분 → 자동 ~30초/건</a:t>
+                <a:t>수동</a:t>
+              </a:r>
+              <a:r>
+                <a:rPr sz="850" b="1" dirty="0">
+                  <a:solidFill>
+                    <a:srgbClr val="1A365D"/>
+                  </a:solidFill>
+                  <a:latin typeface="Arial"/>
+                </a:rPr>
+                <a:t> ~30분 </a:t>
+              </a:r>
+              <a:r>
+                <a:rPr lang="en-US" altLang="ko-KR" sz="850" b="1" dirty="0" smtClean="0">
+                  <a:solidFill>
+                    <a:srgbClr val="1A365D"/>
+                  </a:solidFill>
+                  <a:latin typeface="Arial"/>
+                </a:rPr>
+                <a:t>&gt;</a:t>
+              </a:r>
+              <a:r>
+                <a:rPr sz="850" b="1" dirty="0" smtClean="0">
+                  <a:solidFill>
+                    <a:srgbClr val="1A365D"/>
+                  </a:solidFill>
+                  <a:latin typeface="Arial"/>
+                </a:rPr>
+                <a:t> </a:t>
+              </a:r>
+              <a:r>
+                <a:rPr sz="850" b="1" dirty="0" err="1">
+                  <a:solidFill>
+                    <a:srgbClr val="1A365D"/>
+                  </a:solidFill>
+                  <a:latin typeface="Arial"/>
+                </a:rPr>
+                <a:t>자동</a:t>
+              </a:r>
+              <a:r>
+                <a:rPr sz="850" b="1" dirty="0">
+                  <a:solidFill>
+                    <a:srgbClr val="1A365D"/>
+                  </a:solidFill>
+                  <a:latin typeface="Arial"/>
+                </a:rPr>
+                <a:t> ~30초/건</a:t>
               </a:r>
             </a:p>
           </p:txBody>
@@ -4587,7 +9266,7 @@
                 <a:buNone/>
               </a:pPr>
               <a:r>
-                <a:rPr sz="1800" b="1">
+                <a:rPr sz="1800" b="1" dirty="0">
                   <a:solidFill>
                     <a:srgbClr val="1A365D"/>
                   </a:solidFill>
@@ -4647,26 +9326,77 @@
                 <a:buNone/>
               </a:pPr>
               <a:r>
-                <a:rPr sz="850" b="1">
+                <a:rPr sz="850" b="1" dirty="0" err="1">
                   <a:solidFill>
                     <a:srgbClr val="1A365D"/>
                   </a:solidFill>
                   <a:latin typeface="Arial"/>
                 </a:rPr>
-                <a:t>병합 커버리지</a:t>
+                <a:t>병합</a:t>
+              </a:r>
+              <a:r>
+                <a:rPr sz="850" b="1" dirty="0">
+                  <a:solidFill>
+                    <a:srgbClr val="1A365D"/>
+                  </a:solidFill>
+                  <a:latin typeface="Arial"/>
+                </a:rPr>
+                <a:t> </a:t>
+              </a:r>
+              <a:r>
+                <a:rPr sz="850" b="1" dirty="0" err="1">
+                  <a:solidFill>
+                    <a:srgbClr val="1A365D"/>
+                  </a:solidFill>
+                  <a:latin typeface="Arial"/>
+                </a:rPr>
+                <a:t>커버리지</a:t>
               </a:r>
               <a:endParaRPr lang="en-US" sz="850" dirty="0"/>
             </a:p>
             <a:p>
               <a:r>
-                <a:rPr sz="850" b="1">
+                <a:rPr sz="850" b="1" dirty="0">
                   <a:solidFill>
                     <a:srgbClr val="1A365D"/>
                   </a:solidFill>
                   <a:latin typeface="Arial"/>
                 </a:rPr>
-                <a:t>verify ↺ merge 재시도</a:t>
+                <a:t>verify </a:t>
               </a:r>
+              <a:r>
+                <a:rPr lang="en-US" sz="850" b="1" dirty="0" smtClean="0">
+                  <a:solidFill>
+                    <a:srgbClr val="1A365D"/>
+                  </a:solidFill>
+                  <a:latin typeface="Arial"/>
+                </a:rPr>
+                <a:t>&amp; </a:t>
+              </a:r>
+              <a:r>
+                <a:rPr sz="850" b="1" dirty="0" smtClean="0">
+                  <a:solidFill>
+                    <a:srgbClr val="1A365D"/>
+                  </a:solidFill>
+                  <a:latin typeface="Arial"/>
+                </a:rPr>
+                <a:t>merge </a:t>
+              </a:r>
+              <a:r>
+                <a:rPr sz="850" b="1" dirty="0" err="1">
+                  <a:solidFill>
+                    <a:srgbClr val="1A365D"/>
+                  </a:solidFill>
+                  <a:latin typeface="Arial"/>
+                </a:rPr>
+                <a:t>재시도</a:t>
+              </a:r>
+              <a:endParaRPr sz="850" b="1" dirty="0">
+                <a:solidFill>
+                  <a:srgbClr val="1A365D"/>
+                </a:solidFill>
+                <a:latin typeface="Arial"/>
+              </a:endParaRPr>
             </a:p>
           </p:txBody>
         </p:sp>
@@ -4678,7 +9408,7 @@
           </p:nvSpPr>
           <p:spPr>
             <a:xfrm>
-              <a:off x="4773168" y="3986784"/>
+              <a:off x="4782313" y="3986784"/>
               <a:ext cx="4023360" cy="813816"/>
             </a:xfrm>
             <a:prstGeom prst="rect">
@@ -4780,31 +9510,226 @@
                 <a:buNone/>
               </a:pPr>
               <a:r>
-                <a:rPr sz="850" b="1">
+                <a:rPr sz="850" b="1" dirty="0" err="1">
                   <a:solidFill>
                     <a:srgbClr val="1A365D"/>
                   </a:solidFill>
                   <a:latin typeface="Arial"/>
                 </a:rPr>
-                <a:t>중복 false-positive</a:t>
+                <a:t>중복</a:t>
+              </a:r>
+              <a:r>
+                <a:rPr sz="850" b="1" dirty="0">
+                  <a:solidFill>
+                    <a:srgbClr val="1A365D"/>
+                  </a:solidFill>
+                  <a:latin typeface="Arial"/>
+                </a:rPr>
+                <a:t> false-positive</a:t>
               </a:r>
               <a:endParaRPr lang="en-US" sz="850" dirty="0"/>
             </a:p>
             <a:p>
               <a:r>
-                <a:rPr sz="850" b="1">
+                <a:rPr sz="850" b="1" dirty="0" err="1">
                   <a:solidFill>
                     <a:srgbClr val="1A365D"/>
                   </a:solidFill>
                   <a:latin typeface="Arial"/>
                 </a:rPr>
-                <a:t>벡터 + LLM 2단계 판정</a:t>
+                <a:t>벡터</a:t>
               </a:r>
+              <a:r>
+                <a:rPr sz="850" b="1" dirty="0">
+                  <a:solidFill>
+                    <a:srgbClr val="1A365D"/>
+                  </a:solidFill>
+                  <a:latin typeface="Arial"/>
+                </a:rPr>
+                <a:t> + LLM 2단계 </a:t>
+              </a:r>
+              <a:r>
+                <a:rPr sz="850" b="1" dirty="0" err="1">
+                  <a:solidFill>
+                    <a:srgbClr val="1A365D"/>
+                  </a:solidFill>
+                  <a:latin typeface="Arial"/>
+                </a:rPr>
+                <a:t>판정</a:t>
+              </a:r>
+              <a:endParaRPr sz="850" b="1" dirty="0">
+                <a:solidFill>
+                  <a:srgbClr val="1A365D"/>
+                </a:solidFill>
+                <a:latin typeface="Arial"/>
+              </a:endParaRPr>
             </a:p>
           </p:txBody>
         </p:sp>
       </p:grpSp>
     </p:spTree>
+  </p:cSld>
+  <p:clrMapOvr>
+    <a:masterClrMapping/>
+  </p:clrMapOvr>
+</p:sld>
+</file>
+
+<file path=ppt/slides/slide5.xml><?xml version="1.0" encoding="utf-8"?>
+<p:sld xmlns:a="http://schemas.openxmlformats.org/drawingml/2006/main" xmlns:r="http://schemas.openxmlformats.org/officeDocument/2006/relationships" xmlns:p="http://schemas.openxmlformats.org/presentationml/2006/main">
+  <p:cSld>
+    <p:spTree>
+      <p:nvGrpSpPr>
+        <p:cNvPr id="1" name=""/>
+        <p:cNvGrpSpPr/>
+        <p:nvPr/>
+      </p:nvGrpSpPr>
+      <p:grpSpPr>
+        <a:xfrm>
+          <a:off x="0" y="0"/>
+          <a:ext cx="0" cy="0"/>
+          <a:chOff x="0" y="0"/>
+          <a:chExt cx="0" cy="0"/>
+        </a:xfrm>
+      </p:grpSpPr>
+      <p:sp>
+        <p:nvSpPr>
+          <p:cNvPr id="2" name="Shape 0"/>
+          <p:cNvSpPr/>
+          <p:nvPr/>
+        </p:nvSpPr>
+        <p:spPr>
+          <a:xfrm>
+            <a:off x="256032" y="137160"/>
+            <a:ext cx="54864" cy="402336"/>
+          </a:xfrm>
+          <a:prstGeom prst="rect">
+            <a:avLst/>
+          </a:prstGeom>
+          <a:solidFill>
+            <a:srgbClr val="1A365D"/>
+          </a:solidFill>
+          <a:ln w="12700">
+            <a:solidFill>
+              <a:srgbClr val="1A365D"/>
+            </a:solidFill>
+            <a:prstDash val="solid"/>
+          </a:ln>
+        </p:spPr>
+      </p:sp>
+      <p:sp>
+        <p:nvSpPr>
+          <p:cNvPr id="3" name="Text 1"/>
+          <p:cNvSpPr/>
+          <p:nvPr/>
+        </p:nvSpPr>
+        <p:spPr>
+          <a:xfrm>
+            <a:off x="374904" y="137160"/>
+            <a:ext cx="6766560" cy="402336"/>
+          </a:xfrm>
+          <a:prstGeom prst="rect">
+            <a:avLst/>
+          </a:prstGeom>
+          <a:noFill/>
+          <a:ln/>
+        </p:spPr>
+        <p:txBody>
+          <a:bodyPr wrap="square" lIns="0" tIns="0" rIns="0" bIns="0" rtlCol="0" anchor="ctr"/>
+          <a:lstStyle/>
+          <a:p>
+            <a:pPr marL="0" indent="0">
+              <a:buNone/>
+            </a:pPr>
+            <a:r>
+              <a:rPr lang="en-US" sz="2200" b="1" dirty="0" smtClean="0"/>
+              <a:t>ERP System KPI </a:t>
+            </a:r>
+            <a:r>
+              <a:rPr lang="ko-KR" altLang="en-US" sz="2200" b="1" dirty="0" smtClean="0"/>
+              <a:t>지표 관리</a:t>
+            </a:r>
+            <a:endParaRPr lang="en-US" sz="2200" b="1" dirty="0"/>
+          </a:p>
+        </p:txBody>
+      </p:sp>
+      <p:sp>
+        <p:nvSpPr>
+          <p:cNvPr id="6" name="Shape 4"/>
+          <p:cNvSpPr/>
+          <p:nvPr/>
+        </p:nvSpPr>
+        <p:spPr>
+          <a:xfrm>
+            <a:off x="256032" y="576072"/>
+            <a:ext cx="8631936" cy="0"/>
+          </a:xfrm>
+          <a:prstGeom prst="line">
+            <a:avLst/>
+          </a:prstGeom>
+          <a:noFill/>
+          <a:ln w="12700">
+            <a:solidFill>
+              <a:srgbClr val="E5E5E5"/>
+            </a:solidFill>
+            <a:prstDash val="solid"/>
+          </a:ln>
+        </p:spPr>
+      </p:sp>
+      <p:sp>
+        <p:nvSpPr>
+          <p:cNvPr id="7" name="Shape 5"/>
+          <p:cNvSpPr/>
+          <p:nvPr/>
+        </p:nvSpPr>
+        <p:spPr>
+          <a:xfrm>
+            <a:off x="0" y="5029200"/>
+            <a:ext cx="9144000" cy="114300"/>
+          </a:xfrm>
+          <a:prstGeom prst="rect">
+            <a:avLst/>
+          </a:prstGeom>
+          <a:solidFill>
+            <a:srgbClr val="1A365D"/>
+          </a:solidFill>
+          <a:ln w="12700">
+            <a:solidFill>
+              <a:srgbClr val="1A365D"/>
+            </a:solidFill>
+            <a:prstDash val="solid"/>
+          </a:ln>
+        </p:spPr>
+      </p:sp>
+      <p:pic>
+        <p:nvPicPr>
+          <p:cNvPr id="31" name="그림 30"/>
+          <p:cNvPicPr>
+            <a:picLocks noChangeAspect="1"/>
+          </p:cNvPicPr>
+          <p:nvPr/>
+        </p:nvPicPr>
+        <p:blipFill rotWithShape="1">
+          <a:blip r:embed="rId3"/>
+          <a:srcRect l="29231" t="21581" r="17564" b="4573"/>
+          <a:stretch/>
+        </p:blipFill>
+        <p:spPr>
+          <a:xfrm>
+            <a:off x="733806" y="687325"/>
+            <a:ext cx="7676388" cy="4194047"/>
+          </a:xfrm>
+          <a:prstGeom prst="rect">
+            <a:avLst/>
+          </a:prstGeom>
+        </p:spPr>
+      </p:pic>
+    </p:spTree>
+    <p:extLst>
+      <p:ext uri="{BB962C8B-B14F-4D97-AF65-F5344CB8AC3E}">
+        <p14:creationId xmlns:p14="http://schemas.microsoft.com/office/powerpoint/2010/main" val="2684721299"/>
+      </p:ext>
+    </p:extLst>
   </p:cSld>
   <p:clrMapOvr>
     <a:masterClrMapping/>
